--- a/arduino-ppt/output/2-3_WS2812灯环_LCD1602.pptx
+++ b/arduino-ppt/output/2-3_WS2812灯环_LCD1602.pptx
@@ -136,12 +136,12 @@
   <p:extLst>
     <p:ext uri="{521415D9-36F7-43E2-AB2F-B90AF26B5E84}">
       <p14:sectionLst xmlns:p14="http://schemas.microsoft.com/office/powerpoint/2010/main">
-        <p14:section name="导入" id="{eb843d40-939e-8f64-2ede-5f228f63e686}">
+        <p14:section name="导入" id="{1f79a945-5cf5-2a32-5f32-93170cf888ab}">
           <p14:sldIdLst>
             <p14:sldId id="257"/>
           </p14:sldIdLst>
         </p14:section>
-        <p14:section name="实验一　WS2812b 灯环" id="{5b1d7aae-6e49-94e9-138e-d659d5d5491d}">
+        <p14:section name="实验一　WS2812b 灯环" id="{9b3dbcf8-43de-f5f0-9845-d4320e9d034b}">
           <p14:sldIdLst>
             <p14:sldId id="258"/>
             <p14:sldId id="259"/>
@@ -156,7 +156,7 @@
             <p14:sldId id="268"/>
           </p14:sldIdLst>
         </p14:section>
-        <p14:section name="实验二　LCD1602 显示屏" id="{32e9dca2-419e-d18f-33ef-5cb5256e5e3c}">
+        <p14:section name="实验二　LCD1602 显示屏" id="{c2a6de22-af4b-9f42-655c-14be9ee8d73e}">
           <p14:sldIdLst>
             <p14:sldId id="269"/>
             <p14:sldId id="270"/>
@@ -175,7 +175,7 @@
             <p14:sldId id="283"/>
           </p14:sldIdLst>
         </p14:section>
-        <p14:section name="小结" id="{7450b848-c2c0-4355-aa5a-e233966eaf88}">
+        <p14:section name="小结" id="{6c7d0aa8-1557-bedf-f85c-5bda7c21bf8b}">
           <p14:sldIdLst>
             <p14:sldId id="284"/>
             <p14:sldId id="285"/>
@@ -2873,7 +2873,7 @@
           <a:p>
             <a:r>
               <a:rPr lang="en-US" dirty="0"/>
-              <a:t>照接线表接三根线，接线前先拔掉 USB。灯环背面 4 根排针从左到右是 D、R、V、G：R 是信号输入，要接 10 号脚；D 是信号输出，这次空着不接。最常见的错误是把信号线插到了相邻的 D 脚上，灯就不会亮。</a:t>
+              <a:t>照接线表接三根线，接线前先拔掉 USB。从灯环正面看，4 根排针从左到右是 D、R、V、G：R 是信号输入，要接 10 号脚；D 是信号输出，这次空着不接。最常见的错误是把信号线插到了相邻的 D 脚上，灯就不会亮。</a:t>
             </a:r>
             <a:endParaRPr lang="en-US" dirty="0"/>
           </a:p>
@@ -6891,7 +6891,7 @@
         </p:nvSpPr>
         <p:spPr>
           <a:xfrm>
-            <a:off x="5413248" y="1932178"/>
+            <a:off x="5413248" y="1947672"/>
             <a:ext cx="723392" cy="219456"/>
           </a:xfrm>
           <a:prstGeom prst="roundRect">
@@ -6918,7 +6918,7 @@
         </p:nvSpPr>
         <p:spPr>
           <a:xfrm>
-            <a:off x="5413248" y="1932178"/>
+            <a:off x="5413248" y="1947672"/>
             <a:ext cx="723392" cy="219456"/>
           </a:xfrm>
           <a:prstGeom prst="rect">
@@ -6960,7 +6960,7 @@
         </p:nvSpPr>
         <p:spPr>
           <a:xfrm>
-            <a:off x="6228080" y="1923034"/>
+            <a:off x="6228080" y="1938528"/>
             <a:ext cx="2504440" cy="417576"/>
           </a:xfrm>
           <a:prstGeom prst="rect">
@@ -6988,7 +6988,27 @@
                 <a:ea typeface="微软雅黑" pitchFamily="34" charset="-122"/>
                 <a:cs typeface="微软雅黑" pitchFamily="34" charset="-120"/>
               </a:rPr>
-              <a:t>起外号：LED_Pin 是 10，PIXEL_COUNT 是 12；count 也是 12</a:t>
+              <a:t>起外号：信号脚 10、灯数 12</a:t>
+            </a:r>
+            <a:endParaRPr lang="en-US" sz="1200" dirty="0"/>
+          </a:p>
+          <a:p>
+            <a:pPr algn="l" indent="0" marL="0">
+              <a:lnSpc>
+                <a:spcPct val="110000"/>
+              </a:lnSpc>
+              <a:buNone/>
+            </a:pPr>
+            <a:r>
+              <a:rPr lang="en-US" sz="1200" dirty="0">
+                <a:solidFill>
+                  <a:srgbClr val="2D2D2D"/>
+                </a:solidFill>
+                <a:latin typeface="微软雅黑" pitchFamily="34" charset="0"/>
+                <a:ea typeface="微软雅黑" pitchFamily="34" charset="-122"/>
+                <a:cs typeface="微软雅黑" pitchFamily="34" charset="-120"/>
+              </a:rPr>
+              <a:t>变量 count 也存 12</a:t>
             </a:r>
             <a:endParaRPr lang="en-US" sz="1200" dirty="0"/>
           </a:p>
@@ -7335,7 +7355,7 @@
         </p:nvSpPr>
         <p:spPr>
           <a:xfrm>
-            <a:off x="5413248" y="3975354"/>
+            <a:off x="5413248" y="4030218"/>
             <a:ext cx="655828" cy="219456"/>
           </a:xfrm>
           <a:prstGeom prst="roundRect">
@@ -7362,7 +7382,7 @@
         </p:nvSpPr>
         <p:spPr>
           <a:xfrm>
-            <a:off x="5413248" y="3975354"/>
+            <a:off x="5413248" y="4030218"/>
             <a:ext cx="655828" cy="219456"/>
           </a:xfrm>
           <a:prstGeom prst="rect">
@@ -7404,7 +7424,7 @@
         </p:nvSpPr>
         <p:spPr>
           <a:xfrm>
-            <a:off x="6160516" y="3966210"/>
+            <a:off x="6160516" y="4021074"/>
             <a:ext cx="2572004" cy="256032"/>
           </a:xfrm>
           <a:prstGeom prst="rect">
@@ -9720,8 +9740,8 @@
         </p:nvSpPr>
         <p:spPr>
           <a:xfrm>
-            <a:off x="594360" y="4105656"/>
-            <a:ext cx="3017520" cy="374904"/>
+            <a:off x="594360" y="4069080"/>
+            <a:ext cx="3017520" cy="448056"/>
           </a:xfrm>
           <a:prstGeom prst="rect">
             <a:avLst/>
@@ -9748,7 +9768,7 @@
                 <a:ea typeface="微软雅黑" pitchFamily="34" charset="-122"/>
                 <a:cs typeface="微软雅黑" pitchFamily="34" charset="-120"/>
               </a:rPr>
-              <a:t>每转一圈多亮一颗。12 圈加起来不到 10 毫秒，眼睛看到的就是 12 颗“一起亮”。</a:t>
+              <a:t>每圈多亮一颗；12 圈不到 10 毫秒，看起来就是“一起亮”。</a:t>
             </a:r>
             <a:endParaRPr lang="en-US" sz="1200" dirty="0"/>
           </a:p>
@@ -11710,7 +11730,7 @@
                 <a:ea typeface="微软雅黑" pitchFamily="34" charset="-122"/>
                 <a:cs typeface="微软雅黑" pitchFamily="34" charset="-120"/>
               </a:rPr>
-              <a:t>灯不亮先查库和接线；跑通以后，改两三行代码，就能换颜色、做出“一颗颗亮起”的效果</a:t>
+              <a:t>灯不亮先查库和接线；跑通以后，改几行代码，就能换颜色、做出“一颗颗亮起”的效果</a:t>
             </a:r>
             <a:endParaRPr lang="en-US" sz="1200" dirty="0"/>
           </a:p>
@@ -12836,7 +12856,7 @@
                 <a:ea typeface="微软雅黑" pitchFamily="34" charset="-122"/>
                 <a:cs typeface="微软雅黑" pitchFamily="34" charset="-120"/>
               </a:rPr>
-              <a:t>一颗颗亮起，再全部熄灭</a:t>
+              <a:t>一颗颗亮起再全灭（高亮行为新增）</a:t>
             </a:r>
             <a:endParaRPr lang="en-US" sz="1250" dirty="0"/>
           </a:p>
@@ -12851,11 +12871,11 @@
         <p:spPr>
           <a:xfrm>
             <a:off x="4846320" y="3235452"/>
-            <a:ext cx="3703320" cy="1303020"/>
+            <a:ext cx="3703320" cy="1116330"/>
           </a:xfrm>
           <a:prstGeom prst="roundRect">
             <a:avLst>
-              <a:gd name="adj" fmla="val 5614"/>
+              <a:gd name="adj" fmla="val 6553"/>
             </a:avLst>
           </a:prstGeom>
           <a:solidFill>
@@ -12871,94 +12891,13 @@
       </p:sp>
       <p:sp>
         <p:nvSpPr>
-          <p:cNvPr id="32" name="Text 25"/>
-          <p:cNvSpPr txBox="1"/>
-          <p:nvPr/>
-        </p:nvSpPr>
-        <p:spPr>
-          <a:xfrm>
-            <a:off x="4992624" y="3326892"/>
-            <a:ext cx="3410712" cy="186690"/>
-          </a:xfrm>
-          <a:prstGeom prst="rect">
-            <a:avLst/>
-          </a:prstGeom>
-          <a:noFill/>
-          <a:ln/>
-        </p:spPr>
-        <p:txBody>
-          <a:bodyPr wrap="square" lIns="0" tIns="0" rIns="0" bIns="0" rtlCol="0" anchor="ctr"/>
-          <a:lstStyle/>
-          <a:p>
-            <a:pPr indent="0" marL="0">
-              <a:buNone/>
-            </a:pPr>
-            <a:r>
-              <a:rPr lang="en-US" sz="1050" dirty="0">
-                <a:solidFill>
-                  <a:srgbClr val="D9D9D9"/>
-                </a:solidFill>
-                <a:latin typeface="Consolas" pitchFamily="34" charset="0"/>
-                <a:ea typeface="Consolas" pitchFamily="34" charset="-122"/>
-                <a:cs typeface="Consolas" pitchFamily="34" charset="-120"/>
-              </a:rPr>
-              <a:t>    pixels</a:t>
-            </a:r>
-            <a:pPr indent="0" marL="0">
-              <a:buNone/>
-            </a:pPr>
-            <a:r>
-              <a:rPr lang="en-US" sz="1050" dirty="0">
-                <a:solidFill>
-                  <a:srgbClr val="BDBDBD"/>
-                </a:solidFill>
-                <a:latin typeface="Consolas" pitchFamily="34" charset="0"/>
-                <a:ea typeface="Consolas" pitchFamily="34" charset="-122"/>
-                <a:cs typeface="Consolas" pitchFamily="34" charset="-120"/>
-              </a:rPr>
-              <a:t>.</a:t>
-            </a:r>
-            <a:pPr indent="0" marL="0">
-              <a:buNone/>
-            </a:pPr>
-            <a:r>
-              <a:rPr lang="en-US" sz="1050" dirty="0">
-                <a:solidFill>
-                  <a:srgbClr val="D9D9D9"/>
-                </a:solidFill>
-                <a:latin typeface="Consolas" pitchFamily="34" charset="0"/>
-                <a:ea typeface="Consolas" pitchFamily="34" charset="-122"/>
-                <a:cs typeface="Consolas" pitchFamily="34" charset="-120"/>
-              </a:rPr>
-              <a:t>show</a:t>
-            </a:r>
-            <a:pPr indent="0" marL="0">
-              <a:buNone/>
-            </a:pPr>
-            <a:r>
-              <a:rPr lang="en-US" sz="1050" dirty="0">
-                <a:solidFill>
-                  <a:srgbClr val="BDBDBD"/>
-                </a:solidFill>
-                <a:latin typeface="Consolas" pitchFamily="34" charset="0"/>
-                <a:ea typeface="Consolas" pitchFamily="34" charset="-122"/>
-                <a:cs typeface="Consolas" pitchFamily="34" charset="-120"/>
-              </a:rPr>
-              <a:t>();</a:t>
-            </a:r>
-            <a:endParaRPr lang="en-US" sz="1050" dirty="0"/>
-          </a:p>
-        </p:txBody>
-      </p:sp>
-      <p:sp>
-        <p:nvSpPr>
-          <p:cNvPr id="33" name="Shape 26"/>
+          <p:cNvPr id="32" name="Shape 25"/>
           <p:cNvSpPr/>
           <p:nvPr/>
         </p:nvSpPr>
         <p:spPr>
           <a:xfrm>
-            <a:off x="4892040" y="3513582"/>
+            <a:off x="4892040" y="3326892"/>
             <a:ext cx="3611880" cy="186690"/>
           </a:xfrm>
           <a:prstGeom prst="rect">
@@ -12977,6 +12916,115 @@
       </p:sp>
       <p:sp>
         <p:nvSpPr>
+          <p:cNvPr id="33" name="Text 26"/>
+          <p:cNvSpPr txBox="1"/>
+          <p:nvPr/>
+        </p:nvSpPr>
+        <p:spPr>
+          <a:xfrm>
+            <a:off x="4992624" y="3326892"/>
+            <a:ext cx="3410712" cy="186690"/>
+          </a:xfrm>
+          <a:prstGeom prst="rect">
+            <a:avLst/>
+          </a:prstGeom>
+          <a:noFill/>
+          <a:ln/>
+        </p:spPr>
+        <p:txBody>
+          <a:bodyPr wrap="square" lIns="0" tIns="0" rIns="0" bIns="0" rtlCol="0" anchor="ctr"/>
+          <a:lstStyle/>
+          <a:p>
+            <a:pPr indent="0" marL="0">
+              <a:buNone/>
+            </a:pPr>
+            <a:r>
+              <a:rPr lang="en-US" sz="1050" dirty="0">
+                <a:solidFill>
+                  <a:srgbClr val="D9D9D9"/>
+                </a:solidFill>
+                <a:latin typeface="Consolas" pitchFamily="34" charset="0"/>
+                <a:ea typeface="Consolas" pitchFamily="34" charset="-122"/>
+                <a:cs typeface="Consolas" pitchFamily="34" charset="-120"/>
+              </a:rPr>
+              <a:t>    </a:t>
+            </a:r>
+            <a:pPr indent="0" marL="0">
+              <a:buNone/>
+            </a:pPr>
+            <a:r>
+              <a:rPr lang="en-US" sz="1050" b="1" dirty="0">
+                <a:solidFill>
+                  <a:srgbClr val="FFFFFF"/>
+                </a:solidFill>
+                <a:latin typeface="Consolas" pitchFamily="34" charset="0"/>
+                <a:ea typeface="Consolas" pitchFamily="34" charset="-122"/>
+                <a:cs typeface="Consolas" pitchFamily="34" charset="-120"/>
+              </a:rPr>
+              <a:t>delay</a:t>
+            </a:r>
+            <a:pPr indent="0" marL="0">
+              <a:buNone/>
+            </a:pPr>
+            <a:r>
+              <a:rPr lang="en-US" sz="1050" dirty="0">
+                <a:solidFill>
+                  <a:srgbClr val="BDBDBD"/>
+                </a:solidFill>
+                <a:latin typeface="Consolas" pitchFamily="34" charset="0"/>
+                <a:ea typeface="Consolas" pitchFamily="34" charset="-122"/>
+                <a:cs typeface="Consolas" pitchFamily="34" charset="-120"/>
+              </a:rPr>
+              <a:t>(</a:t>
+            </a:r>
+            <a:pPr indent="0" marL="0">
+              <a:buNone/>
+            </a:pPr>
+            <a:r>
+              <a:rPr lang="en-US" sz="1050" dirty="0">
+                <a:solidFill>
+                  <a:srgbClr val="F7C873"/>
+                </a:solidFill>
+                <a:latin typeface="Consolas" pitchFamily="34" charset="0"/>
+                <a:ea typeface="Consolas" pitchFamily="34" charset="-122"/>
+                <a:cs typeface="Consolas" pitchFamily="34" charset="-120"/>
+              </a:rPr>
+              <a:t>100</a:t>
+            </a:r>
+            <a:pPr indent="0" marL="0">
+              <a:buNone/>
+            </a:pPr>
+            <a:r>
+              <a:rPr lang="en-US" sz="1050" dirty="0">
+                <a:solidFill>
+                  <a:srgbClr val="BDBDBD"/>
+                </a:solidFill>
+                <a:latin typeface="Consolas" pitchFamily="34" charset="0"/>
+                <a:ea typeface="Consolas" pitchFamily="34" charset="-122"/>
+                <a:cs typeface="Consolas" pitchFamily="34" charset="-120"/>
+              </a:rPr>
+              <a:t>);      </a:t>
+            </a:r>
+            <a:pPr indent="0" marL="0">
+              <a:buNone/>
+            </a:pPr>
+            <a:r>
+              <a:rPr lang="en-US" sz="1050" dirty="0">
+                <a:solidFill>
+                  <a:srgbClr val="8E8E8E"/>
+                </a:solidFill>
+                <a:latin typeface="Consolas" pitchFamily="34" charset="0"/>
+                <a:ea typeface="Consolas" pitchFamily="34" charset="-122"/>
+                <a:cs typeface="Consolas" pitchFamily="34" charset="-120"/>
+              </a:rPr>
+              <a:t>// 新增：每颗停 0.1 秒</a:t>
+            </a:r>
+            <a:endParaRPr lang="en-US" sz="1050" dirty="0"/>
+          </a:p>
+        </p:txBody>
+      </p:sp>
+      <p:sp>
+        <p:nvSpPr>
           <p:cNvPr id="34" name="Text 27"/>
           <p:cNvSpPr txBox="1"/>
           <p:nvPr/>
@@ -13008,26 +13056,12 @@
                 <a:ea typeface="Consolas" pitchFamily="34" charset="-122"/>
                 <a:cs typeface="Consolas" pitchFamily="34" charset="-120"/>
               </a:rPr>
-              <a:t>    </a:t>
+              <a:t>  </a:t>
             </a:r>
             <a:pPr indent="0" marL="0">
               <a:buNone/>
             </a:pPr>
             <a:r>
-              <a:rPr lang="en-US" sz="1050" b="1" dirty="0">
-                <a:solidFill>
-                  <a:srgbClr val="FFFFFF"/>
-                </a:solidFill>
-                <a:latin typeface="Consolas" pitchFamily="34" charset="0"/>
-                <a:ea typeface="Consolas" pitchFamily="34" charset="-122"/>
-                <a:cs typeface="Consolas" pitchFamily="34" charset="-120"/>
-              </a:rPr>
-              <a:t>delay</a:t>
-            </a:r>
-            <a:pPr indent="0" marL="0">
-              <a:buNone/>
-            </a:pPr>
-            <a:r>
               <a:rPr lang="en-US" sz="1050" dirty="0">
                 <a:solidFill>
                   <a:srgbClr val="BDBDBD"/>
@@ -13036,49 +13070,7 @@
                 <a:ea typeface="Consolas" pitchFamily="34" charset="-122"/>
                 <a:cs typeface="Consolas" pitchFamily="34" charset="-120"/>
               </a:rPr>
-              <a:t>(</a:t>
-            </a:r>
-            <a:pPr indent="0" marL="0">
-              <a:buNone/>
-            </a:pPr>
-            <a:r>
-              <a:rPr lang="en-US" sz="1050" dirty="0">
-                <a:solidFill>
-                  <a:srgbClr val="F7C873"/>
-                </a:solidFill>
-                <a:latin typeface="Consolas" pitchFamily="34" charset="0"/>
-                <a:ea typeface="Consolas" pitchFamily="34" charset="-122"/>
-                <a:cs typeface="Consolas" pitchFamily="34" charset="-120"/>
-              </a:rPr>
-              <a:t>100</a:t>
-            </a:r>
-            <a:pPr indent="0" marL="0">
-              <a:buNone/>
-            </a:pPr>
-            <a:r>
-              <a:rPr lang="en-US" sz="1050" dirty="0">
-                <a:solidFill>
-                  <a:srgbClr val="BDBDBD"/>
-                </a:solidFill>
-                <a:latin typeface="Consolas" pitchFamily="34" charset="0"/>
-                <a:ea typeface="Consolas" pitchFamily="34" charset="-122"/>
-                <a:cs typeface="Consolas" pitchFamily="34" charset="-120"/>
-              </a:rPr>
-              <a:t>);      </a:t>
-            </a:r>
-            <a:pPr indent="0" marL="0">
-              <a:buNone/>
-            </a:pPr>
-            <a:r>
-              <a:rPr lang="en-US" sz="1050" dirty="0">
-                <a:solidFill>
-                  <a:srgbClr val="8E8E8E"/>
-                </a:solidFill>
-                <a:latin typeface="Consolas" pitchFamily="34" charset="0"/>
-                <a:ea typeface="Consolas" pitchFamily="34" charset="-122"/>
-                <a:cs typeface="Consolas" pitchFamily="34" charset="-120"/>
-              </a:rPr>
-              <a:t>// 新增：每颗停 0.1 秒</a:t>
+              <a:t>}</a:t>
             </a:r>
             <a:endParaRPr lang="en-US" sz="1050" dirty="0"/>
           </a:p>
@@ -13086,66 +13078,13 @@
       </p:sp>
       <p:sp>
         <p:nvSpPr>
-          <p:cNvPr id="35" name="Text 28"/>
-          <p:cNvSpPr txBox="1"/>
-          <p:nvPr/>
-        </p:nvSpPr>
-        <p:spPr>
-          <a:xfrm>
-            <a:off x="4992624" y="3700272"/>
-            <a:ext cx="3410712" cy="186690"/>
-          </a:xfrm>
-          <a:prstGeom prst="rect">
-            <a:avLst/>
-          </a:prstGeom>
-          <a:noFill/>
-          <a:ln/>
-        </p:spPr>
-        <p:txBody>
-          <a:bodyPr wrap="square" lIns="0" tIns="0" rIns="0" bIns="0" rtlCol="0" anchor="ctr"/>
-          <a:lstStyle/>
-          <a:p>
-            <a:pPr indent="0" marL="0">
-              <a:buNone/>
-            </a:pPr>
-            <a:r>
-              <a:rPr lang="en-US" sz="1050" dirty="0">
-                <a:solidFill>
-                  <a:srgbClr val="D9D9D9"/>
-                </a:solidFill>
-                <a:latin typeface="Consolas" pitchFamily="34" charset="0"/>
-                <a:ea typeface="Consolas" pitchFamily="34" charset="-122"/>
-                <a:cs typeface="Consolas" pitchFamily="34" charset="-120"/>
-              </a:rPr>
-              <a:t>  </a:t>
-            </a:r>
-            <a:pPr indent="0" marL="0">
-              <a:buNone/>
-            </a:pPr>
-            <a:r>
-              <a:rPr lang="en-US" sz="1050" dirty="0">
-                <a:solidFill>
-                  <a:srgbClr val="BDBDBD"/>
-                </a:solidFill>
-                <a:latin typeface="Consolas" pitchFamily="34" charset="0"/>
-                <a:ea typeface="Consolas" pitchFamily="34" charset="-122"/>
-                <a:cs typeface="Consolas" pitchFamily="34" charset="-120"/>
-              </a:rPr>
-              <a:t>}</a:t>
-            </a:r>
-            <a:endParaRPr lang="en-US" sz="1050" dirty="0"/>
-          </a:p>
-        </p:txBody>
-      </p:sp>
-      <p:sp>
-        <p:nvSpPr>
-          <p:cNvPr id="36" name="Shape 29"/>
+          <p:cNvPr id="35" name="Shape 28"/>
           <p:cNvSpPr/>
           <p:nvPr/>
         </p:nvSpPr>
         <p:spPr>
           <a:xfrm>
-            <a:off x="4892040" y="3886962"/>
+            <a:off x="4892040" y="3700272"/>
             <a:ext cx="3611880" cy="186690"/>
           </a:xfrm>
           <a:prstGeom prst="rect">
@@ -13164,13 +13103,13 @@
       </p:sp>
       <p:sp>
         <p:nvSpPr>
-          <p:cNvPr id="37" name="Text 30"/>
-          <p:cNvSpPr txBox="1"/>
-          <p:nvPr/>
-        </p:nvSpPr>
-        <p:spPr>
-          <a:xfrm>
-            <a:off x="4992624" y="3886962"/>
+          <p:cNvPr id="36" name="Text 29"/>
+          <p:cNvSpPr txBox="1"/>
+          <p:nvPr/>
+        </p:nvSpPr>
+        <p:spPr>
+          <a:xfrm>
+            <a:off x="4992624" y="3700272"/>
             <a:ext cx="3410712" cy="186690"/>
           </a:xfrm>
           <a:prstGeom prst="rect">
@@ -13259,13 +13198,13 @@
       </p:sp>
       <p:sp>
         <p:nvSpPr>
-          <p:cNvPr id="38" name="Shape 31"/>
+          <p:cNvPr id="37" name="Shape 30"/>
           <p:cNvSpPr/>
           <p:nvPr/>
         </p:nvSpPr>
         <p:spPr>
           <a:xfrm>
-            <a:off x="4892040" y="4073652"/>
+            <a:off x="4892040" y="3886962"/>
             <a:ext cx="3611880" cy="186690"/>
           </a:xfrm>
           <a:prstGeom prst="rect">
@@ -13284,13 +13223,13 @@
       </p:sp>
       <p:sp>
         <p:nvSpPr>
-          <p:cNvPr id="39" name="Text 32"/>
-          <p:cNvSpPr txBox="1"/>
-          <p:nvPr/>
-        </p:nvSpPr>
-        <p:spPr>
-          <a:xfrm>
-            <a:off x="4992624" y="4073652"/>
+          <p:cNvPr id="38" name="Text 31"/>
+          <p:cNvSpPr txBox="1"/>
+          <p:nvPr/>
+        </p:nvSpPr>
+        <p:spPr>
+          <a:xfrm>
+            <a:off x="4992624" y="3886962"/>
             <a:ext cx="3410712" cy="186690"/>
           </a:xfrm>
           <a:prstGeom prst="rect">
@@ -13379,13 +13318,13 @@
       </p:sp>
       <p:sp>
         <p:nvSpPr>
-          <p:cNvPr id="40" name="Shape 33"/>
+          <p:cNvPr id="39" name="Shape 32"/>
           <p:cNvSpPr/>
           <p:nvPr/>
         </p:nvSpPr>
         <p:spPr>
           <a:xfrm>
-            <a:off x="4892040" y="4260342"/>
+            <a:off x="4892040" y="4073652"/>
             <a:ext cx="3611880" cy="186690"/>
           </a:xfrm>
           <a:prstGeom prst="rect">
@@ -13404,13 +13343,13 @@
       </p:sp>
       <p:sp>
         <p:nvSpPr>
-          <p:cNvPr id="41" name="Text 34"/>
-          <p:cNvSpPr txBox="1"/>
-          <p:nvPr/>
-        </p:nvSpPr>
-        <p:spPr>
-          <a:xfrm>
-            <a:off x="4992624" y="4260342"/>
+          <p:cNvPr id="40" name="Text 33"/>
+          <p:cNvSpPr txBox="1"/>
+          <p:nvPr/>
+        </p:nvSpPr>
+        <p:spPr>
+          <a:xfrm>
+            <a:off x="4992624" y="4073652"/>
             <a:ext cx="3410712" cy="186690"/>
           </a:xfrm>
           <a:prstGeom prst="rect">
@@ -13505,7 +13444,7 @@
                 <a:ea typeface="Consolas" pitchFamily="34" charset="-122"/>
                 <a:cs typeface="Consolas" pitchFamily="34" charset="-120"/>
               </a:rPr>
-              <a:t>// 新增</a:t>
+              <a:t>// 新增：停 0.5 秒</a:t>
             </a:r>
             <a:endParaRPr lang="en-US" sz="1050" dirty="0"/>
           </a:p>
@@ -14560,11 +14499,11 @@
         <p:spPr>
           <a:xfrm>
             <a:off x="411480" y="1234440"/>
-            <a:ext cx="3977640" cy="1874520"/>
+            <a:ext cx="3749040" cy="1737360"/>
           </a:xfrm>
           <a:prstGeom prst="roundRect">
             <a:avLst>
-              <a:gd name="adj" fmla="val 5854"/>
+              <a:gd name="adj" fmla="val 6316"/>
             </a:avLst>
           </a:prstGeom>
           <a:solidFill>
@@ -14594,8 +14533,8 @@
         </p:blipFill>
         <p:spPr>
           <a:xfrm>
-            <a:off x="742174" y="1344168"/>
-            <a:ext cx="3316251" cy="1380744"/>
+            <a:off x="792589" y="1344168"/>
+            <a:ext cx="2986822" cy="1243584"/>
           </a:xfrm>
           <a:prstGeom prst="rect">
             <a:avLst/>
@@ -14610,8 +14549,8 @@
         </p:nvSpPr>
         <p:spPr>
           <a:xfrm>
-            <a:off x="521208" y="2761488"/>
-            <a:ext cx="3758184" cy="237744"/>
+            <a:off x="521208" y="2624328"/>
+            <a:ext cx="3529584" cy="237744"/>
           </a:xfrm>
           <a:prstGeom prst="rect">
             <a:avLst/>
@@ -14652,12 +14591,12 @@
         </p:nvSpPr>
         <p:spPr>
           <a:xfrm>
-            <a:off x="4663440" y="1234440"/>
-            <a:ext cx="2788920" cy="1874520"/>
+            <a:off x="4434840" y="1234440"/>
+            <a:ext cx="2651760" cy="1737360"/>
           </a:xfrm>
           <a:prstGeom prst="roundRect">
             <a:avLst>
-              <a:gd name="adj" fmla="val 5854"/>
+              <a:gd name="adj" fmla="val 6316"/>
             </a:avLst>
           </a:prstGeom>
           <a:solidFill>
@@ -14687,8 +14626,8 @@
         </p:blipFill>
         <p:spPr>
           <a:xfrm>
-            <a:off x="4974760" y="1344168"/>
-            <a:ext cx="2166280" cy="1380744"/>
+            <a:off x="4785177" y="1344168"/>
+            <a:ext cx="1951087" cy="1243584"/>
           </a:xfrm>
           <a:prstGeom prst="rect">
             <a:avLst/>
@@ -14703,8 +14642,8 @@
         </p:nvSpPr>
         <p:spPr>
           <a:xfrm>
-            <a:off x="4773168" y="2761488"/>
-            <a:ext cx="2569464" cy="237744"/>
+            <a:off x="4544568" y="2624328"/>
+            <a:ext cx="2432304" cy="237744"/>
           </a:xfrm>
           <a:prstGeom prst="rect">
             <a:avLst/>
@@ -14745,8 +14684,8 @@
         </p:nvSpPr>
         <p:spPr>
           <a:xfrm>
-            <a:off x="7726680" y="1234440"/>
-            <a:ext cx="1005840" cy="1874520"/>
+            <a:off x="7360920" y="1234440"/>
+            <a:ext cx="1371600" cy="1737360"/>
           </a:xfrm>
           <a:prstGeom prst="rect">
             <a:avLst/>
@@ -14770,8 +14709,8 @@
         </p:nvSpPr>
         <p:spPr>
           <a:xfrm>
-            <a:off x="7854696" y="1380744"/>
-            <a:ext cx="822960" cy="457200"/>
+            <a:off x="7507224" y="1380744"/>
+            <a:ext cx="1152144" cy="457200"/>
           </a:xfrm>
           <a:prstGeom prst="rect">
             <a:avLst/>
@@ -14790,7 +14729,7 @@
               <a:buNone/>
             </a:pPr>
             <a:r>
-              <a:rPr lang="en-US" sz="2400" b="1" dirty="0">
+              <a:rPr lang="en-US" sz="2600" b="1" dirty="0">
                 <a:solidFill>
                   <a:srgbClr val="40E0D0"/>
                 </a:solidFill>
@@ -14800,7 +14739,7 @@
               </a:rPr>
               <a:t>16×2</a:t>
             </a:r>
-            <a:endParaRPr lang="en-US" sz="2400" dirty="0"/>
+            <a:endParaRPr lang="en-US" sz="2600" dirty="0"/>
           </a:p>
         </p:txBody>
       </p:sp>
@@ -14812,8 +14751,8 @@
         </p:nvSpPr>
         <p:spPr>
           <a:xfrm>
-            <a:off x="7854696" y="2450592"/>
-            <a:ext cx="822960" cy="530352"/>
+            <a:off x="7507224" y="2313432"/>
+            <a:ext cx="1152144" cy="530352"/>
           </a:xfrm>
           <a:prstGeom prst="rect">
             <a:avLst/>
@@ -14840,7 +14779,7 @@
                 <a:ea typeface="微软雅黑" pitchFamily="34" charset="-122"/>
                 <a:cs typeface="微软雅黑" pitchFamily="34" charset="-120"/>
               </a:rPr>
-              <a:t>每行 16 个</a:t>
+              <a:t>每行 16 个字符</a:t>
             </a:r>
             <a:endParaRPr lang="en-US" sz="1200" dirty="0"/>
           </a:p>
@@ -14860,7 +14799,7 @@
                 <a:ea typeface="微软雅黑" pitchFamily="34" charset="-122"/>
                 <a:cs typeface="微软雅黑" pitchFamily="34" charset="-120"/>
               </a:rPr>
-              <a:t>字符，共 2 行</a:t>
+              <a:t>一共 2 行</a:t>
             </a:r>
             <a:endParaRPr lang="en-US" sz="1200" dirty="0"/>
           </a:p>
@@ -14874,12 +14813,12 @@
         </p:nvSpPr>
         <p:spPr>
           <a:xfrm>
-            <a:off x="411480" y="3383280"/>
-            <a:ext cx="2590800" cy="1188720"/>
+            <a:off x="411480" y="3246120"/>
+            <a:ext cx="2590800" cy="1325880"/>
           </a:xfrm>
           <a:prstGeom prst="roundRect">
             <a:avLst>
-              <a:gd name="adj" fmla="val 9231"/>
+              <a:gd name="adj" fmla="val 8276"/>
             </a:avLst>
           </a:prstGeom>
           <a:solidFill>
@@ -14901,7 +14840,7 @@
         </p:nvSpPr>
         <p:spPr>
           <a:xfrm>
-            <a:off x="594360" y="3547872"/>
+            <a:off x="594360" y="3410712"/>
             <a:ext cx="329184" cy="329184"/>
           </a:xfrm>
           <a:prstGeom prst="ellipse">
@@ -14934,7 +14873,7 @@
         </p:blipFill>
         <p:spPr>
           <a:xfrm>
-            <a:off x="673364" y="3626876"/>
+            <a:off x="673364" y="3489716"/>
             <a:ext cx="171176" cy="171176"/>
           </a:xfrm>
           <a:prstGeom prst="rect">
@@ -14950,7 +14889,7 @@
         </p:nvSpPr>
         <p:spPr>
           <a:xfrm>
-            <a:off x="1051560" y="3547872"/>
+            <a:off x="1051560" y="3410712"/>
             <a:ext cx="1767840" cy="329184"/>
           </a:xfrm>
           <a:prstGeom prst="rect">
@@ -14992,8 +14931,8 @@
         </p:nvSpPr>
         <p:spPr>
           <a:xfrm>
-            <a:off x="594360" y="3950208"/>
-            <a:ext cx="2261616" cy="530352"/>
+            <a:off x="594360" y="3813048"/>
+            <a:ext cx="2261616" cy="667512"/>
           </a:xfrm>
           <a:prstGeom prst="rect">
             <a:avLst/>
@@ -15034,12 +14973,12 @@
         </p:nvSpPr>
         <p:spPr>
           <a:xfrm>
-            <a:off x="3276600" y="3383280"/>
-            <a:ext cx="2590800" cy="1188720"/>
+            <a:off x="3276600" y="3246120"/>
+            <a:ext cx="2590800" cy="1325880"/>
           </a:xfrm>
           <a:prstGeom prst="roundRect">
             <a:avLst>
-              <a:gd name="adj" fmla="val 9231"/>
+              <a:gd name="adj" fmla="val 8276"/>
             </a:avLst>
           </a:prstGeom>
           <a:solidFill>
@@ -15061,7 +15000,7 @@
         </p:nvSpPr>
         <p:spPr>
           <a:xfrm>
-            <a:off x="3459480" y="3547872"/>
+            <a:off x="3459480" y="3410712"/>
             <a:ext cx="329184" cy="329184"/>
           </a:xfrm>
           <a:prstGeom prst="ellipse">
@@ -15094,7 +15033,7 @@
         </p:blipFill>
         <p:spPr>
           <a:xfrm>
-            <a:off x="3538484" y="3626876"/>
+            <a:off x="3538484" y="3489716"/>
             <a:ext cx="171176" cy="171176"/>
           </a:xfrm>
           <a:prstGeom prst="rect">
@@ -15110,7 +15049,7 @@
         </p:nvSpPr>
         <p:spPr>
           <a:xfrm>
-            <a:off x="3916680" y="3547872"/>
+            <a:off x="3916680" y="3410712"/>
             <a:ext cx="1767840" cy="329184"/>
           </a:xfrm>
           <a:prstGeom prst="rect">
@@ -15152,8 +15091,8 @@
         </p:nvSpPr>
         <p:spPr>
           <a:xfrm>
-            <a:off x="3459480" y="3950208"/>
-            <a:ext cx="2261616" cy="530352"/>
+            <a:off x="3459480" y="3813048"/>
+            <a:ext cx="2261616" cy="667512"/>
           </a:xfrm>
           <a:prstGeom prst="rect">
             <a:avLst/>
@@ -15194,12 +15133,12 @@
         </p:nvSpPr>
         <p:spPr>
           <a:xfrm>
-            <a:off x="6141720" y="3383280"/>
-            <a:ext cx="2590800" cy="1188720"/>
+            <a:off x="6141720" y="3246120"/>
+            <a:ext cx="2590800" cy="1325880"/>
           </a:xfrm>
           <a:prstGeom prst="roundRect">
             <a:avLst>
-              <a:gd name="adj" fmla="val 9231"/>
+              <a:gd name="adj" fmla="val 8276"/>
             </a:avLst>
           </a:prstGeom>
           <a:solidFill>
@@ -15221,7 +15160,7 @@
         </p:nvSpPr>
         <p:spPr>
           <a:xfrm>
-            <a:off x="6324600" y="3547872"/>
+            <a:off x="6324600" y="3410712"/>
             <a:ext cx="329184" cy="329184"/>
           </a:xfrm>
           <a:prstGeom prst="ellipse">
@@ -15254,7 +15193,7 @@
         </p:blipFill>
         <p:spPr>
           <a:xfrm>
-            <a:off x="6403604" y="3626876"/>
+            <a:off x="6403604" y="3489716"/>
             <a:ext cx="171176" cy="171176"/>
           </a:xfrm>
           <a:prstGeom prst="rect">
@@ -15270,7 +15209,7 @@
         </p:nvSpPr>
         <p:spPr>
           <a:xfrm>
-            <a:off x="6781800" y="3547872"/>
+            <a:off x="6781800" y="3410712"/>
             <a:ext cx="1767840" cy="329184"/>
           </a:xfrm>
           <a:prstGeom prst="rect">
@@ -15312,8 +15251,8 @@
         </p:nvSpPr>
         <p:spPr>
           <a:xfrm>
-            <a:off x="6324600" y="3950208"/>
-            <a:ext cx="2261616" cy="530352"/>
+            <a:off x="6324600" y="3813048"/>
+            <a:ext cx="2261616" cy="667512"/>
           </a:xfrm>
           <a:prstGeom prst="rect">
             <a:avLst/>
@@ -15340,7 +15279,7 @@
                 <a:ea typeface="微软雅黑" pitchFamily="34" charset="-122"/>
                 <a:cs typeface="微软雅黑" pitchFamily="34" charset="-120"/>
               </a:rPr>
-              <a:t>PCF8574 芯片（原指南误作 PCA8574），只用 SDA、SCL 两根信号线。</a:t>
+              <a:t>PCF8574 芯片（原指南误作 PCA8574），只占 SDA、SCL 两根线。</a:t>
             </a:r>
             <a:endParaRPr lang="en-US" sz="1200" dirty="0"/>
           </a:p>
@@ -15551,11 +15490,11 @@
         <p:spPr>
           <a:xfrm>
             <a:off x="411480" y="1234440"/>
-            <a:ext cx="4000500" cy="1024128"/>
+            <a:ext cx="4000500" cy="950976"/>
           </a:xfrm>
           <a:prstGeom prst="roundRect">
             <a:avLst>
-              <a:gd name="adj" fmla="val 10714"/>
+              <a:gd name="adj" fmla="val 11538"/>
             </a:avLst>
           </a:prstGeom>
           <a:solidFill>
@@ -15669,7 +15608,7 @@
         <p:spPr>
           <a:xfrm>
             <a:off x="1014984" y="1682496"/>
-            <a:ext cx="3250692" cy="429768"/>
+            <a:ext cx="3250692" cy="356616"/>
           </a:xfrm>
           <a:prstGeom prst="rect">
             <a:avLst/>
@@ -15711,11 +15650,11 @@
         <p:spPr>
           <a:xfrm>
             <a:off x="4732020" y="1234440"/>
-            <a:ext cx="4000500" cy="1024128"/>
+            <a:ext cx="4000500" cy="950976"/>
           </a:xfrm>
           <a:prstGeom prst="roundRect">
             <a:avLst>
-              <a:gd name="adj" fmla="val 10714"/>
+              <a:gd name="adj" fmla="val 11538"/>
             </a:avLst>
           </a:prstGeom>
           <a:solidFill>
@@ -15829,7 +15768,7 @@
         <p:spPr>
           <a:xfrm>
             <a:off x="5335524" y="1682496"/>
-            <a:ext cx="3250692" cy="429768"/>
+            <a:ext cx="3250692" cy="356616"/>
           </a:xfrm>
           <a:prstGeom prst="rect">
             <a:avLst/>
@@ -15870,12 +15809,12 @@
         </p:nvSpPr>
         <p:spPr>
           <a:xfrm>
-            <a:off x="411480" y="2532888"/>
-            <a:ext cx="3429000" cy="2039112"/>
+            <a:off x="411480" y="2459736"/>
+            <a:ext cx="3429000" cy="2112264"/>
           </a:xfrm>
           <a:prstGeom prst="roundRect">
             <a:avLst>
-              <a:gd name="adj" fmla="val 5381"/>
+              <a:gd name="adj" fmla="val 5195"/>
             </a:avLst>
           </a:prstGeom>
           <a:solidFill>
@@ -15897,7 +15836,7 @@
         </p:nvSpPr>
         <p:spPr>
           <a:xfrm>
-            <a:off x="576072" y="2642616"/>
+            <a:off x="576072" y="2569464"/>
             <a:ext cx="3099816" cy="274320"/>
           </a:xfrm>
           <a:prstGeom prst="rect">
@@ -15939,8 +15878,8 @@
         </p:nvSpPr>
         <p:spPr>
           <a:xfrm>
-            <a:off x="576072" y="3022092"/>
-            <a:ext cx="256032" cy="256032"/>
+            <a:off x="576072" y="2971800"/>
+            <a:ext cx="237744" cy="237744"/>
           </a:xfrm>
           <a:prstGeom prst="ellipse">
             <a:avLst/>
@@ -15972,8 +15911,8 @@
         </p:blipFill>
         <p:spPr>
           <a:xfrm>
-            <a:off x="637520" y="3083540"/>
-            <a:ext cx="133137" cy="133137"/>
+            <a:off x="633131" y="3028859"/>
+            <a:ext cx="123627" cy="123627"/>
           </a:xfrm>
           <a:prstGeom prst="rect">
             <a:avLst/>
@@ -15988,8 +15927,8 @@
         </p:nvSpPr>
         <p:spPr>
           <a:xfrm>
-            <a:off x="923544" y="3008376"/>
-            <a:ext cx="2715768" cy="283464"/>
+            <a:off x="905256" y="2935224"/>
+            <a:ext cx="2734056" cy="310896"/>
           </a:xfrm>
           <a:prstGeom prst="rect">
             <a:avLst/>
@@ -16030,8 +15969,8 @@
         </p:nvSpPr>
         <p:spPr>
           <a:xfrm>
-            <a:off x="576072" y="3305556"/>
-            <a:ext cx="256032" cy="256032"/>
+            <a:off x="576072" y="3282696"/>
+            <a:ext cx="237744" cy="237744"/>
           </a:xfrm>
           <a:prstGeom prst="ellipse">
             <a:avLst/>
@@ -16063,8 +16002,8 @@
         </p:blipFill>
         <p:spPr>
           <a:xfrm>
-            <a:off x="637520" y="3367004"/>
-            <a:ext cx="133137" cy="133137"/>
+            <a:off x="633131" y="3339755"/>
+            <a:ext cx="123627" cy="123627"/>
           </a:xfrm>
           <a:prstGeom prst="rect">
             <a:avLst/>
@@ -16079,8 +16018,8 @@
         </p:nvSpPr>
         <p:spPr>
           <a:xfrm>
-            <a:off x="923544" y="3291840"/>
-            <a:ext cx="2715768" cy="283464"/>
+            <a:off x="905256" y="3246120"/>
+            <a:ext cx="2734056" cy="310896"/>
           </a:xfrm>
           <a:prstGeom prst="rect">
             <a:avLst/>
@@ -16121,8 +16060,8 @@
         </p:nvSpPr>
         <p:spPr>
           <a:xfrm>
-            <a:off x="576072" y="3589020"/>
-            <a:ext cx="256032" cy="256032"/>
+            <a:off x="576072" y="3593592"/>
+            <a:ext cx="237744" cy="237744"/>
           </a:xfrm>
           <a:prstGeom prst="ellipse">
             <a:avLst/>
@@ -16154,8 +16093,8 @@
         </p:blipFill>
         <p:spPr>
           <a:xfrm>
-            <a:off x="637520" y="3650468"/>
-            <a:ext cx="133137" cy="133137"/>
+            <a:off x="633131" y="3650651"/>
+            <a:ext cx="123627" cy="123627"/>
           </a:xfrm>
           <a:prstGeom prst="rect">
             <a:avLst/>
@@ -16170,8 +16109,8 @@
         </p:nvSpPr>
         <p:spPr>
           <a:xfrm>
-            <a:off x="923544" y="3575304"/>
-            <a:ext cx="2715768" cy="283464"/>
+            <a:off x="905256" y="3557016"/>
+            <a:ext cx="2734056" cy="310896"/>
           </a:xfrm>
           <a:prstGeom prst="rect">
             <a:avLst/>
@@ -16212,8 +16151,8 @@
         </p:nvSpPr>
         <p:spPr>
           <a:xfrm>
-            <a:off x="576072" y="3872484"/>
-            <a:ext cx="256032" cy="256032"/>
+            <a:off x="576072" y="3904488"/>
+            <a:ext cx="237744" cy="237744"/>
           </a:xfrm>
           <a:prstGeom prst="ellipse">
             <a:avLst/>
@@ -16245,8 +16184,8 @@
         </p:blipFill>
         <p:spPr>
           <a:xfrm>
-            <a:off x="637520" y="3933932"/>
-            <a:ext cx="133137" cy="133137"/>
+            <a:off x="633131" y="3961547"/>
+            <a:ext cx="123627" cy="123627"/>
           </a:xfrm>
           <a:prstGeom prst="rect">
             <a:avLst/>
@@ -16261,8 +16200,8 @@
         </p:nvSpPr>
         <p:spPr>
           <a:xfrm>
-            <a:off x="923544" y="3858768"/>
-            <a:ext cx="2715768" cy="283464"/>
+            <a:off x="905256" y="3867912"/>
+            <a:ext cx="2734056" cy="310896"/>
           </a:xfrm>
           <a:prstGeom prst="rect">
             <a:avLst/>
@@ -16303,8 +16242,8 @@
         </p:nvSpPr>
         <p:spPr>
           <a:xfrm>
-            <a:off x="576072" y="4155948"/>
-            <a:ext cx="256032" cy="256032"/>
+            <a:off x="576072" y="4215384"/>
+            <a:ext cx="237744" cy="237744"/>
           </a:xfrm>
           <a:prstGeom prst="ellipse">
             <a:avLst/>
@@ -16336,8 +16275,8 @@
         </p:blipFill>
         <p:spPr>
           <a:xfrm>
-            <a:off x="637520" y="4217396"/>
-            <a:ext cx="133137" cy="133137"/>
+            <a:off x="633131" y="4272443"/>
+            <a:ext cx="123627" cy="123627"/>
           </a:xfrm>
           <a:prstGeom prst="rect">
             <a:avLst/>
@@ -16352,8 +16291,8 @@
         </p:nvSpPr>
         <p:spPr>
           <a:xfrm>
-            <a:off x="923544" y="4142232"/>
-            <a:ext cx="2715768" cy="283464"/>
+            <a:off x="905256" y="4178808"/>
+            <a:ext cx="2734056" cy="310896"/>
           </a:xfrm>
           <a:prstGeom prst="rect">
             <a:avLst/>
@@ -16394,7 +16333,7 @@
         </p:nvSpPr>
         <p:spPr>
           <a:xfrm>
-            <a:off x="4160520" y="2532888"/>
+            <a:off x="4160520" y="2459736"/>
             <a:ext cx="4572000" cy="274320"/>
           </a:xfrm>
           <a:prstGeom prst="rect">
@@ -16436,12 +16375,12 @@
         </p:nvSpPr>
         <p:spPr>
           <a:xfrm>
-            <a:off x="4160520" y="2898648"/>
-            <a:ext cx="2148840" cy="1673352"/>
+            <a:off x="4160520" y="2825496"/>
+            <a:ext cx="2148840" cy="1746504"/>
           </a:xfrm>
           <a:prstGeom prst="roundRect">
             <a:avLst>
-              <a:gd name="adj" fmla="val 6557"/>
+              <a:gd name="adj" fmla="val 6283"/>
             </a:avLst>
           </a:prstGeom>
           <a:solidFill>
@@ -16463,7 +16402,7 @@
         </p:nvSpPr>
         <p:spPr>
           <a:xfrm>
-            <a:off x="4325112" y="2990088"/>
+            <a:off x="4325112" y="2916936"/>
             <a:ext cx="1097280" cy="457200"/>
           </a:xfrm>
           <a:prstGeom prst="rect">
@@ -16505,8 +16444,8 @@
         </p:nvSpPr>
         <p:spPr>
           <a:xfrm>
-            <a:off x="5257800" y="3044952"/>
-            <a:ext cx="960120" cy="365760"/>
+            <a:off x="5120640" y="2971800"/>
+            <a:ext cx="1097280" cy="365760"/>
           </a:xfrm>
           <a:prstGeom prst="rect">
             <a:avLst/>
@@ -16547,8 +16486,8 @@
         </p:nvSpPr>
         <p:spPr>
           <a:xfrm>
-            <a:off x="4325112" y="3502152"/>
-            <a:ext cx="1837944" cy="1014984"/>
+            <a:off x="4325112" y="3429000"/>
+            <a:ext cx="1837944" cy="1088136"/>
           </a:xfrm>
           <a:prstGeom prst="rect">
             <a:avLst/>
@@ -16575,7 +16514,7 @@
                 <a:ea typeface="微软雅黑" pitchFamily="34" charset="-122"/>
                 <a:cs typeface="微软雅黑" pitchFamily="34" charset="-120"/>
               </a:rPr>
-              <a:t>至少占 6 个 IO 口（RS、E、D4～D7），还要接电源、背光、对比度的线</a:t>
+              <a:t>要占 6 个 IO 口：RS、E 和 4 根数据线，还有电源、背光等线</a:t>
             </a:r>
             <a:endParaRPr lang="en-US" sz="1200" dirty="0"/>
           </a:p>
@@ -16589,12 +16528,12 @@
         </p:nvSpPr>
         <p:spPr>
           <a:xfrm>
-            <a:off x="6583680" y="2898648"/>
-            <a:ext cx="2148840" cy="1673352"/>
+            <a:off x="6583680" y="2825496"/>
+            <a:ext cx="2148840" cy="1746504"/>
           </a:xfrm>
           <a:prstGeom prst="roundRect">
             <a:avLst>
-              <a:gd name="adj" fmla="val 6557"/>
+              <a:gd name="adj" fmla="val 6283"/>
             </a:avLst>
           </a:prstGeom>
           <a:solidFill>
@@ -16616,7 +16555,7 @@
         </p:nvSpPr>
         <p:spPr>
           <a:xfrm>
-            <a:off x="6748272" y="2990088"/>
+            <a:off x="6748272" y="2916936"/>
             <a:ext cx="1097280" cy="457200"/>
           </a:xfrm>
           <a:prstGeom prst="rect">
@@ -16658,8 +16597,8 @@
         </p:nvSpPr>
         <p:spPr>
           <a:xfrm>
-            <a:off x="7680960" y="3044952"/>
-            <a:ext cx="960120" cy="365760"/>
+            <a:off x="7543800" y="2971800"/>
+            <a:ext cx="1097280" cy="365760"/>
           </a:xfrm>
           <a:prstGeom prst="rect">
             <a:avLst/>
@@ -16700,8 +16639,8 @@
         </p:nvSpPr>
         <p:spPr>
           <a:xfrm>
-            <a:off x="6748272" y="3502152"/>
-            <a:ext cx="1837944" cy="1014984"/>
+            <a:off x="6748272" y="3429000"/>
+            <a:ext cx="1837944" cy="1088136"/>
           </a:xfrm>
           <a:prstGeom prst="rect">
             <a:avLst/>
@@ -17180,7 +17119,7 @@
         <p:spPr>
           <a:xfrm>
             <a:off x="1508760" y="1901952"/>
-            <a:ext cx="1828800" cy="219456"/>
+            <a:ext cx="1005840" cy="219456"/>
           </a:xfrm>
           <a:prstGeom prst="rect">
             <a:avLst/>
@@ -17207,7 +17146,7 @@
                 <a:ea typeface="微软雅黑" pitchFamily="34" charset="-122"/>
                 <a:cs typeface="微软雅黑" pitchFamily="34" charset="-120"/>
               </a:rPr>
-              <a:t>SCL 时钟线（打节拍）</a:t>
+              <a:t>SCL 时钟线</a:t>
             </a:r>
             <a:endParaRPr lang="en-US" sz="1050" dirty="0"/>
           </a:p>
@@ -17221,7 +17160,7 @@
         </p:nvSpPr>
         <p:spPr>
           <a:xfrm>
-            <a:off x="3065526" y="1847088"/>
+            <a:off x="2560320" y="1847088"/>
             <a:ext cx="91" cy="987552"/>
           </a:xfrm>
           <a:prstGeom prst="line">
@@ -17244,7 +17183,7 @@
         </p:nvSpPr>
         <p:spPr>
           <a:xfrm>
-            <a:off x="3380994" y="2176272"/>
+            <a:off x="2834640" y="2176272"/>
             <a:ext cx="91" cy="658368"/>
           </a:xfrm>
           <a:prstGeom prst="line">
@@ -17267,7 +17206,7 @@
         </p:nvSpPr>
         <p:spPr>
           <a:xfrm>
-            <a:off x="3028950" y="1810512"/>
+            <a:off x="2523744" y="1810512"/>
             <a:ext cx="73152" cy="73152"/>
           </a:xfrm>
           <a:prstGeom prst="ellipse">
@@ -17292,7 +17231,7 @@
         </p:nvSpPr>
         <p:spPr>
           <a:xfrm>
-            <a:off x="3344418" y="2139696"/>
+            <a:off x="2798064" y="2139696"/>
             <a:ext cx="73152" cy="73152"/>
           </a:xfrm>
           <a:prstGeom prst="ellipse">
@@ -17317,8 +17256,8 @@
         </p:nvSpPr>
         <p:spPr>
           <a:xfrm>
-            <a:off x="2697480" y="2834640"/>
-            <a:ext cx="1051560" cy="749808"/>
+            <a:off x="2240280" y="2834640"/>
+            <a:ext cx="914400" cy="749808"/>
           </a:xfrm>
           <a:prstGeom prst="roundRect">
             <a:avLst>
@@ -17344,8 +17283,8 @@
         </p:nvSpPr>
         <p:spPr>
           <a:xfrm>
-            <a:off x="2734056" y="2889504"/>
-            <a:ext cx="978408" cy="274320"/>
+            <a:off x="2276856" y="2889504"/>
+            <a:ext cx="841248" cy="274320"/>
           </a:xfrm>
           <a:prstGeom prst="rect">
             <a:avLst/>
@@ -17386,7 +17325,7 @@
         </p:nvSpPr>
         <p:spPr>
           <a:xfrm>
-            <a:off x="2939796" y="3236976"/>
+            <a:off x="2414016" y="3236976"/>
             <a:ext cx="566928" cy="237744"/>
           </a:xfrm>
           <a:prstGeom prst="roundRect">
@@ -17413,7 +17352,7 @@
         </p:nvSpPr>
         <p:spPr>
           <a:xfrm>
-            <a:off x="2939796" y="3236976"/>
+            <a:off x="2414016" y="3236976"/>
             <a:ext cx="566928" cy="237744"/>
           </a:xfrm>
           <a:prstGeom prst="rect">
@@ -17455,7 +17394,7 @@
         </p:nvSpPr>
         <p:spPr>
           <a:xfrm>
-            <a:off x="4391406" y="1847088"/>
+            <a:off x="3685032" y="1847088"/>
             <a:ext cx="91" cy="987552"/>
           </a:xfrm>
           <a:prstGeom prst="line">
@@ -17478,7 +17417,7 @@
         </p:nvSpPr>
         <p:spPr>
           <a:xfrm>
-            <a:off x="4706874" y="2176272"/>
+            <a:off x="3959352" y="2176272"/>
             <a:ext cx="91" cy="658368"/>
           </a:xfrm>
           <a:prstGeom prst="line">
@@ -17501,7 +17440,7 @@
         </p:nvSpPr>
         <p:spPr>
           <a:xfrm>
-            <a:off x="4354830" y="1810512"/>
+            <a:off x="3648456" y="1810512"/>
             <a:ext cx="73152" cy="73152"/>
           </a:xfrm>
           <a:prstGeom prst="ellipse">
@@ -17526,7 +17465,7 @@
         </p:nvSpPr>
         <p:spPr>
           <a:xfrm>
-            <a:off x="4670298" y="2139696"/>
+            <a:off x="3922776" y="2139696"/>
             <a:ext cx="73152" cy="73152"/>
           </a:xfrm>
           <a:prstGeom prst="ellipse">
@@ -17551,8 +17490,8 @@
         </p:nvSpPr>
         <p:spPr>
           <a:xfrm>
-            <a:off x="4023360" y="2834640"/>
-            <a:ext cx="1051560" cy="749808"/>
+            <a:off x="3364992" y="2834640"/>
+            <a:ext cx="914400" cy="749808"/>
           </a:xfrm>
           <a:prstGeom prst="roundRect">
             <a:avLst>
@@ -17578,8 +17517,8 @@
         </p:nvSpPr>
         <p:spPr>
           <a:xfrm>
-            <a:off x="4059936" y="2889504"/>
-            <a:ext cx="978408" cy="274320"/>
+            <a:off x="3401568" y="2889504"/>
+            <a:ext cx="841248" cy="274320"/>
           </a:xfrm>
           <a:prstGeom prst="rect">
             <a:avLst/>
@@ -17620,7 +17559,7 @@
         </p:nvSpPr>
         <p:spPr>
           <a:xfrm>
-            <a:off x="4265676" y="3236976"/>
+            <a:off x="3538728" y="3236976"/>
             <a:ext cx="566928" cy="237744"/>
           </a:xfrm>
           <a:prstGeom prst="roundRect">
@@ -17647,7 +17586,7 @@
         </p:nvSpPr>
         <p:spPr>
           <a:xfrm>
-            <a:off x="4265676" y="3236976"/>
+            <a:off x="3538728" y="3236976"/>
             <a:ext cx="566928" cy="237744"/>
           </a:xfrm>
           <a:prstGeom prst="rect">
@@ -17689,7 +17628,7 @@
         </p:nvSpPr>
         <p:spPr>
           <a:xfrm>
-            <a:off x="4711446" y="1847088"/>
+            <a:off x="4800600" y="1847088"/>
             <a:ext cx="91" cy="987552"/>
           </a:xfrm>
           <a:prstGeom prst="line">
@@ -17712,7 +17651,7 @@
         </p:nvSpPr>
         <p:spPr>
           <a:xfrm>
-            <a:off x="5026914" y="2176272"/>
+            <a:off x="5074920" y="2176272"/>
             <a:ext cx="91" cy="658368"/>
           </a:xfrm>
           <a:prstGeom prst="line">
@@ -17735,7 +17674,7 @@
         </p:nvSpPr>
         <p:spPr>
           <a:xfrm>
-            <a:off x="4674870" y="1810512"/>
+            <a:off x="4764024" y="1810512"/>
             <a:ext cx="73152" cy="73152"/>
           </a:xfrm>
           <a:prstGeom prst="ellipse">
@@ -17760,7 +17699,7 @@
         </p:nvSpPr>
         <p:spPr>
           <a:xfrm>
-            <a:off x="4990338" y="2139696"/>
+            <a:off x="5038344" y="2139696"/>
             <a:ext cx="73152" cy="73152"/>
           </a:xfrm>
           <a:prstGeom prst="ellipse">
@@ -17785,8 +17724,8 @@
         </p:nvSpPr>
         <p:spPr>
           <a:xfrm>
-            <a:off x="4343400" y="2834640"/>
-            <a:ext cx="1051560" cy="749808"/>
+            <a:off x="4480560" y="2834640"/>
+            <a:ext cx="914400" cy="749808"/>
           </a:xfrm>
           <a:prstGeom prst="roundRect">
             <a:avLst>
@@ -17812,8 +17751,8 @@
         </p:nvSpPr>
         <p:spPr>
           <a:xfrm>
-            <a:off x="4379976" y="2889504"/>
-            <a:ext cx="978408" cy="274320"/>
+            <a:off x="4517136" y="2889504"/>
+            <a:ext cx="841248" cy="274320"/>
           </a:xfrm>
           <a:prstGeom prst="rect">
             <a:avLst/>
@@ -17840,7 +17779,7 @@
                 <a:ea typeface="微软雅黑" pitchFamily="34" charset="-122"/>
                 <a:cs typeface="微软雅黑" pitchFamily="34" charset="-120"/>
               </a:rPr>
-              <a:t>其他模块</a:t>
+              <a:t>OLED 屏</a:t>
             </a:r>
             <a:endParaRPr lang="en-US" sz="1150" dirty="0"/>
           </a:p>
@@ -17854,7 +17793,7 @@
         </p:nvSpPr>
         <p:spPr>
           <a:xfrm>
-            <a:off x="4585716" y="3236976"/>
+            <a:off x="4654296" y="3236976"/>
             <a:ext cx="566928" cy="237744"/>
           </a:xfrm>
           <a:prstGeom prst="roundRect">
@@ -17881,7 +17820,7 @@
         </p:nvSpPr>
         <p:spPr>
           <a:xfrm>
-            <a:off x="4585716" y="3236976"/>
+            <a:off x="4654296" y="3236976"/>
             <a:ext cx="566928" cy="237744"/>
           </a:xfrm>
           <a:prstGeom prst="rect">
@@ -17923,7 +17862,7 @@
         </p:nvSpPr>
         <p:spPr>
           <a:xfrm>
-            <a:off x="685800" y="2999232"/>
+            <a:off x="502920" y="2999232"/>
             <a:ext cx="420624" cy="420624"/>
           </a:xfrm>
           <a:prstGeom prst="ellipse">
@@ -17956,7 +17895,7 @@
         </p:blipFill>
         <p:spPr>
           <a:xfrm>
-            <a:off x="786750" y="3100182"/>
+            <a:off x="603870" y="3100182"/>
             <a:ext cx="218724" cy="218724"/>
           </a:xfrm>
           <a:prstGeom prst="rect">
@@ -17972,8 +17911,8 @@
         </p:nvSpPr>
         <p:spPr>
           <a:xfrm>
-            <a:off x="1179576" y="2926080"/>
-            <a:ext cx="914400" cy="566928"/>
+            <a:off x="996696" y="2926080"/>
+            <a:ext cx="822960" cy="566928"/>
           </a:xfrm>
           <a:prstGeom prst="rect">
             <a:avLst/>
@@ -18029,6 +17968,30 @@
       <p:sp>
         <p:nvSpPr>
           <p:cNvPr id="41" name="Shape 37"/>
+          <p:cNvSpPr/>
+          <p:nvPr/>
+        </p:nvSpPr>
+        <p:spPr>
+          <a:xfrm>
+            <a:off x="1691640" y="3355848"/>
+            <a:ext cx="667512" cy="91"/>
+          </a:xfrm>
+          <a:prstGeom prst="line">
+            <a:avLst/>
+          </a:prstGeom>
+          <a:noFill/>
+          <a:ln w="12700">
+            <a:solidFill>
+              <a:srgbClr val="6B6B6B"/>
+            </a:solidFill>
+            <a:prstDash val="solid"/>
+            <a:tailEnd type="triangle"/>
+          </a:ln>
+        </p:spPr>
+      </p:sp>
+      <p:sp>
+        <p:nvSpPr>
+          <p:cNvPr id="42" name="Shape 38"/>
           <p:cNvSpPr/>
           <p:nvPr/>
         </p:nvSpPr>
@@ -18055,7 +18018,7 @@
       </p:sp>
       <p:sp>
         <p:nvSpPr>
-          <p:cNvPr id="42" name="Text 38"/>
+          <p:cNvPr id="43" name="Text 39"/>
           <p:cNvSpPr txBox="1"/>
           <p:nvPr/>
         </p:nvSpPr>
@@ -18114,7 +18077,7 @@
       </p:sp>
       <p:sp>
         <p:nvSpPr>
-          <p:cNvPr id="43" name="Shape 39"/>
+          <p:cNvPr id="44" name="Shape 40"/>
           <p:cNvSpPr/>
           <p:nvPr/>
         </p:nvSpPr>
@@ -18141,7 +18104,7 @@
       </p:sp>
       <p:sp>
         <p:nvSpPr>
-          <p:cNvPr id="44" name="Shape 40"/>
+          <p:cNvPr id="45" name="Shape 41"/>
           <p:cNvSpPr/>
           <p:nvPr/>
         </p:nvSpPr>
@@ -18166,7 +18129,7 @@
       </p:sp>
       <p:pic>
         <p:nvPicPr>
-          <p:cNvPr id="45" name="Image 1" descr="preencoded.png">    </p:cNvPr>
+          <p:cNvPr id="46" name="Image 1" descr="preencoded.png">    </p:cNvPr>
           <p:cNvPicPr>
             <a:picLocks noChangeAspect="1"/>
           </p:cNvPicPr>
@@ -18190,7 +18153,7 @@
       </p:pic>
       <p:sp>
         <p:nvSpPr>
-          <p:cNvPr id="46" name="Text 41"/>
+          <p:cNvPr id="47" name="Text 42"/>
           <p:cNvSpPr txBox="1"/>
           <p:nvPr/>
         </p:nvSpPr>
@@ -18232,7 +18195,7 @@
       </p:sp>
       <p:sp>
         <p:nvSpPr>
-          <p:cNvPr id="47" name="Text 42"/>
+          <p:cNvPr id="48" name="Text 43"/>
           <p:cNvSpPr txBox="1"/>
           <p:nvPr/>
         </p:nvSpPr>
@@ -18274,7 +18237,7 @@
       </p:sp>
       <p:sp>
         <p:nvSpPr>
-          <p:cNvPr id="48" name="Shape 43"/>
+          <p:cNvPr id="49" name="Shape 44"/>
           <p:cNvSpPr/>
           <p:nvPr/>
         </p:nvSpPr>
@@ -18301,7 +18264,7 @@
       </p:sp>
       <p:sp>
         <p:nvSpPr>
-          <p:cNvPr id="49" name="Text 44"/>
+          <p:cNvPr id="50" name="Text 45"/>
           <p:cNvSpPr txBox="1"/>
           <p:nvPr/>
         </p:nvSpPr>
@@ -18959,7 +18922,7 @@
       </p:graphicFrame>
       <p:sp>
         <p:nvSpPr>
-          <p:cNvPr id="51" name="Text 45"/>
+          <p:cNvPr id="52" name="Text 46"/>
           <p:cNvSpPr txBox="1"/>
           <p:nvPr/>
         </p:nvSpPr>
@@ -19221,7 +19184,7 @@
                 <a:gridCol w="1623060"/>
                 <a:gridCol w="1623060"/>
               </a:tblGrid>
-              <a:tr h="329184">
+              <a:tr h="310896">
                 <a:tc>
                   <a:txBody>
                     <a:bodyPr/>
@@ -19359,7 +19322,7 @@
                   </a:tcPr>
                 </a:tc>
               </a:tr>
-              <a:tr h="329184">
+              <a:tr h="310896">
                 <a:tc>
                   <a:txBody>
                     <a:bodyPr/>
@@ -19497,7 +19460,7 @@
                   </a:tcPr>
                 </a:tc>
               </a:tr>
-              <a:tr h="329184">
+              <a:tr h="310896">
                 <a:tc>
                   <a:txBody>
                     <a:bodyPr/>
@@ -19635,7 +19598,7 @@
                   </a:tcPr>
                 </a:tc>
               </a:tr>
-              <a:tr h="329184">
+              <a:tr h="310896">
                 <a:tc>
                   <a:txBody>
                     <a:bodyPr/>
@@ -19773,7 +19736,7 @@
                   </a:tcPr>
                 </a:tc>
               </a:tr>
-              <a:tr h="329184">
+              <a:tr h="310896">
                 <a:tc>
                   <a:txBody>
                     <a:bodyPr/>
@@ -19923,12 +19886,12 @@
         </p:nvSpPr>
         <p:spPr>
           <a:xfrm>
-            <a:off x="411480" y="3154680"/>
-            <a:ext cx="3246120" cy="1417320"/>
+            <a:off x="411480" y="3063240"/>
+            <a:ext cx="3246120" cy="1508760"/>
           </a:xfrm>
           <a:prstGeom prst="roundRect">
             <a:avLst>
-              <a:gd name="adj" fmla="val 7742"/>
+              <a:gd name="adj" fmla="val 7273"/>
             </a:avLst>
           </a:prstGeom>
           <a:solidFill>
@@ -19950,7 +19913,7 @@
         </p:nvSpPr>
         <p:spPr>
           <a:xfrm>
-            <a:off x="557784" y="3300984"/>
+            <a:off x="557784" y="3209544"/>
             <a:ext cx="329184" cy="329184"/>
           </a:xfrm>
           <a:prstGeom prst="ellipse">
@@ -19983,7 +19946,7 @@
         </p:blipFill>
         <p:spPr>
           <a:xfrm>
-            <a:off x="636788" y="3379988"/>
+            <a:off x="636788" y="3288548"/>
             <a:ext cx="171176" cy="171176"/>
           </a:xfrm>
           <a:prstGeom prst="rect">
@@ -19999,7 +19962,7 @@
         </p:nvSpPr>
         <p:spPr>
           <a:xfrm>
-            <a:off x="1014984" y="3291840"/>
+            <a:off x="1014984" y="3200400"/>
             <a:ext cx="2496312" cy="274320"/>
           </a:xfrm>
           <a:prstGeom prst="rect">
@@ -20041,8 +20004,8 @@
         </p:nvSpPr>
         <p:spPr>
           <a:xfrm>
-            <a:off x="1014984" y="3602736"/>
-            <a:ext cx="2496312" cy="822960"/>
+            <a:off x="1014984" y="3511296"/>
+            <a:ext cx="2496312" cy="914400"/>
           </a:xfrm>
           <a:prstGeom prst="rect">
             <a:avLst/>
@@ -20069,7 +20032,7 @@
                 <a:ea typeface="微软雅黑" pitchFamily="34" charset="-122"/>
                 <a:cs typeface="微软雅黑" pitchFamily="34" charset="-120"/>
               </a:rPr>
-              <a:t>SDA（数据）→ A4，SCL（时钟）→ A5。</a:t>
+              <a:t>SDA（数据）→ A4</a:t>
             </a:r>
             <a:endParaRPr lang="en-US" sz="1200" dirty="0"/>
           </a:p>
@@ -20089,7 +20052,27 @@
                 <a:ea typeface="微软雅黑" pitchFamily="34" charset="-122"/>
                 <a:cs typeface="微软雅黑" pitchFamily="34" charset="-120"/>
               </a:rPr>
-              <a:t>UNO 上 AREF 旁的 SDA、SCL 排针和 A4、A5 相通，接哪组都行。</a:t>
+              <a:t>SCL（时钟）→ A5</a:t>
+            </a:r>
+            <a:endParaRPr lang="en-US" sz="1200" dirty="0"/>
+          </a:p>
+          <a:p>
+            <a:pPr algn="l" indent="0" marL="0">
+              <a:lnSpc>
+                <a:spcPct val="115000"/>
+              </a:lnSpc>
+              <a:buNone/>
+            </a:pPr>
+            <a:r>
+              <a:rPr lang="en-US" sz="1200" dirty="0">
+                <a:solidFill>
+                  <a:srgbClr val="2D2D2D"/>
+                </a:solidFill>
+                <a:latin typeface="微软雅黑" pitchFamily="34" charset="0"/>
+                <a:ea typeface="微软雅黑" pitchFamily="34" charset="-122"/>
+                <a:cs typeface="微软雅黑" pitchFamily="34" charset="-120"/>
+              </a:rPr>
+              <a:t>AREF 旁的 SDA、SCL 排针和 A4、A5 相通，接哪组都行。</a:t>
             </a:r>
             <a:endParaRPr lang="en-US" sz="1200" dirty="0"/>
           </a:p>
@@ -20393,7 +20376,7 @@
         <p:spPr>
           <a:xfrm>
             <a:off x="411480" y="1234440"/>
-            <a:ext cx="5166360" cy="3337560"/>
+            <a:ext cx="4937760" cy="3337560"/>
           </a:xfrm>
           <a:prstGeom prst="roundRect">
             <a:avLst>
@@ -20427,8 +20410,8 @@
         </p:blipFill>
         <p:spPr>
           <a:xfrm>
-            <a:off x="629695" y="1344168"/>
-            <a:ext cx="4729930" cy="2843784"/>
+            <a:off x="521208" y="1347663"/>
+            <a:ext cx="4718304" cy="2836794"/>
           </a:xfrm>
           <a:prstGeom prst="rect">
             <a:avLst/>
@@ -20444,7 +20427,7 @@
         <p:spPr>
           <a:xfrm>
             <a:off x="521208" y="4224528"/>
-            <a:ext cx="4946904" cy="237744"/>
+            <a:ext cx="4718304" cy="237744"/>
           </a:xfrm>
           <a:prstGeom prst="rect">
             <a:avLst/>
@@ -20485,8 +20468,8 @@
         </p:nvSpPr>
         <p:spPr>
           <a:xfrm>
-            <a:off x="5852160" y="1234440"/>
-            <a:ext cx="2880360" cy="292608"/>
+            <a:off x="5623560" y="1234440"/>
+            <a:ext cx="3108960" cy="292608"/>
           </a:xfrm>
           <a:prstGeom prst="rect">
             <a:avLst/>
@@ -20527,7 +20510,7 @@
         </p:nvSpPr>
         <p:spPr>
           <a:xfrm>
-            <a:off x="5852160" y="1655064"/>
+            <a:off x="5623560" y="1655064"/>
             <a:ext cx="274320" cy="274320"/>
           </a:xfrm>
           <a:prstGeom prst="ellipse">
@@ -20552,7 +20535,7 @@
         </p:nvSpPr>
         <p:spPr>
           <a:xfrm>
-            <a:off x="5852160" y="1655064"/>
+            <a:off x="5623560" y="1655064"/>
             <a:ext cx="274320" cy="274320"/>
           </a:xfrm>
           <a:prstGeom prst="rect">
@@ -20594,8 +20577,8 @@
         </p:nvSpPr>
         <p:spPr>
           <a:xfrm>
-            <a:off x="6254496" y="1683083"/>
-            <a:ext cx="2478024" cy="236569"/>
+            <a:off x="6025896" y="1683083"/>
+            <a:ext cx="2706624" cy="236569"/>
           </a:xfrm>
           <a:prstGeom prst="rect">
             <a:avLst/>
@@ -20636,7 +20619,7 @@
         </p:nvSpPr>
         <p:spPr>
           <a:xfrm>
-            <a:off x="5852160" y="2112264"/>
+            <a:off x="5623560" y="2112264"/>
             <a:ext cx="274320" cy="274320"/>
           </a:xfrm>
           <a:prstGeom prst="ellipse">
@@ -20661,7 +20644,7 @@
         </p:nvSpPr>
         <p:spPr>
           <a:xfrm>
-            <a:off x="5852160" y="2112264"/>
+            <a:off x="5623560" y="2112264"/>
             <a:ext cx="274320" cy="274320"/>
           </a:xfrm>
           <a:prstGeom prst="rect">
@@ -20703,8 +20686,8 @@
         </p:nvSpPr>
         <p:spPr>
           <a:xfrm>
-            <a:off x="6254496" y="2140283"/>
-            <a:ext cx="2478024" cy="236569"/>
+            <a:off x="6025896" y="2140283"/>
+            <a:ext cx="2706624" cy="236569"/>
           </a:xfrm>
           <a:prstGeom prst="rect">
             <a:avLst/>
@@ -20731,7 +20714,7 @@
                 <a:ea typeface="微软雅黑" pitchFamily="34" charset="-122"/>
                 <a:cs typeface="微软雅黑" pitchFamily="34" charset="-120"/>
               </a:rPr>
-              <a:t>VCC 接 5V（接 3.3V 字会很淡）</a:t>
+              <a:t>VCC 接 5V，不要接 3.3V</a:t>
             </a:r>
             <a:endParaRPr lang="en-US" sz="1250" dirty="0"/>
           </a:p>
@@ -20745,7 +20728,7 @@
         </p:nvSpPr>
         <p:spPr>
           <a:xfrm>
-            <a:off x="5852160" y="2569464"/>
+            <a:off x="5623560" y="2569464"/>
             <a:ext cx="274320" cy="274320"/>
           </a:xfrm>
           <a:prstGeom prst="ellipse">
@@ -20770,7 +20753,7 @@
         </p:nvSpPr>
         <p:spPr>
           <a:xfrm>
-            <a:off x="5852160" y="2569464"/>
+            <a:off x="5623560" y="2569464"/>
             <a:ext cx="274320" cy="274320"/>
           </a:xfrm>
           <a:prstGeom prst="rect">
@@ -20812,8 +20795,8 @@
         </p:nvSpPr>
         <p:spPr>
           <a:xfrm>
-            <a:off x="6254496" y="2560320"/>
-            <a:ext cx="2478024" cy="454851"/>
+            <a:off x="6025896" y="2597483"/>
+            <a:ext cx="2706624" cy="236569"/>
           </a:xfrm>
           <a:prstGeom prst="rect">
             <a:avLst/>
@@ -20840,7 +20823,7 @@
                 <a:ea typeface="微软雅黑" pitchFamily="34" charset="-122"/>
                 <a:cs typeface="微软雅黑" pitchFamily="34" charset="-120"/>
               </a:rPr>
-              <a:t>SDA → A4、SCL → A5，别交叉接反</a:t>
+              <a:t>SDA → A4，SCL → A5，别接反</a:t>
             </a:r>
             <a:endParaRPr lang="en-US" sz="1250" dirty="0"/>
           </a:p>
@@ -20854,7 +20837,7 @@
         </p:nvSpPr>
         <p:spPr>
           <a:xfrm>
-            <a:off x="5852160" y="3188907"/>
+            <a:off x="5623560" y="3026664"/>
             <a:ext cx="274320" cy="274320"/>
           </a:xfrm>
           <a:prstGeom prst="ellipse">
@@ -20879,7 +20862,7 @@
         </p:nvSpPr>
         <p:spPr>
           <a:xfrm>
-            <a:off x="5852160" y="3188907"/>
+            <a:off x="5623560" y="3026664"/>
             <a:ext cx="274320" cy="274320"/>
           </a:xfrm>
           <a:prstGeom prst="rect">
@@ -20921,8 +20904,8 @@
         </p:nvSpPr>
         <p:spPr>
           <a:xfrm>
-            <a:off x="6254496" y="3216926"/>
-            <a:ext cx="2478024" cy="236569"/>
+            <a:off x="6025896" y="3054683"/>
+            <a:ext cx="2706624" cy="236569"/>
           </a:xfrm>
           <a:prstGeom prst="rect">
             <a:avLst/>
@@ -20963,12 +20946,12 @@
         </p:nvSpPr>
         <p:spPr>
           <a:xfrm>
-            <a:off x="5852160" y="3737547"/>
-            <a:ext cx="2880360" cy="834453"/>
+            <a:off x="5623560" y="3703320"/>
+            <a:ext cx="3108960" cy="868680"/>
           </a:xfrm>
           <a:prstGeom prst="roundRect">
             <a:avLst>
-              <a:gd name="adj" fmla="val 13150"/>
+              <a:gd name="adj" fmla="val 12632"/>
             </a:avLst>
           </a:prstGeom>
           <a:solidFill>
@@ -20990,7 +20973,7 @@
         </p:nvSpPr>
         <p:spPr>
           <a:xfrm>
-            <a:off x="5998464" y="3990181"/>
+            <a:off x="5769864" y="3973068"/>
             <a:ext cx="329184" cy="329184"/>
           </a:xfrm>
           <a:prstGeom prst="ellipse">
@@ -21023,7 +21006,7 @@
         </p:blipFill>
         <p:spPr>
           <a:xfrm>
-            <a:off x="6077468" y="4069185"/>
+            <a:off x="5848868" y="4052072"/>
             <a:ext cx="171176" cy="171176"/>
           </a:xfrm>
           <a:prstGeom prst="rect">
@@ -21039,8 +21022,8 @@
         </p:nvSpPr>
         <p:spPr>
           <a:xfrm>
-            <a:off x="6437376" y="3737547"/>
-            <a:ext cx="2185416" cy="834453"/>
+            <a:off x="6208776" y="3703320"/>
+            <a:ext cx="2414016" cy="868680"/>
           </a:xfrm>
           <a:prstGeom prst="rect">
             <a:avLst/>
@@ -23064,11 +23047,11 @@
         <p:spPr>
           <a:xfrm>
             <a:off x="594360" y="1911096"/>
-            <a:ext cx="475488" cy="457200"/>
+            <a:ext cx="438912" cy="457200"/>
           </a:xfrm>
           <a:prstGeom prst="roundRect">
             <a:avLst>
-              <a:gd name="adj" fmla="val 10000"/>
+              <a:gd name="adj" fmla="val 10417"/>
             </a:avLst>
           </a:prstGeom>
           <a:solidFill>
@@ -23091,7 +23074,7 @@
         <p:spPr>
           <a:xfrm>
             <a:off x="594360" y="1911096"/>
-            <a:ext cx="475488" cy="457200"/>
+            <a:ext cx="438912" cy="457200"/>
           </a:xfrm>
           <a:prstGeom prst="rect">
             <a:avLst/>
@@ -23132,12 +23115,12 @@
         </p:nvSpPr>
         <p:spPr>
           <a:xfrm>
-            <a:off x="1197864" y="1911096"/>
-            <a:ext cx="475488" cy="457200"/>
+            <a:off x="1124712" y="1911096"/>
+            <a:ext cx="438912" cy="457200"/>
           </a:xfrm>
           <a:prstGeom prst="roundRect">
             <a:avLst>
-              <a:gd name="adj" fmla="val 10000"/>
+              <a:gd name="adj" fmla="val 10417"/>
             </a:avLst>
           </a:prstGeom>
           <a:solidFill>
@@ -23159,8 +23142,8 @@
         </p:nvSpPr>
         <p:spPr>
           <a:xfrm>
-            <a:off x="1197864" y="1911096"/>
-            <a:ext cx="475488" cy="457200"/>
+            <a:off x="1124712" y="1911096"/>
+            <a:ext cx="438912" cy="457200"/>
           </a:xfrm>
           <a:prstGeom prst="rect">
             <a:avLst/>
@@ -23201,7 +23184,7 @@
         </p:nvSpPr>
         <p:spPr>
           <a:xfrm>
-            <a:off x="1801368" y="1911096"/>
+            <a:off x="1655064" y="1911096"/>
             <a:ext cx="274320" cy="457200"/>
           </a:xfrm>
           <a:prstGeom prst="rect">
@@ -23243,12 +23226,12 @@
         </p:nvSpPr>
         <p:spPr>
           <a:xfrm>
-            <a:off x="2203704" y="1911096"/>
-            <a:ext cx="475488" cy="457200"/>
+            <a:off x="2020824" y="1911096"/>
+            <a:ext cx="438912" cy="457200"/>
           </a:xfrm>
           <a:prstGeom prst="roundRect">
             <a:avLst>
-              <a:gd name="adj" fmla="val 10000"/>
+              <a:gd name="adj" fmla="val 10417"/>
             </a:avLst>
           </a:prstGeom>
           <a:solidFill>
@@ -23270,8 +23253,8 @@
         </p:nvSpPr>
         <p:spPr>
           <a:xfrm>
-            <a:off x="2203704" y="1911096"/>
-            <a:ext cx="475488" cy="457200"/>
+            <a:off x="2020824" y="1911096"/>
+            <a:ext cx="438912" cy="457200"/>
           </a:xfrm>
           <a:prstGeom prst="rect">
             <a:avLst/>
@@ -23312,8 +23295,8 @@
         </p:nvSpPr>
         <p:spPr>
           <a:xfrm>
-            <a:off x="2020824" y="2386584"/>
-            <a:ext cx="841248" cy="219456"/>
+            <a:off x="1837944" y="2386584"/>
+            <a:ext cx="804672" cy="219456"/>
           </a:xfrm>
           <a:prstGeom prst="rect">
             <a:avLst/>
@@ -23354,7 +23337,7 @@
         </p:nvSpPr>
         <p:spPr>
           <a:xfrm>
-            <a:off x="2807208" y="1911096"/>
+            <a:off x="2551176" y="1911096"/>
             <a:ext cx="274320" cy="457200"/>
           </a:xfrm>
           <a:prstGeom prst="rect">
@@ -23396,12 +23379,12 @@
         </p:nvSpPr>
         <p:spPr>
           <a:xfrm>
-            <a:off x="3209544" y="1911096"/>
-            <a:ext cx="475488" cy="457200"/>
+            <a:off x="2916936" y="1911096"/>
+            <a:ext cx="438912" cy="457200"/>
           </a:xfrm>
           <a:prstGeom prst="roundRect">
             <a:avLst>
-              <a:gd name="adj" fmla="val 10000"/>
+              <a:gd name="adj" fmla="val 10417"/>
             </a:avLst>
           </a:prstGeom>
           <a:solidFill>
@@ -23423,8 +23406,8 @@
         </p:nvSpPr>
         <p:spPr>
           <a:xfrm>
-            <a:off x="3209544" y="1911096"/>
-            <a:ext cx="475488" cy="457200"/>
+            <a:off x="2916936" y="1911096"/>
+            <a:ext cx="438912" cy="457200"/>
           </a:xfrm>
           <a:prstGeom prst="rect">
             <a:avLst/>
@@ -23465,8 +23448,8 @@
         </p:nvSpPr>
         <p:spPr>
           <a:xfrm>
-            <a:off x="3831336" y="1911096"/>
-            <a:ext cx="621792" cy="457200"/>
+            <a:off x="3465576" y="1911096"/>
+            <a:ext cx="987552" cy="457200"/>
           </a:xfrm>
           <a:prstGeom prst="rect">
             <a:avLst/>
@@ -24061,11 +24044,11 @@
         <p:spPr>
           <a:xfrm>
             <a:off x="4892040" y="1234440"/>
-            <a:ext cx="3840480" cy="1783080"/>
+            <a:ext cx="3840480" cy="1645920"/>
           </a:xfrm>
           <a:prstGeom prst="roundRect">
             <a:avLst>
-              <a:gd name="adj" fmla="val 6154"/>
+              <a:gd name="adj" fmla="val 6667"/>
             </a:avLst>
           </a:prstGeom>
           <a:solidFill>
@@ -24346,17 +24329,17 @@
         </p:nvSpPr>
         <p:spPr>
           <a:xfrm>
-            <a:off x="5074920" y="2532888"/>
-            <a:ext cx="3474720" cy="429768"/>
-          </a:xfrm>
-          <a:prstGeom prst="rect">
-            <a:avLst/>
-          </a:prstGeom>
-          <a:noFill/>
-          <a:ln/>
-        </p:spPr>
-        <p:txBody>
-          <a:bodyPr wrap="square" lIns="0" tIns="0" rIns="0" bIns="0" rtlCol="0" anchor="t"/>
+            <a:off x="5074920" y="2496312"/>
+            <a:ext cx="3474720" cy="274320"/>
+          </a:xfrm>
+          <a:prstGeom prst="rect">
+            <a:avLst/>
+          </a:prstGeom>
+          <a:noFill/>
+          <a:ln/>
+        </p:spPr>
+        <p:txBody>
+          <a:bodyPr wrap="square" lIns="0" tIns="0" rIns="0" bIns="0" rtlCol="0" anchor="ctr"/>
           <a:lstStyle/>
           <a:p>
             <a:pPr algn="l" indent="0" marL="0">
@@ -24405,12 +24388,12 @@
         </p:nvSpPr>
         <p:spPr>
           <a:xfrm>
-            <a:off x="4892040" y="3291840"/>
-            <a:ext cx="3840480" cy="1280160"/>
+            <a:off x="4892040" y="3154680"/>
+            <a:ext cx="3840480" cy="1417320"/>
           </a:xfrm>
           <a:prstGeom prst="roundRect">
             <a:avLst>
-              <a:gd name="adj" fmla="val 8571"/>
+              <a:gd name="adj" fmla="val 7742"/>
             </a:avLst>
           </a:prstGeom>
           <a:solidFill>
@@ -24432,7 +24415,7 @@
         </p:nvSpPr>
         <p:spPr>
           <a:xfrm>
-            <a:off x="5056632" y="3456432"/>
+            <a:off x="5056632" y="3319272"/>
             <a:ext cx="310896" cy="310896"/>
           </a:xfrm>
           <a:prstGeom prst="ellipse">
@@ -24465,7 +24448,7 @@
         </p:blipFill>
         <p:spPr>
           <a:xfrm>
-            <a:off x="5131247" y="3531047"/>
+            <a:off x="5131247" y="3393887"/>
             <a:ext cx="161666" cy="161666"/>
           </a:xfrm>
           <a:prstGeom prst="rect">
@@ -24481,7 +24464,7 @@
         </p:nvSpPr>
         <p:spPr>
           <a:xfrm>
-            <a:off x="5477256" y="3456432"/>
+            <a:off x="5477256" y="3319272"/>
             <a:ext cx="3090672" cy="310896"/>
           </a:xfrm>
           <a:prstGeom prst="rect">
@@ -24523,8 +24506,8 @@
         </p:nvSpPr>
         <p:spPr>
           <a:xfrm>
-            <a:off x="5056632" y="3858768"/>
-            <a:ext cx="3511296" cy="585216"/>
+            <a:off x="5056632" y="3721608"/>
+            <a:ext cx="3511296" cy="722376"/>
           </a:xfrm>
           <a:prstGeom prst="rect">
             <a:avLst/>
@@ -24585,7 +24568,27 @@
                 <a:ea typeface="微软雅黑" pitchFamily="34" charset="-122"/>
                 <a:cs typeface="微软雅黑" pitchFamily="34" charset="-120"/>
               </a:rPr>
-              <a:t>，否则编译报错：</a:t>
+              <a:t>。</a:t>
+            </a:r>
+            <a:endParaRPr lang="en-US" sz="1200" dirty="0"/>
+          </a:p>
+          <a:p>
+            <a:pPr algn="l" indent="0" marL="0">
+              <a:lnSpc>
+                <a:spcPct val="115000"/>
+              </a:lnSpc>
+              <a:buNone/>
+            </a:pPr>
+            <a:r>
+              <a:rPr lang="en-US" sz="1200" dirty="0">
+                <a:solidFill>
+                  <a:srgbClr val="2D2D2D"/>
+                </a:solidFill>
+                <a:latin typeface="微软雅黑" pitchFamily="34" charset="0"/>
+                <a:ea typeface="微软雅黑" pitchFamily="34" charset="-122"/>
+                <a:cs typeface="微软雅黑" pitchFamily="34" charset="-120"/>
+              </a:rPr>
+              <a:t>不补这一行，编译会报错：</a:t>
             </a:r>
             <a:endParaRPr lang="en-US" sz="1200" dirty="0"/>
           </a:p>
@@ -24816,11 +24819,11 @@
         <p:spPr>
           <a:xfrm>
             <a:off x="411480" y="1234440"/>
-            <a:ext cx="4709160" cy="2606040"/>
+            <a:ext cx="4709160" cy="2715768"/>
           </a:xfrm>
           <a:prstGeom prst="roundRect">
             <a:avLst>
-              <a:gd name="adj" fmla="val 3509"/>
+              <a:gd name="adj" fmla="val 3367"/>
             </a:avLst>
           </a:prstGeom>
           <a:solidFill>
@@ -24927,7 +24930,7 @@
         <p:spPr>
           <a:xfrm>
             <a:off x="502920" y="1545336"/>
-            <a:ext cx="208719" cy="181356"/>
+            <a:ext cx="218658" cy="189992"/>
           </a:xfrm>
           <a:prstGeom prst="rect">
             <a:avLst/>
@@ -24946,7 +24949,7 @@
               <a:buNone/>
             </a:pPr>
             <a:r>
-              <a:rPr lang="en-US" sz="950" dirty="0">
+              <a:rPr lang="en-US" sz="1000" dirty="0">
                 <a:solidFill>
                   <a:srgbClr val="7A7A7A"/>
                 </a:solidFill>
@@ -24956,7 +24959,7 @@
               </a:rPr>
               <a:t>1</a:t>
             </a:r>
-            <a:endParaRPr lang="en-US" sz="950" dirty="0"/>
+            <a:endParaRPr lang="en-US" sz="1000" dirty="0"/>
           </a:p>
         </p:txBody>
       </p:sp>
@@ -24968,8 +24971,8 @@
         </p:nvSpPr>
         <p:spPr>
           <a:xfrm>
-            <a:off x="828492" y="1545336"/>
-            <a:ext cx="4164132" cy="181356"/>
+            <a:off x="842254" y="1545336"/>
+            <a:ext cx="4150370" cy="189992"/>
           </a:xfrm>
           <a:prstGeom prst="rect">
             <a:avLst/>
@@ -24985,7 +24988,7 @@
               <a:buNone/>
             </a:pPr>
             <a:r>
-              <a:rPr lang="en-US" sz="1050" b="1" dirty="0">
+              <a:rPr lang="en-US" sz="1100" b="1" dirty="0">
                 <a:solidFill>
                   <a:srgbClr val="40E0D0"/>
                 </a:solidFill>
@@ -24999,7 +25002,7 @@
               <a:buNone/>
             </a:pPr>
             <a:r>
-              <a:rPr lang="en-US" sz="1050" b="1" dirty="0">
+              <a:rPr lang="en-US" sz="1100" b="1" dirty="0">
                 <a:solidFill>
                   <a:srgbClr val="FFFFFF"/>
                 </a:solidFill>
@@ -25013,7 +25016,7 @@
               <a:buNone/>
             </a:pPr>
             <a:r>
-              <a:rPr lang="en-US" sz="1050" dirty="0">
+              <a:rPr lang="en-US" sz="1100" dirty="0">
                 <a:solidFill>
                   <a:srgbClr val="BDBDBD"/>
                 </a:solidFill>
@@ -25023,7 +25026,7 @@
               </a:rPr>
               <a:t>()</a:t>
             </a:r>
-            <a:endParaRPr lang="en-US" sz="1050" dirty="0"/>
+            <a:endParaRPr lang="en-US" sz="1100" dirty="0"/>
           </a:p>
         </p:txBody>
       </p:sp>
@@ -25035,8 +25038,8 @@
         </p:nvSpPr>
         <p:spPr>
           <a:xfrm>
-            <a:off x="502920" y="1726692"/>
-            <a:ext cx="208719" cy="181356"/>
+            <a:off x="502920" y="1735328"/>
+            <a:ext cx="218658" cy="189992"/>
           </a:xfrm>
           <a:prstGeom prst="rect">
             <a:avLst/>
@@ -25055,7 +25058,7 @@
               <a:buNone/>
             </a:pPr>
             <a:r>
-              <a:rPr lang="en-US" sz="950" dirty="0">
+              <a:rPr lang="en-US" sz="1000" dirty="0">
                 <a:solidFill>
                   <a:srgbClr val="7A7A7A"/>
                 </a:solidFill>
@@ -25065,7 +25068,7 @@
               </a:rPr>
               <a:t>2</a:t>
             </a:r>
-            <a:endParaRPr lang="en-US" sz="950" dirty="0"/>
+            <a:endParaRPr lang="en-US" sz="1000" dirty="0"/>
           </a:p>
         </p:txBody>
       </p:sp>
@@ -25077,8 +25080,8 @@
         </p:nvSpPr>
         <p:spPr>
           <a:xfrm>
-            <a:off x="828492" y="1726692"/>
-            <a:ext cx="4164132" cy="181356"/>
+            <a:off x="842254" y="1735328"/>
+            <a:ext cx="4150370" cy="189992"/>
           </a:xfrm>
           <a:prstGeom prst="rect">
             <a:avLst/>
@@ -25094,7 +25097,7 @@
               <a:buNone/>
             </a:pPr>
             <a:r>
-              <a:rPr lang="en-US" sz="1050" dirty="0">
+              <a:rPr lang="en-US" sz="1100" dirty="0">
                 <a:solidFill>
                   <a:srgbClr val="BDBDBD"/>
                 </a:solidFill>
@@ -25104,7 +25107,7 @@
               </a:rPr>
               <a:t>{</a:t>
             </a:r>
-            <a:endParaRPr lang="en-US" sz="1050" dirty="0"/>
+            <a:endParaRPr lang="en-US" sz="1100" dirty="0"/>
           </a:p>
         </p:txBody>
       </p:sp>
@@ -25116,8 +25119,8 @@
         </p:nvSpPr>
         <p:spPr>
           <a:xfrm>
-            <a:off x="502920" y="1908048"/>
-            <a:ext cx="208719" cy="181356"/>
+            <a:off x="502920" y="1925320"/>
+            <a:ext cx="218658" cy="189992"/>
           </a:xfrm>
           <a:prstGeom prst="rect">
             <a:avLst/>
@@ -25136,7 +25139,7 @@
               <a:buNone/>
             </a:pPr>
             <a:r>
-              <a:rPr lang="en-US" sz="950" dirty="0">
+              <a:rPr lang="en-US" sz="1000" dirty="0">
                 <a:solidFill>
                   <a:srgbClr val="7A7A7A"/>
                 </a:solidFill>
@@ -25146,7 +25149,7 @@
               </a:rPr>
               <a:t>3</a:t>
             </a:r>
-            <a:endParaRPr lang="en-US" sz="950" dirty="0"/>
+            <a:endParaRPr lang="en-US" sz="1000" dirty="0"/>
           </a:p>
         </p:txBody>
       </p:sp>
@@ -25158,8 +25161,8 @@
         </p:nvSpPr>
         <p:spPr>
           <a:xfrm>
-            <a:off x="828492" y="1908048"/>
-            <a:ext cx="4164132" cy="181356"/>
+            <a:off x="842254" y="1925320"/>
+            <a:ext cx="4150370" cy="189992"/>
           </a:xfrm>
           <a:prstGeom prst="rect">
             <a:avLst/>
@@ -25175,7 +25178,7 @@
               <a:buNone/>
             </a:pPr>
             <a:r>
-              <a:rPr lang="en-US" sz="1050" dirty="0">
+              <a:rPr lang="en-US" sz="1100" dirty="0">
                 <a:solidFill>
                   <a:srgbClr val="D9D9D9"/>
                 </a:solidFill>
@@ -25189,7 +25192,7 @@
               <a:buNone/>
             </a:pPr>
             <a:r>
-              <a:rPr lang="en-US" sz="1050" b="1" dirty="0">
+              <a:rPr lang="en-US" sz="1100" b="1" dirty="0">
                 <a:solidFill>
                   <a:srgbClr val="FFFFFF"/>
                 </a:solidFill>
@@ -25203,7 +25206,7 @@
               <a:buNone/>
             </a:pPr>
             <a:r>
-              <a:rPr lang="en-US" sz="1050" dirty="0">
+              <a:rPr lang="en-US" sz="1100" dirty="0">
                 <a:solidFill>
                   <a:srgbClr val="BDBDBD"/>
                 </a:solidFill>
@@ -25217,7 +25220,7 @@
               <a:buNone/>
             </a:pPr>
             <a:r>
-              <a:rPr lang="en-US" sz="1050" b="1" dirty="0">
+              <a:rPr lang="en-US" sz="1100" b="1" dirty="0">
                 <a:solidFill>
                   <a:srgbClr val="FFFFFF"/>
                 </a:solidFill>
@@ -25231,7 +25234,7 @@
               <a:buNone/>
             </a:pPr>
             <a:r>
-              <a:rPr lang="en-US" sz="1050" dirty="0">
+              <a:rPr lang="en-US" sz="1100" dirty="0">
                 <a:solidFill>
                   <a:srgbClr val="BDBDBD"/>
                 </a:solidFill>
@@ -25245,7 +25248,7 @@
               <a:buNone/>
             </a:pPr>
             <a:r>
-              <a:rPr lang="en-US" sz="1050" dirty="0">
+              <a:rPr lang="en-US" sz="1100" dirty="0">
                 <a:solidFill>
                   <a:srgbClr val="F7C873"/>
                 </a:solidFill>
@@ -25259,7 +25262,7 @@
               <a:buNone/>
             </a:pPr>
             <a:r>
-              <a:rPr lang="en-US" sz="1050" dirty="0">
+              <a:rPr lang="en-US" sz="1100" dirty="0">
                 <a:solidFill>
                   <a:srgbClr val="BDBDBD"/>
                 </a:solidFill>
@@ -25273,7 +25276,7 @@
               <a:buNone/>
             </a:pPr>
             <a:r>
-              <a:rPr lang="en-US" sz="1050" i="1" dirty="0">
+              <a:rPr lang="en-US" sz="1100" i="1" dirty="0">
                 <a:solidFill>
                   <a:srgbClr val="8E8E8E"/>
                 </a:solidFill>
@@ -25283,7 +25286,7 @@
               </a:rPr>
               <a:t>// Leonardo: wait for</a:t>
             </a:r>
-            <a:endParaRPr lang="en-US" sz="1050" dirty="0"/>
+            <a:endParaRPr lang="en-US" sz="1100" dirty="0"/>
           </a:p>
         </p:txBody>
       </p:sp>
@@ -25295,8 +25298,8 @@
         </p:nvSpPr>
         <p:spPr>
           <a:xfrm>
-            <a:off x="502920" y="2089404"/>
-            <a:ext cx="208719" cy="181356"/>
+            <a:off x="502920" y="2115312"/>
+            <a:ext cx="218658" cy="189992"/>
           </a:xfrm>
           <a:prstGeom prst="rect">
             <a:avLst/>
@@ -25315,7 +25318,7 @@
               <a:buNone/>
             </a:pPr>
             <a:r>
-              <a:rPr lang="en-US" sz="950" dirty="0">
+              <a:rPr lang="en-US" sz="1000" dirty="0">
                 <a:solidFill>
                   <a:srgbClr val="7A7A7A"/>
                 </a:solidFill>
@@ -25325,7 +25328,7 @@
               </a:rPr>
               <a:t>↳</a:t>
             </a:r>
-            <a:endParaRPr lang="en-US" sz="950" dirty="0"/>
+            <a:endParaRPr lang="en-US" sz="1000" dirty="0"/>
           </a:p>
         </p:txBody>
       </p:sp>
@@ -25337,8 +25340,8 @@
         </p:nvSpPr>
         <p:spPr>
           <a:xfrm>
-            <a:off x="828492" y="2089404"/>
-            <a:ext cx="4164132" cy="181356"/>
+            <a:off x="842254" y="2115312"/>
+            <a:ext cx="4150370" cy="189992"/>
           </a:xfrm>
           <a:prstGeom prst="rect">
             <a:avLst/>
@@ -25354,7 +25357,7 @@
               <a:buNone/>
             </a:pPr>
             <a:r>
-              <a:rPr lang="en-US" sz="1050" i="1" dirty="0">
+              <a:rPr lang="en-US" sz="1100" i="1" dirty="0">
                 <a:solidFill>
                   <a:srgbClr val="8E8E8E"/>
                 </a:solidFill>
@@ -25364,7 +25367,7 @@
               </a:rPr>
               <a:t>    serial port to connect</a:t>
             </a:r>
-            <a:endParaRPr lang="en-US" sz="1050" dirty="0"/>
+            <a:endParaRPr lang="en-US" sz="1100" dirty="0"/>
           </a:p>
         </p:txBody>
       </p:sp>
@@ -25376,8 +25379,8 @@
         </p:nvSpPr>
         <p:spPr>
           <a:xfrm>
-            <a:off x="502920" y="2270760"/>
-            <a:ext cx="208719" cy="181356"/>
+            <a:off x="502920" y="2305304"/>
+            <a:ext cx="218658" cy="189992"/>
           </a:xfrm>
           <a:prstGeom prst="rect">
             <a:avLst/>
@@ -25396,7 +25399,7 @@
               <a:buNone/>
             </a:pPr>
             <a:r>
-              <a:rPr lang="en-US" sz="950" dirty="0">
+              <a:rPr lang="en-US" sz="1000" dirty="0">
                 <a:solidFill>
                   <a:srgbClr val="7A7A7A"/>
                 </a:solidFill>
@@ -25406,7 +25409,7 @@
               </a:rPr>
               <a:t>4</a:t>
             </a:r>
-            <a:endParaRPr lang="en-US" sz="950" dirty="0"/>
+            <a:endParaRPr lang="en-US" sz="1000" dirty="0"/>
           </a:p>
         </p:txBody>
       </p:sp>
@@ -25418,8 +25421,8 @@
         </p:nvSpPr>
         <p:spPr>
           <a:xfrm>
-            <a:off x="828492" y="2270760"/>
-            <a:ext cx="4164132" cy="181356"/>
+            <a:off x="842254" y="2305304"/>
+            <a:ext cx="4150370" cy="189992"/>
           </a:xfrm>
           <a:prstGeom prst="rect">
             <a:avLst/>
@@ -25435,7 +25438,7 @@
               <a:buNone/>
             </a:pPr>
             <a:r>
-              <a:rPr lang="en-US" sz="1050" dirty="0">
+              <a:rPr lang="en-US" sz="1100" dirty="0">
                 <a:solidFill>
                   <a:srgbClr val="D9D9D9"/>
                 </a:solidFill>
@@ -25449,7 +25452,7 @@
               <a:buNone/>
             </a:pPr>
             <a:r>
-              <a:rPr lang="en-US" sz="1050" b="1" dirty="0">
+              <a:rPr lang="en-US" sz="1100" b="1" dirty="0">
                 <a:solidFill>
                   <a:srgbClr val="40E0D0"/>
                 </a:solidFill>
@@ -25463,7 +25466,7 @@
               <a:buNone/>
             </a:pPr>
             <a:r>
-              <a:rPr lang="en-US" sz="1050" dirty="0">
+              <a:rPr lang="en-US" sz="1100" dirty="0">
                 <a:solidFill>
                   <a:srgbClr val="BDBDBD"/>
                 </a:solidFill>
@@ -25477,7 +25480,7 @@
               <a:buNone/>
             </a:pPr>
             <a:r>
-              <a:rPr lang="en-US" sz="1050" b="1" dirty="0">
+              <a:rPr lang="en-US" sz="1100" b="1" dirty="0">
                 <a:solidFill>
                   <a:srgbClr val="FFFFFF"/>
                 </a:solidFill>
@@ -25491,7 +25494,7 @@
               <a:buNone/>
             </a:pPr>
             <a:r>
-              <a:rPr lang="en-US" sz="1050" dirty="0">
+              <a:rPr lang="en-US" sz="1100" dirty="0">
                 <a:solidFill>
                   <a:srgbClr val="BDBDBD"/>
                 </a:solidFill>
@@ -25501,7 +25504,7 @@
               </a:rPr>
               <a:t>) { }</a:t>
             </a:r>
-            <a:endParaRPr lang="en-US" sz="1050" dirty="0"/>
+            <a:endParaRPr lang="en-US" sz="1100" dirty="0"/>
           </a:p>
         </p:txBody>
       </p:sp>
@@ -25513,8 +25516,8 @@
         </p:nvSpPr>
         <p:spPr>
           <a:xfrm>
-            <a:off x="502920" y="2452116"/>
-            <a:ext cx="208719" cy="181356"/>
+            <a:off x="502920" y="2495296"/>
+            <a:ext cx="218658" cy="189992"/>
           </a:xfrm>
           <a:prstGeom prst="rect">
             <a:avLst/>
@@ -25533,7 +25536,7 @@
               <a:buNone/>
             </a:pPr>
             <a:r>
-              <a:rPr lang="en-US" sz="950" dirty="0">
+              <a:rPr lang="en-US" sz="1000" dirty="0">
                 <a:solidFill>
                   <a:srgbClr val="7A7A7A"/>
                 </a:solidFill>
@@ -25543,7 +25546,7 @@
               </a:rPr>
               <a:t>5</a:t>
             </a:r>
-            <a:endParaRPr lang="en-US" sz="950" dirty="0"/>
+            <a:endParaRPr lang="en-US" sz="1000" dirty="0"/>
           </a:p>
         </p:txBody>
       </p:sp>
@@ -25555,8 +25558,8 @@
         </p:nvSpPr>
         <p:spPr>
           <a:xfrm>
-            <a:off x="828492" y="2452116"/>
-            <a:ext cx="4164132" cy="181356"/>
+            <a:off x="842254" y="2495296"/>
+            <a:ext cx="4150370" cy="189992"/>
           </a:xfrm>
           <a:prstGeom prst="rect">
             <a:avLst/>
@@ -25572,7 +25575,7 @@
               <a:buNone/>
             </a:pPr>
             <a:r>
-              <a:rPr lang="en-US" sz="1050" dirty="0">
+              <a:rPr lang="en-US" sz="1100" dirty="0">
                 <a:solidFill>
                   <a:srgbClr val="D9D9D9"/>
                 </a:solidFill>
@@ -25586,7 +25589,7 @@
               <a:buNone/>
             </a:pPr>
             <a:r>
-              <a:rPr lang="en-US" sz="1050" b="1" dirty="0">
+              <a:rPr lang="en-US" sz="1100" b="1" dirty="0">
                 <a:solidFill>
                   <a:srgbClr val="FFFFFF"/>
                 </a:solidFill>
@@ -25600,7 +25603,7 @@
               <a:buNone/>
             </a:pPr>
             <a:r>
-              <a:rPr lang="en-US" sz="1050" dirty="0">
+              <a:rPr lang="en-US" sz="1100" dirty="0">
                 <a:solidFill>
                   <a:srgbClr val="BDBDBD"/>
                 </a:solidFill>
@@ -25614,7 +25617,7 @@
               <a:buNone/>
             </a:pPr>
             <a:r>
-              <a:rPr lang="en-US" sz="1050" b="1" dirty="0">
+              <a:rPr lang="en-US" sz="1100" b="1" dirty="0">
                 <a:solidFill>
                   <a:srgbClr val="FFFFFF"/>
                 </a:solidFill>
@@ -25628,7 +25631,7 @@
               <a:buNone/>
             </a:pPr>
             <a:r>
-              <a:rPr lang="en-US" sz="1050" dirty="0">
+              <a:rPr lang="en-US" sz="1100" dirty="0">
                 <a:solidFill>
                   <a:srgbClr val="BDBDBD"/>
                 </a:solidFill>
@@ -25638,7 +25641,7 @@
               </a:rPr>
               <a:t>();</a:t>
             </a:r>
-            <a:endParaRPr lang="en-US" sz="1050" dirty="0"/>
+            <a:endParaRPr lang="en-US" sz="1100" dirty="0"/>
           </a:p>
         </p:txBody>
       </p:sp>
@@ -25650,8 +25653,8 @@
         </p:nvSpPr>
         <p:spPr>
           <a:xfrm>
-            <a:off x="502920" y="2633472"/>
-            <a:ext cx="208719" cy="181356"/>
+            <a:off x="502920" y="2685288"/>
+            <a:ext cx="218658" cy="189992"/>
           </a:xfrm>
           <a:prstGeom prst="rect">
             <a:avLst/>
@@ -25670,7 +25673,7 @@
               <a:buNone/>
             </a:pPr>
             <a:r>
-              <a:rPr lang="en-US" sz="950" dirty="0">
+              <a:rPr lang="en-US" sz="1000" dirty="0">
                 <a:solidFill>
                   <a:srgbClr val="7A7A7A"/>
                 </a:solidFill>
@@ -25680,7 +25683,7 @@
               </a:rPr>
               <a:t>6</a:t>
             </a:r>
-            <a:endParaRPr lang="en-US" sz="950" dirty="0"/>
+            <a:endParaRPr lang="en-US" sz="1000" dirty="0"/>
           </a:p>
         </p:txBody>
       </p:sp>
@@ -25692,8 +25695,8 @@
         </p:nvSpPr>
         <p:spPr>
           <a:xfrm>
-            <a:off x="828492" y="2633472"/>
-            <a:ext cx="4164132" cy="181356"/>
+            <a:off x="842254" y="2685288"/>
+            <a:ext cx="4150370" cy="189992"/>
           </a:xfrm>
           <a:prstGeom prst="rect">
             <a:avLst/>
@@ -25709,7 +25712,7 @@
               <a:buNone/>
             </a:pPr>
             <a:r>
-              <a:rPr lang="en-US" sz="1050" dirty="0">
+              <a:rPr lang="en-US" sz="1100" dirty="0">
                 <a:solidFill>
                   <a:srgbClr val="D9D9D9"/>
                 </a:solidFill>
@@ -25723,7 +25726,7 @@
               <a:buNone/>
             </a:pPr>
             <a:r>
-              <a:rPr lang="en-US" sz="1050" b="1" dirty="0">
+              <a:rPr lang="en-US" sz="1100" b="1" dirty="0">
                 <a:solidFill>
                   <a:srgbClr val="FFFFFF"/>
                 </a:solidFill>
@@ -25737,7 +25740,7 @@
               <a:buNone/>
             </a:pPr>
             <a:r>
-              <a:rPr lang="en-US" sz="1050" dirty="0">
+              <a:rPr lang="en-US" sz="1100" dirty="0">
                 <a:solidFill>
                   <a:srgbClr val="BDBDBD"/>
                 </a:solidFill>
@@ -25751,7 +25754,7 @@
               <a:buNone/>
             </a:pPr>
             <a:r>
-              <a:rPr lang="en-US" sz="1050" b="1" dirty="0">
+              <a:rPr lang="en-US" sz="1100" b="1" dirty="0">
                 <a:solidFill>
                   <a:srgbClr val="FFFFFF"/>
                 </a:solidFill>
@@ -25765,7 +25768,7 @@
               <a:buNone/>
             </a:pPr>
             <a:r>
-              <a:rPr lang="en-US" sz="1050" dirty="0">
+              <a:rPr lang="en-US" sz="1100" dirty="0">
                 <a:solidFill>
                   <a:srgbClr val="BDBDBD"/>
                 </a:solidFill>
@@ -25779,7 +25782,7 @@
               <a:buNone/>
             </a:pPr>
             <a:r>
-              <a:rPr lang="en-US" sz="1050" dirty="0">
+              <a:rPr lang="en-US" sz="1100" dirty="0">
                 <a:solidFill>
                   <a:srgbClr val="F7C873"/>
                 </a:solidFill>
@@ -25793,7 +25796,7 @@
               <a:buNone/>
             </a:pPr>
             <a:r>
-              <a:rPr lang="en-US" sz="1050" dirty="0">
+              <a:rPr lang="en-US" sz="1100" dirty="0">
                 <a:solidFill>
                   <a:srgbClr val="BDBDBD"/>
                 </a:solidFill>
@@ -25803,7 +25806,7 @@
               </a:rPr>
               <a:t>);</a:t>
             </a:r>
-            <a:endParaRPr lang="en-US" sz="1050" dirty="0"/>
+            <a:endParaRPr lang="en-US" sz="1100" dirty="0"/>
           </a:p>
         </p:txBody>
       </p:sp>
@@ -25815,8 +25818,8 @@
         </p:nvSpPr>
         <p:spPr>
           <a:xfrm>
-            <a:off x="502920" y="2814828"/>
-            <a:ext cx="208719" cy="181356"/>
+            <a:off x="502920" y="2875280"/>
+            <a:ext cx="218658" cy="189992"/>
           </a:xfrm>
           <a:prstGeom prst="rect">
             <a:avLst/>
@@ -25835,7 +25838,7 @@
               <a:buNone/>
             </a:pPr>
             <a:r>
-              <a:rPr lang="en-US" sz="950" dirty="0">
+              <a:rPr lang="en-US" sz="1000" dirty="0">
                 <a:solidFill>
                   <a:srgbClr val="7A7A7A"/>
                 </a:solidFill>
@@ -25845,7 +25848,7 @@
               </a:rPr>
               <a:t>7</a:t>
             </a:r>
-            <a:endParaRPr lang="en-US" sz="950" dirty="0"/>
+            <a:endParaRPr lang="en-US" sz="1000" dirty="0"/>
           </a:p>
         </p:txBody>
       </p:sp>
@@ -25857,8 +25860,8 @@
         </p:nvSpPr>
         <p:spPr>
           <a:xfrm>
-            <a:off x="828492" y="2814828"/>
-            <a:ext cx="4164132" cy="181356"/>
+            <a:off x="842254" y="2875280"/>
+            <a:ext cx="4150370" cy="189992"/>
           </a:xfrm>
           <a:prstGeom prst="rect">
             <a:avLst/>
@@ -25874,7 +25877,7 @@
               <a:buNone/>
             </a:pPr>
             <a:r>
-              <a:rPr lang="en-US" sz="1050" dirty="0">
+              <a:rPr lang="en-US" sz="1100" dirty="0">
                 <a:solidFill>
                   <a:srgbClr val="D9D9D9"/>
                 </a:solidFill>
@@ -25888,7 +25891,7 @@
               <a:buNone/>
             </a:pPr>
             <a:r>
-              <a:rPr lang="en-US" sz="1050" b="1" dirty="0">
+              <a:rPr lang="en-US" sz="1100" b="1" dirty="0">
                 <a:solidFill>
                   <a:srgbClr val="40E0D0"/>
                 </a:solidFill>
@@ -25902,7 +25905,7 @@
               <a:buNone/>
             </a:pPr>
             <a:r>
-              <a:rPr lang="en-US" sz="1050" dirty="0">
+              <a:rPr lang="en-US" sz="1100" dirty="0">
                 <a:solidFill>
                   <a:srgbClr val="D9D9D9"/>
                 </a:solidFill>
@@ -25916,7 +25919,7 @@
               <a:buNone/>
             </a:pPr>
             <a:r>
-              <a:rPr lang="en-US" sz="1050" dirty="0">
+              <a:rPr lang="en-US" sz="1100" dirty="0">
                 <a:solidFill>
                   <a:srgbClr val="BDBDBD"/>
                 </a:solidFill>
@@ -25930,7 +25933,7 @@
               <a:buNone/>
             </a:pPr>
             <a:r>
-              <a:rPr lang="en-US" sz="1050" dirty="0">
+              <a:rPr lang="en-US" sz="1100" dirty="0">
                 <a:solidFill>
                   <a:srgbClr val="F7C873"/>
                 </a:solidFill>
@@ -25944,7 +25947,7 @@
               <a:buNone/>
             </a:pPr>
             <a:r>
-              <a:rPr lang="en-US" sz="1050" dirty="0">
+              <a:rPr lang="en-US" sz="1100" dirty="0">
                 <a:solidFill>
                   <a:srgbClr val="BDBDBD"/>
                 </a:solidFill>
@@ -25954,7 +25957,7 @@
               </a:rPr>
               <a:t>;</a:t>
             </a:r>
-            <a:endParaRPr lang="en-US" sz="1050" dirty="0"/>
+            <a:endParaRPr lang="en-US" sz="1100" dirty="0"/>
           </a:p>
         </p:txBody>
       </p:sp>
@@ -25966,8 +25969,8 @@
         </p:nvSpPr>
         <p:spPr>
           <a:xfrm>
-            <a:off x="457200" y="2996184"/>
-            <a:ext cx="4617720" cy="181356"/>
+            <a:off x="457200" y="3065272"/>
+            <a:ext cx="4617720" cy="189992"/>
           </a:xfrm>
           <a:prstGeom prst="rect">
             <a:avLst/>
@@ -25991,8 +25994,8 @@
         </p:nvSpPr>
         <p:spPr>
           <a:xfrm>
-            <a:off x="502920" y="2996184"/>
-            <a:ext cx="208719" cy="181356"/>
+            <a:off x="502920" y="3065272"/>
+            <a:ext cx="218658" cy="189992"/>
           </a:xfrm>
           <a:prstGeom prst="rect">
             <a:avLst/>
@@ -26011,7 +26014,7 @@
               <a:buNone/>
             </a:pPr>
             <a:r>
-              <a:rPr lang="en-US" sz="950" b="1" dirty="0">
+              <a:rPr lang="en-US" sz="1000" b="1" dirty="0">
                 <a:solidFill>
                   <a:srgbClr val="40E0D0"/>
                 </a:solidFill>
@@ -26021,7 +26024,7 @@
               </a:rPr>
               <a:t>8</a:t>
             </a:r>
-            <a:endParaRPr lang="en-US" sz="950" dirty="0"/>
+            <a:endParaRPr lang="en-US" sz="1000" dirty="0"/>
           </a:p>
         </p:txBody>
       </p:sp>
@@ -26033,8 +26036,8 @@
         </p:nvSpPr>
         <p:spPr>
           <a:xfrm>
-            <a:off x="828492" y="2996184"/>
-            <a:ext cx="4164132" cy="181356"/>
+            <a:off x="842254" y="3065272"/>
+            <a:ext cx="4150370" cy="189992"/>
           </a:xfrm>
           <a:prstGeom prst="rect">
             <a:avLst/>
@@ -26050,7 +26053,7 @@
               <a:buNone/>
             </a:pPr>
             <a:r>
-              <a:rPr lang="en-US" sz="1050" dirty="0">
+              <a:rPr lang="en-US" sz="1100" dirty="0">
                 <a:solidFill>
                   <a:srgbClr val="D9D9D9"/>
                 </a:solidFill>
@@ -26064,7 +26067,7 @@
               <a:buNone/>
             </a:pPr>
             <a:r>
-              <a:rPr lang="en-US" sz="1050" dirty="0">
+              <a:rPr lang="en-US" sz="1100" dirty="0">
                 <a:solidFill>
                   <a:srgbClr val="BDBDBD"/>
                 </a:solidFill>
@@ -26078,7 +26081,7 @@
               <a:buNone/>
             </a:pPr>
             <a:r>
-              <a:rPr lang="en-US" sz="1050" b="1" dirty="0">
+              <a:rPr lang="en-US" sz="1100" b="1" dirty="0">
                 <a:solidFill>
                   <a:srgbClr val="FFFFFF"/>
                 </a:solidFill>
@@ -26092,7 +26095,7 @@
               <a:buNone/>
             </a:pPr>
             <a:r>
-              <a:rPr lang="en-US" sz="1050" dirty="0">
+              <a:rPr lang="en-US" sz="1100" dirty="0">
                 <a:solidFill>
                   <a:srgbClr val="BDBDBD"/>
                 </a:solidFill>
@@ -26102,7 +26105,7 @@
               </a:rPr>
               <a:t>();</a:t>
             </a:r>
-            <a:endParaRPr lang="en-US" sz="1050" dirty="0"/>
+            <a:endParaRPr lang="en-US" sz="1100" dirty="0"/>
           </a:p>
         </p:txBody>
       </p:sp>
@@ -26114,8 +26117,8 @@
         </p:nvSpPr>
         <p:spPr>
           <a:xfrm>
-            <a:off x="457200" y="3177540"/>
-            <a:ext cx="4617720" cy="181356"/>
+            <a:off x="457200" y="3255264"/>
+            <a:ext cx="4617720" cy="189992"/>
           </a:xfrm>
           <a:prstGeom prst="rect">
             <a:avLst/>
@@ -26139,8 +26142,8 @@
         </p:nvSpPr>
         <p:spPr>
           <a:xfrm>
-            <a:off x="502920" y="3177540"/>
-            <a:ext cx="208719" cy="181356"/>
+            <a:off x="502920" y="3255264"/>
+            <a:ext cx="218658" cy="189992"/>
           </a:xfrm>
           <a:prstGeom prst="rect">
             <a:avLst/>
@@ -26159,7 +26162,7 @@
               <a:buNone/>
             </a:pPr>
             <a:r>
-              <a:rPr lang="en-US" sz="950" b="1" dirty="0">
+              <a:rPr lang="en-US" sz="1000" b="1" dirty="0">
                 <a:solidFill>
                   <a:srgbClr val="40E0D0"/>
                 </a:solidFill>
@@ -26169,7 +26172,7 @@
               </a:rPr>
               <a:t>9</a:t>
             </a:r>
-            <a:endParaRPr lang="en-US" sz="950" dirty="0"/>
+            <a:endParaRPr lang="en-US" sz="1000" dirty="0"/>
           </a:p>
         </p:txBody>
       </p:sp>
@@ -26181,8 +26184,8 @@
         </p:nvSpPr>
         <p:spPr>
           <a:xfrm>
-            <a:off x="828492" y="3177540"/>
-            <a:ext cx="4164132" cy="181356"/>
+            <a:off x="842254" y="3255264"/>
+            <a:ext cx="4150370" cy="189992"/>
           </a:xfrm>
           <a:prstGeom prst="rect">
             <a:avLst/>
@@ -26198,7 +26201,7 @@
               <a:buNone/>
             </a:pPr>
             <a:r>
-              <a:rPr lang="en-US" sz="1050" dirty="0">
+              <a:rPr lang="en-US" sz="1100" dirty="0">
                 <a:solidFill>
                   <a:srgbClr val="D9D9D9"/>
                 </a:solidFill>
@@ -26212,7 +26215,7 @@
               <a:buNone/>
             </a:pPr>
             <a:r>
-              <a:rPr lang="en-US" sz="1050" b="1" dirty="0">
+              <a:rPr lang="en-US" sz="1100" b="1" dirty="0">
                 <a:solidFill>
                   <a:srgbClr val="40E0D0"/>
                 </a:solidFill>
@@ -26226,7 +26229,7 @@
               <a:buNone/>
             </a:pPr>
             <a:r>
-              <a:rPr lang="en-US" sz="1050" dirty="0">
+              <a:rPr lang="en-US" sz="1100" dirty="0">
                 <a:solidFill>
                   <a:srgbClr val="BDBDBD"/>
                 </a:solidFill>
@@ -26240,7 +26243,7 @@
               <a:buNone/>
             </a:pPr>
             <a:r>
-              <a:rPr lang="en-US" sz="1050" b="1" dirty="0">
+              <a:rPr lang="en-US" sz="1100" b="1" dirty="0">
                 <a:solidFill>
                   <a:srgbClr val="40E0D0"/>
                 </a:solidFill>
@@ -26254,7 +26257,7 @@
               <a:buNone/>
             </a:pPr>
             <a:r>
-              <a:rPr lang="en-US" sz="1050" dirty="0">
+              <a:rPr lang="en-US" sz="1100" dirty="0">
                 <a:solidFill>
                   <a:srgbClr val="D9D9D9"/>
                 </a:solidFill>
@@ -26268,7 +26271,7 @@
               <a:buNone/>
             </a:pPr>
             <a:r>
-              <a:rPr lang="en-US" sz="1050" dirty="0">
+              <a:rPr lang="en-US" sz="1100" dirty="0">
                 <a:solidFill>
                   <a:srgbClr val="BDBDBD"/>
                 </a:solidFill>
@@ -26282,7 +26285,7 @@
               <a:buNone/>
             </a:pPr>
             <a:r>
-              <a:rPr lang="en-US" sz="1050" dirty="0">
+              <a:rPr lang="en-US" sz="1100" dirty="0">
                 <a:solidFill>
                   <a:srgbClr val="F7C873"/>
                 </a:solidFill>
@@ -26296,7 +26299,7 @@
               <a:buNone/>
             </a:pPr>
             <a:r>
-              <a:rPr lang="en-US" sz="1050" dirty="0">
+              <a:rPr lang="en-US" sz="1100" dirty="0">
                 <a:solidFill>
                   <a:srgbClr val="BDBDBD"/>
                 </a:solidFill>
@@ -26310,7 +26313,7 @@
               <a:buNone/>
             </a:pPr>
             <a:r>
-              <a:rPr lang="en-US" sz="1050" dirty="0">
+              <a:rPr lang="en-US" sz="1100" dirty="0">
                 <a:solidFill>
                   <a:srgbClr val="D9D9D9"/>
                 </a:solidFill>
@@ -26324,7 +26327,7 @@
               <a:buNone/>
             </a:pPr>
             <a:r>
-              <a:rPr lang="en-US" sz="1050" dirty="0">
+              <a:rPr lang="en-US" sz="1100" dirty="0">
                 <a:solidFill>
                   <a:srgbClr val="BDBDBD"/>
                 </a:solidFill>
@@ -26338,7 +26341,7 @@
               <a:buNone/>
             </a:pPr>
             <a:r>
-              <a:rPr lang="en-US" sz="1050" dirty="0">
+              <a:rPr lang="en-US" sz="1100" dirty="0">
                 <a:solidFill>
                   <a:srgbClr val="F7C873"/>
                 </a:solidFill>
@@ -26352,7 +26355,7 @@
               <a:buNone/>
             </a:pPr>
             <a:r>
-              <a:rPr lang="en-US" sz="1050" dirty="0">
+              <a:rPr lang="en-US" sz="1100" dirty="0">
                 <a:solidFill>
                   <a:srgbClr val="BDBDBD"/>
                 </a:solidFill>
@@ -26366,7 +26369,7 @@
               <a:buNone/>
             </a:pPr>
             <a:r>
-              <a:rPr lang="en-US" sz="1050" dirty="0">
+              <a:rPr lang="en-US" sz="1100" dirty="0">
                 <a:solidFill>
                   <a:srgbClr val="D9D9D9"/>
                 </a:solidFill>
@@ -26380,7 +26383,7 @@
               <a:buNone/>
             </a:pPr>
             <a:r>
-              <a:rPr lang="en-US" sz="1050" dirty="0">
+              <a:rPr lang="en-US" sz="1100" dirty="0">
                 <a:solidFill>
                   <a:srgbClr val="BDBDBD"/>
                 </a:solidFill>
@@ -26390,7 +26393,7 @@
               </a:rPr>
               <a:t>++) {</a:t>
             </a:r>
-            <a:endParaRPr lang="en-US" sz="1050" dirty="0"/>
+            <a:endParaRPr lang="en-US" sz="1100" dirty="0"/>
           </a:p>
         </p:txBody>
       </p:sp>
@@ -26402,8 +26405,8 @@
         </p:nvSpPr>
         <p:spPr>
           <a:xfrm>
-            <a:off x="457200" y="3358896"/>
-            <a:ext cx="4617720" cy="181356"/>
+            <a:off x="457200" y="3445256"/>
+            <a:ext cx="4617720" cy="189992"/>
           </a:xfrm>
           <a:prstGeom prst="rect">
             <a:avLst/>
@@ -26427,8 +26430,8 @@
         </p:nvSpPr>
         <p:spPr>
           <a:xfrm>
-            <a:off x="502920" y="3358896"/>
-            <a:ext cx="208719" cy="181356"/>
+            <a:off x="502920" y="3445256"/>
+            <a:ext cx="218658" cy="189992"/>
           </a:xfrm>
           <a:prstGeom prst="rect">
             <a:avLst/>
@@ -26447,7 +26450,7 @@
               <a:buNone/>
             </a:pPr>
             <a:r>
-              <a:rPr lang="en-US" sz="950" b="1" dirty="0">
+              <a:rPr lang="en-US" sz="1000" b="1" dirty="0">
                 <a:solidFill>
                   <a:srgbClr val="40E0D0"/>
                 </a:solidFill>
@@ -26457,7 +26460,7 @@
               </a:rPr>
               <a:t>10</a:t>
             </a:r>
-            <a:endParaRPr lang="en-US" sz="950" dirty="0"/>
+            <a:endParaRPr lang="en-US" sz="1000" dirty="0"/>
           </a:p>
         </p:txBody>
       </p:sp>
@@ -26469,8 +26472,8 @@
         </p:nvSpPr>
         <p:spPr>
           <a:xfrm>
-            <a:off x="828492" y="3358896"/>
-            <a:ext cx="4164132" cy="181356"/>
+            <a:off x="842254" y="3445256"/>
+            <a:ext cx="4150370" cy="189992"/>
           </a:xfrm>
           <a:prstGeom prst="rect">
             <a:avLst/>
@@ -26486,7 +26489,7 @@
               <a:buNone/>
             </a:pPr>
             <a:r>
-              <a:rPr lang="en-US" sz="1050" dirty="0">
+              <a:rPr lang="en-US" sz="1100" dirty="0">
                 <a:solidFill>
                   <a:srgbClr val="D9D9D9"/>
                 </a:solidFill>
@@ -26500,7 +26503,7 @@
               <a:buNone/>
             </a:pPr>
             <a:r>
-              <a:rPr lang="en-US" sz="1050" dirty="0">
+              <a:rPr lang="en-US" sz="1100" dirty="0">
                 <a:solidFill>
                   <a:srgbClr val="BDBDBD"/>
                 </a:solidFill>
@@ -26514,7 +26517,7 @@
               <a:buNone/>
             </a:pPr>
             <a:r>
-              <a:rPr lang="en-US" sz="1050" dirty="0">
+              <a:rPr lang="en-US" sz="1100" dirty="0">
                 <a:solidFill>
                   <a:srgbClr val="D9D9D9"/>
                 </a:solidFill>
@@ -26528,7 +26531,7 @@
               <a:buNone/>
             </a:pPr>
             <a:r>
-              <a:rPr lang="en-US" sz="1050" dirty="0">
+              <a:rPr lang="en-US" sz="1100" dirty="0">
                 <a:solidFill>
                   <a:srgbClr val="BDBDBD"/>
                 </a:solidFill>
@@ -26542,7 +26545,7 @@
               <a:buNone/>
             </a:pPr>
             <a:r>
-              <a:rPr lang="en-US" sz="1050" dirty="0">
+              <a:rPr lang="en-US" sz="1100" dirty="0">
                 <a:solidFill>
                   <a:srgbClr val="D9D9D9"/>
                 </a:solidFill>
@@ -26556,7 +26559,7 @@
               <a:buNone/>
             </a:pPr>
             <a:r>
-              <a:rPr lang="en-US" sz="1050" dirty="0">
+              <a:rPr lang="en-US" sz="1100" dirty="0">
                 <a:solidFill>
                   <a:srgbClr val="BDBDBD"/>
                 </a:solidFill>
@@ -26566,7 +26569,7 @@
               </a:rPr>
               <a:t>);</a:t>
             </a:r>
-            <a:endParaRPr lang="en-US" sz="1050" dirty="0"/>
+            <a:endParaRPr lang="en-US" sz="1100" dirty="0"/>
           </a:p>
         </p:txBody>
       </p:sp>
@@ -26578,8 +26581,8 @@
         </p:nvSpPr>
         <p:spPr>
           <a:xfrm>
-            <a:off x="457200" y="3540252"/>
-            <a:ext cx="4617720" cy="181356"/>
+            <a:off x="457200" y="3635248"/>
+            <a:ext cx="4617720" cy="189992"/>
           </a:xfrm>
           <a:prstGeom prst="rect">
             <a:avLst/>
@@ -26603,8 +26606,8 @@
         </p:nvSpPr>
         <p:spPr>
           <a:xfrm>
-            <a:off x="502920" y="3540252"/>
-            <a:ext cx="208719" cy="181356"/>
+            <a:off x="502920" y="3635248"/>
+            <a:ext cx="218658" cy="189992"/>
           </a:xfrm>
           <a:prstGeom prst="rect">
             <a:avLst/>
@@ -26623,7 +26626,7 @@
               <a:buNone/>
             </a:pPr>
             <a:r>
-              <a:rPr lang="en-US" sz="950" b="1" dirty="0">
+              <a:rPr lang="en-US" sz="1000" b="1" dirty="0">
                 <a:solidFill>
                   <a:srgbClr val="40E0D0"/>
                 </a:solidFill>
@@ -26633,7 +26636,7 @@
               </a:rPr>
               <a:t>11</a:t>
             </a:r>
-            <a:endParaRPr lang="en-US" sz="950" dirty="0"/>
+            <a:endParaRPr lang="en-US" sz="1000" dirty="0"/>
           </a:p>
         </p:txBody>
       </p:sp>
@@ -26645,8 +26648,8 @@
         </p:nvSpPr>
         <p:spPr>
           <a:xfrm>
-            <a:off x="828492" y="3540252"/>
-            <a:ext cx="4164132" cy="181356"/>
+            <a:off x="842254" y="3635248"/>
+            <a:ext cx="4150370" cy="189992"/>
           </a:xfrm>
           <a:prstGeom prst="rect">
             <a:avLst/>
@@ -26662,7 +26665,7 @@
               <a:buNone/>
             </a:pPr>
             <a:r>
-              <a:rPr lang="en-US" sz="1050" dirty="0">
+              <a:rPr lang="en-US" sz="1100" dirty="0">
                 <a:solidFill>
                   <a:srgbClr val="D9D9D9"/>
                 </a:solidFill>
@@ -26676,7 +26679,7 @@
               <a:buNone/>
             </a:pPr>
             <a:r>
-              <a:rPr lang="en-US" sz="1050" b="1" dirty="0">
+              <a:rPr lang="en-US" sz="1100" b="1" dirty="0">
                 <a:solidFill>
                   <a:srgbClr val="40E0D0"/>
                 </a:solidFill>
@@ -26690,7 +26693,7 @@
               <a:buNone/>
             </a:pPr>
             <a:r>
-              <a:rPr lang="en-US" sz="1050" dirty="0">
+              <a:rPr lang="en-US" sz="1100" dirty="0">
                 <a:solidFill>
                   <a:srgbClr val="BDBDBD"/>
                 </a:solidFill>
@@ -26704,7 +26707,7 @@
               <a:buNone/>
             </a:pPr>
             <a:r>
-              <a:rPr lang="en-US" sz="1050" dirty="0">
+              <a:rPr lang="en-US" sz="1100" dirty="0">
                 <a:solidFill>
                   <a:srgbClr val="D9D9D9"/>
                 </a:solidFill>
@@ -26718,7 +26721,7 @@
               <a:buNone/>
             </a:pPr>
             <a:r>
-              <a:rPr lang="en-US" sz="1050" dirty="0">
+              <a:rPr lang="en-US" sz="1100" dirty="0">
                 <a:solidFill>
                   <a:srgbClr val="BDBDBD"/>
                 </a:solidFill>
@@ -26732,7 +26735,7 @@
               <a:buNone/>
             </a:pPr>
             <a:r>
-              <a:rPr lang="en-US" sz="1050" dirty="0">
+              <a:rPr lang="en-US" sz="1100" dirty="0">
                 <a:solidFill>
                   <a:srgbClr val="D9D9D9"/>
                 </a:solidFill>
@@ -26746,7 +26749,7 @@
               <a:buNone/>
             </a:pPr>
             <a:r>
-              <a:rPr lang="en-US" sz="1050" dirty="0">
+              <a:rPr lang="en-US" sz="1100" dirty="0">
                 <a:solidFill>
                   <a:srgbClr val="BDBDBD"/>
                 </a:solidFill>
@@ -26760,7 +26763,7 @@
               <a:buNone/>
             </a:pPr>
             <a:r>
-              <a:rPr lang="en-US" sz="1050" dirty="0">
+              <a:rPr lang="en-US" sz="1100" dirty="0">
                 <a:solidFill>
                   <a:srgbClr val="F7C873"/>
                 </a:solidFill>
@@ -26774,7 +26777,7 @@
               <a:buNone/>
             </a:pPr>
             <a:r>
-              <a:rPr lang="en-US" sz="1050" dirty="0">
+              <a:rPr lang="en-US" sz="1100" dirty="0">
                 <a:solidFill>
                   <a:srgbClr val="BDBDBD"/>
                 </a:solidFill>
@@ -26784,24 +26787,621 @@
               </a:rPr>
               <a:t>) {</a:t>
             </a:r>
-            <a:endParaRPr lang="en-US" sz="1050" dirty="0"/>
-          </a:p>
-        </p:txBody>
-      </p:sp>
-      <p:sp>
-        <p:nvSpPr>
-          <p:cNvPr id="37" name="Shape 34"/>
+            <a:endParaRPr lang="en-US" sz="1100" dirty="0"/>
+          </a:p>
+        </p:txBody>
+      </p:sp>
+      <p:sp>
+        <p:nvSpPr>
+          <p:cNvPr id="37" name="Text 34"/>
+          <p:cNvSpPr txBox="1"/>
+          <p:nvPr/>
+        </p:nvSpPr>
+        <p:spPr>
+          <a:xfrm>
+            <a:off x="5413248" y="1234440"/>
+            <a:ext cx="3319272" cy="274320"/>
+          </a:xfrm>
+          <a:prstGeom prst="rect">
+            <a:avLst/>
+          </a:prstGeom>
+          <a:noFill/>
+          <a:ln/>
+        </p:spPr>
+        <p:txBody>
+          <a:bodyPr wrap="square" lIns="0" tIns="0" rIns="0" bIns="0" rtlCol="0" anchor="ctr"/>
+          <a:lstStyle/>
+          <a:p>
+            <a:pPr algn="l" indent="0" marL="0">
+              <a:lnSpc>
+                <a:spcPct val="115000"/>
+              </a:lnSpc>
+              <a:buNone/>
+            </a:pPr>
+            <a:r>
+              <a:rPr lang="en-US" sz="1300" b="1" dirty="0">
+                <a:solidFill>
+                  <a:srgbClr val="2D2D2D"/>
+                </a:solidFill>
+                <a:latin typeface="微软雅黑" pitchFamily="34" charset="0"/>
+                <a:ea typeface="微软雅黑" pitchFamily="34" charset="-122"/>
+                <a:cs typeface="微软雅黑" pitchFamily="34" charset="-120"/>
+              </a:rPr>
+              <a:t>逐行看懂</a:t>
+            </a:r>
+            <a:endParaRPr lang="en-US" sz="1300" dirty="0"/>
+          </a:p>
+        </p:txBody>
+      </p:sp>
+      <p:sp>
+        <p:nvSpPr>
+          <p:cNvPr id="38" name="Shape 35"/>
           <p:cNvSpPr/>
           <p:nvPr/>
         </p:nvSpPr>
         <p:spPr>
           <a:xfrm>
-            <a:off x="411480" y="4114800"/>
-            <a:ext cx="4709160" cy="457200"/>
+            <a:off x="5413248" y="1600200"/>
+            <a:ext cx="723392" cy="219456"/>
           </a:xfrm>
           <a:prstGeom prst="roundRect">
             <a:avLst>
-              <a:gd name="adj" fmla="val 24000"/>
+              <a:gd name="adj" fmla="val 50000"/>
+            </a:avLst>
+          </a:prstGeom>
+          <a:solidFill>
+            <a:srgbClr val="40E0D0"/>
+          </a:solidFill>
+          <a:ln w="12700">
+            <a:solidFill>
+              <a:srgbClr val="40E0D0"/>
+            </a:solidFill>
+            <a:prstDash val="solid"/>
+          </a:ln>
+        </p:spPr>
+      </p:sp>
+      <p:sp>
+        <p:nvSpPr>
+          <p:cNvPr id="39" name="Text 36"/>
+          <p:cNvSpPr txBox="1"/>
+          <p:nvPr/>
+        </p:nvSpPr>
+        <p:spPr>
+          <a:xfrm>
+            <a:off x="5413248" y="1600200"/>
+            <a:ext cx="723392" cy="219456"/>
+          </a:xfrm>
+          <a:prstGeom prst="rect">
+            <a:avLst/>
+          </a:prstGeom>
+          <a:noFill/>
+          <a:ln/>
+        </p:spPr>
+        <p:txBody>
+          <a:bodyPr wrap="square" lIns="0" tIns="0" rIns="0" bIns="0" rtlCol="0" anchor="ctr"/>
+          <a:lstStyle/>
+          <a:p>
+            <a:pPr algn="ctr" indent="0" marL="0">
+              <a:lnSpc>
+                <a:spcPct val="115000"/>
+              </a:lnSpc>
+              <a:buNone/>
+            </a:pPr>
+            <a:r>
+              <a:rPr lang="en-US" sz="950" b="1" dirty="0">
+                <a:solidFill>
+                  <a:srgbClr val="2D2D2D"/>
+                </a:solidFill>
+                <a:latin typeface="微软雅黑" pitchFamily="34" charset="0"/>
+                <a:ea typeface="微软雅黑" pitchFamily="34" charset="-122"/>
+                <a:cs typeface="微软雅黑" pitchFamily="34" charset="-120"/>
+              </a:rPr>
+              <a:t>第 1–2 行</a:t>
+            </a:r>
+            <a:endParaRPr lang="en-US" sz="950" dirty="0"/>
+          </a:p>
+        </p:txBody>
+      </p:sp>
+      <p:sp>
+        <p:nvSpPr>
+          <p:cNvPr id="40" name="Text 37"/>
+          <p:cNvSpPr txBox="1"/>
+          <p:nvPr/>
+        </p:nvSpPr>
+        <p:spPr>
+          <a:xfrm>
+            <a:off x="6228080" y="1591056"/>
+            <a:ext cx="2504440" cy="417576"/>
+          </a:xfrm>
+          <a:prstGeom prst="rect">
+            <a:avLst/>
+          </a:prstGeom>
+          <a:noFill/>
+          <a:ln/>
+        </p:spPr>
+        <p:txBody>
+          <a:bodyPr wrap="square" lIns="0" tIns="0" rIns="0" bIns="0" rtlCol="0" anchor="t"/>
+          <a:lstStyle/>
+          <a:p>
+            <a:pPr algn="l" indent="0" marL="0">
+              <a:lnSpc>
+                <a:spcPct val="110000"/>
+              </a:lnSpc>
+              <a:buNone/>
+            </a:pPr>
+            <a:r>
+              <a:rPr lang="en-US" sz="1200" dirty="0">
+                <a:solidFill>
+                  <a:srgbClr val="2D2D2D"/>
+                </a:solidFill>
+                <a:latin typeface="微软雅黑" pitchFamily="34" charset="0"/>
+                <a:ea typeface="微软雅黑" pitchFamily="34" charset="-122"/>
+                <a:cs typeface="微软雅黑" pitchFamily="34" charset="-120"/>
+              </a:rPr>
+              <a:t>全部写在 setup() 里：扫描一次就够</a:t>
+            </a:r>
+            <a:endParaRPr lang="en-US" sz="1200" dirty="0"/>
+          </a:p>
+        </p:txBody>
+      </p:sp>
+      <p:sp>
+        <p:nvSpPr>
+          <p:cNvPr id="41" name="Shape 38"/>
+          <p:cNvSpPr/>
+          <p:nvPr/>
+        </p:nvSpPr>
+        <p:spPr>
+          <a:xfrm>
+            <a:off x="5413248" y="2036064"/>
+            <a:ext cx="723392" cy="219456"/>
+          </a:xfrm>
+          <a:prstGeom prst="roundRect">
+            <a:avLst>
+              <a:gd name="adj" fmla="val 50000"/>
+            </a:avLst>
+          </a:prstGeom>
+          <a:solidFill>
+            <a:srgbClr val="40E0D0"/>
+          </a:solidFill>
+          <a:ln w="12700">
+            <a:solidFill>
+              <a:srgbClr val="40E0D0"/>
+            </a:solidFill>
+            <a:prstDash val="solid"/>
+          </a:ln>
+        </p:spPr>
+      </p:sp>
+      <p:sp>
+        <p:nvSpPr>
+          <p:cNvPr id="42" name="Text 39"/>
+          <p:cNvSpPr txBox="1"/>
+          <p:nvPr/>
+        </p:nvSpPr>
+        <p:spPr>
+          <a:xfrm>
+            <a:off x="5413248" y="2036064"/>
+            <a:ext cx="723392" cy="219456"/>
+          </a:xfrm>
+          <a:prstGeom prst="rect">
+            <a:avLst/>
+          </a:prstGeom>
+          <a:noFill/>
+          <a:ln/>
+        </p:spPr>
+        <p:txBody>
+          <a:bodyPr wrap="square" lIns="0" tIns="0" rIns="0" bIns="0" rtlCol="0" anchor="ctr"/>
+          <a:lstStyle/>
+          <a:p>
+            <a:pPr algn="ctr" indent="0" marL="0">
+              <a:lnSpc>
+                <a:spcPct val="115000"/>
+              </a:lnSpc>
+              <a:buNone/>
+            </a:pPr>
+            <a:r>
+              <a:rPr lang="en-US" sz="950" b="1" dirty="0">
+                <a:solidFill>
+                  <a:srgbClr val="2D2D2D"/>
+                </a:solidFill>
+                <a:latin typeface="微软雅黑" pitchFamily="34" charset="0"/>
+                <a:ea typeface="微软雅黑" pitchFamily="34" charset="-122"/>
+                <a:cs typeface="微软雅黑" pitchFamily="34" charset="-120"/>
+              </a:rPr>
+              <a:t>第 3–4 行</a:t>
+            </a:r>
+            <a:endParaRPr lang="en-US" sz="950" dirty="0"/>
+          </a:p>
+        </p:txBody>
+      </p:sp>
+      <p:sp>
+        <p:nvSpPr>
+          <p:cNvPr id="43" name="Text 40"/>
+          <p:cNvSpPr txBox="1"/>
+          <p:nvPr/>
+        </p:nvSpPr>
+        <p:spPr>
+          <a:xfrm>
+            <a:off x="6228080" y="2026920"/>
+            <a:ext cx="2504440" cy="256032"/>
+          </a:xfrm>
+          <a:prstGeom prst="rect">
+            <a:avLst/>
+          </a:prstGeom>
+          <a:noFill/>
+          <a:ln/>
+        </p:spPr>
+        <p:txBody>
+          <a:bodyPr wrap="square" lIns="0" tIns="0" rIns="0" bIns="0" rtlCol="0" anchor="t"/>
+          <a:lstStyle/>
+          <a:p>
+            <a:pPr algn="l" indent="0" marL="0">
+              <a:lnSpc>
+                <a:spcPct val="110000"/>
+              </a:lnSpc>
+              <a:buNone/>
+            </a:pPr>
+            <a:r>
+              <a:rPr lang="en-US" sz="1200" dirty="0">
+                <a:solidFill>
+                  <a:srgbClr val="2D2D2D"/>
+                </a:solidFill>
+                <a:latin typeface="微软雅黑" pitchFamily="34" charset="0"/>
+                <a:ea typeface="微软雅黑" pitchFamily="34" charset="-122"/>
+                <a:cs typeface="微软雅黑" pitchFamily="34" charset="-120"/>
+              </a:rPr>
+              <a:t>打开串口 9600，等它准备好</a:t>
+            </a:r>
+            <a:endParaRPr lang="en-US" sz="1200" dirty="0"/>
+          </a:p>
+        </p:txBody>
+      </p:sp>
+      <p:sp>
+        <p:nvSpPr>
+          <p:cNvPr id="44" name="Shape 41"/>
+          <p:cNvSpPr/>
+          <p:nvPr/>
+        </p:nvSpPr>
+        <p:spPr>
+          <a:xfrm>
+            <a:off x="5413248" y="2480564"/>
+            <a:ext cx="723392" cy="219456"/>
+          </a:xfrm>
+          <a:prstGeom prst="roundRect">
+            <a:avLst>
+              <a:gd name="adj" fmla="val 50000"/>
+            </a:avLst>
+          </a:prstGeom>
+          <a:solidFill>
+            <a:srgbClr val="40E0D0"/>
+          </a:solidFill>
+          <a:ln w="12700">
+            <a:solidFill>
+              <a:srgbClr val="40E0D0"/>
+            </a:solidFill>
+            <a:prstDash val="solid"/>
+          </a:ln>
+        </p:spPr>
+      </p:sp>
+      <p:sp>
+        <p:nvSpPr>
+          <p:cNvPr id="45" name="Text 42"/>
+          <p:cNvSpPr txBox="1"/>
+          <p:nvPr/>
+        </p:nvSpPr>
+        <p:spPr>
+          <a:xfrm>
+            <a:off x="5413248" y="2480564"/>
+            <a:ext cx="723392" cy="219456"/>
+          </a:xfrm>
+          <a:prstGeom prst="rect">
+            <a:avLst/>
+          </a:prstGeom>
+          <a:noFill/>
+          <a:ln/>
+        </p:spPr>
+        <p:txBody>
+          <a:bodyPr wrap="square" lIns="0" tIns="0" rIns="0" bIns="0" rtlCol="0" anchor="ctr"/>
+          <a:lstStyle/>
+          <a:p>
+            <a:pPr algn="ctr" indent="0" marL="0">
+              <a:lnSpc>
+                <a:spcPct val="115000"/>
+              </a:lnSpc>
+              <a:buNone/>
+            </a:pPr>
+            <a:r>
+              <a:rPr lang="en-US" sz="950" b="1" dirty="0">
+                <a:solidFill>
+                  <a:srgbClr val="2D2D2D"/>
+                </a:solidFill>
+                <a:latin typeface="微软雅黑" pitchFamily="34" charset="0"/>
+                <a:ea typeface="微软雅黑" pitchFamily="34" charset="-122"/>
+                <a:cs typeface="微软雅黑" pitchFamily="34" charset="-120"/>
+              </a:rPr>
+              <a:t>第 5–7 行</a:t>
+            </a:r>
+            <a:endParaRPr lang="en-US" sz="950" dirty="0"/>
+          </a:p>
+        </p:txBody>
+      </p:sp>
+      <p:sp>
+        <p:nvSpPr>
+          <p:cNvPr id="46" name="Text 43"/>
+          <p:cNvSpPr txBox="1"/>
+          <p:nvPr/>
+        </p:nvSpPr>
+        <p:spPr>
+          <a:xfrm>
+            <a:off x="6228080" y="2471420"/>
+            <a:ext cx="2504440" cy="256032"/>
+          </a:xfrm>
+          <a:prstGeom prst="rect">
+            <a:avLst/>
+          </a:prstGeom>
+          <a:noFill/>
+          <a:ln/>
+        </p:spPr>
+        <p:txBody>
+          <a:bodyPr wrap="square" lIns="0" tIns="0" rIns="0" bIns="0" rtlCol="0" anchor="t"/>
+          <a:lstStyle/>
+          <a:p>
+            <a:pPr algn="l" indent="0" marL="0">
+              <a:lnSpc>
+                <a:spcPct val="110000"/>
+              </a:lnSpc>
+              <a:buNone/>
+            </a:pPr>
+            <a:r>
+              <a:rPr lang="en-US" sz="1200" dirty="0">
+                <a:solidFill>
+                  <a:srgbClr val="2D2D2D"/>
+                </a:solidFill>
+                <a:latin typeface="微软雅黑" pitchFamily="34" charset="0"/>
+                <a:ea typeface="微软雅黑" pitchFamily="34" charset="-122"/>
+                <a:cs typeface="微软雅黑" pitchFamily="34" charset="-120"/>
+              </a:rPr>
+              <a:t>打印标题；count 用来计数</a:t>
+            </a:r>
+            <a:endParaRPr lang="en-US" sz="1200" dirty="0"/>
+          </a:p>
+        </p:txBody>
+      </p:sp>
+      <p:sp>
+        <p:nvSpPr>
+          <p:cNvPr id="47" name="Shape 44"/>
+          <p:cNvSpPr/>
+          <p:nvPr/>
+        </p:nvSpPr>
+        <p:spPr>
+          <a:xfrm>
+            <a:off x="5413248" y="3050540"/>
+            <a:ext cx="723392" cy="219456"/>
+          </a:xfrm>
+          <a:prstGeom prst="roundRect">
+            <a:avLst>
+              <a:gd name="adj" fmla="val 50000"/>
+            </a:avLst>
+          </a:prstGeom>
+          <a:solidFill>
+            <a:srgbClr val="40E0D0"/>
+          </a:solidFill>
+          <a:ln w="12700">
+            <a:solidFill>
+              <a:srgbClr val="40E0D0"/>
+            </a:solidFill>
+            <a:prstDash val="solid"/>
+          </a:ln>
+        </p:spPr>
+      </p:sp>
+      <p:sp>
+        <p:nvSpPr>
+          <p:cNvPr id="48" name="Text 45"/>
+          <p:cNvSpPr txBox="1"/>
+          <p:nvPr/>
+        </p:nvSpPr>
+        <p:spPr>
+          <a:xfrm>
+            <a:off x="5413248" y="3050540"/>
+            <a:ext cx="723392" cy="219456"/>
+          </a:xfrm>
+          <a:prstGeom prst="rect">
+            <a:avLst/>
+          </a:prstGeom>
+          <a:noFill/>
+          <a:ln/>
+        </p:spPr>
+        <p:txBody>
+          <a:bodyPr wrap="square" lIns="0" tIns="0" rIns="0" bIns="0" rtlCol="0" anchor="ctr"/>
+          <a:lstStyle/>
+          <a:p>
+            <a:pPr algn="ctr" indent="0" marL="0">
+              <a:lnSpc>
+                <a:spcPct val="115000"/>
+              </a:lnSpc>
+              <a:buNone/>
+            </a:pPr>
+            <a:r>
+              <a:rPr lang="en-US" sz="950" b="1" dirty="0">
+                <a:solidFill>
+                  <a:srgbClr val="2D2D2D"/>
+                </a:solidFill>
+                <a:latin typeface="微软雅黑" pitchFamily="34" charset="0"/>
+                <a:ea typeface="微软雅黑" pitchFamily="34" charset="-122"/>
+                <a:cs typeface="微软雅黑" pitchFamily="34" charset="-120"/>
+              </a:rPr>
+              <a:t>第 8–9 行</a:t>
+            </a:r>
+            <a:endParaRPr lang="en-US" sz="950" dirty="0"/>
+          </a:p>
+        </p:txBody>
+      </p:sp>
+      <p:sp>
+        <p:nvSpPr>
+          <p:cNvPr id="49" name="Text 46"/>
+          <p:cNvSpPr txBox="1"/>
+          <p:nvPr/>
+        </p:nvSpPr>
+        <p:spPr>
+          <a:xfrm>
+            <a:off x="6228080" y="3041396"/>
+            <a:ext cx="2504440" cy="256032"/>
+          </a:xfrm>
+          <a:prstGeom prst="rect">
+            <a:avLst/>
+          </a:prstGeom>
+          <a:noFill/>
+          <a:ln/>
+        </p:spPr>
+        <p:txBody>
+          <a:bodyPr wrap="square" lIns="0" tIns="0" rIns="0" bIns="0" rtlCol="0" anchor="t"/>
+          <a:lstStyle/>
+          <a:p>
+            <a:pPr algn="l" indent="0" marL="0">
+              <a:lnSpc>
+                <a:spcPct val="110000"/>
+              </a:lnSpc>
+              <a:buNone/>
+            </a:pPr>
+            <a:r>
+              <a:rPr lang="en-US" sz="1200" dirty="0">
+                <a:solidFill>
+                  <a:srgbClr val="2D2D2D"/>
+                </a:solidFill>
+                <a:latin typeface="微软雅黑" pitchFamily="34" charset="0"/>
+                <a:ea typeface="微软雅黑" pitchFamily="34" charset="-122"/>
+                <a:cs typeface="微软雅黑" pitchFamily="34" charset="-120"/>
+              </a:rPr>
+              <a:t>启动 I2C；i 从 8 数到 119</a:t>
+            </a:r>
+            <a:endParaRPr lang="en-US" sz="1200" dirty="0"/>
+          </a:p>
+        </p:txBody>
+      </p:sp>
+      <p:sp>
+        <p:nvSpPr>
+          <p:cNvPr id="50" name="Shape 47"/>
+          <p:cNvSpPr/>
+          <p:nvPr/>
+        </p:nvSpPr>
+        <p:spPr>
+          <a:xfrm>
+            <a:off x="5413248" y="3430524"/>
+            <a:ext cx="877824" cy="219456"/>
+          </a:xfrm>
+          <a:prstGeom prst="roundRect">
+            <a:avLst>
+              <a:gd name="adj" fmla="val 50000"/>
+            </a:avLst>
+          </a:prstGeom>
+          <a:solidFill>
+            <a:srgbClr val="40E0D0"/>
+          </a:solidFill>
+          <a:ln w="12700">
+            <a:solidFill>
+              <a:srgbClr val="40E0D0"/>
+            </a:solidFill>
+            <a:prstDash val="solid"/>
+          </a:ln>
+        </p:spPr>
+      </p:sp>
+      <p:sp>
+        <p:nvSpPr>
+          <p:cNvPr id="51" name="Text 48"/>
+          <p:cNvSpPr txBox="1"/>
+          <p:nvPr/>
+        </p:nvSpPr>
+        <p:spPr>
+          <a:xfrm>
+            <a:off x="5413248" y="3430524"/>
+            <a:ext cx="877824" cy="219456"/>
+          </a:xfrm>
+          <a:prstGeom prst="rect">
+            <a:avLst/>
+          </a:prstGeom>
+          <a:noFill/>
+          <a:ln/>
+        </p:spPr>
+        <p:txBody>
+          <a:bodyPr wrap="square" lIns="0" tIns="0" rIns="0" bIns="0" rtlCol="0" anchor="ctr"/>
+          <a:lstStyle/>
+          <a:p>
+            <a:pPr algn="ctr" indent="0" marL="0">
+              <a:lnSpc>
+                <a:spcPct val="115000"/>
+              </a:lnSpc>
+              <a:buNone/>
+            </a:pPr>
+            <a:r>
+              <a:rPr lang="en-US" sz="950" b="1" dirty="0">
+                <a:solidFill>
+                  <a:srgbClr val="2D2D2D"/>
+                </a:solidFill>
+                <a:latin typeface="微软雅黑" pitchFamily="34" charset="0"/>
+                <a:ea typeface="微软雅黑" pitchFamily="34" charset="-122"/>
+                <a:cs typeface="微软雅黑" pitchFamily="34" charset="-120"/>
+              </a:rPr>
+              <a:t>第 10–11 行</a:t>
+            </a:r>
+            <a:endParaRPr lang="en-US" sz="950" dirty="0"/>
+          </a:p>
+        </p:txBody>
+      </p:sp>
+      <p:sp>
+        <p:nvSpPr>
+          <p:cNvPr id="52" name="Text 49"/>
+          <p:cNvSpPr txBox="1"/>
+          <p:nvPr/>
+        </p:nvSpPr>
+        <p:spPr>
+          <a:xfrm>
+            <a:off x="6382512" y="3421380"/>
+            <a:ext cx="2350008" cy="256032"/>
+          </a:xfrm>
+          <a:prstGeom prst="rect">
+            <a:avLst/>
+          </a:prstGeom>
+          <a:noFill/>
+          <a:ln/>
+        </p:spPr>
+        <p:txBody>
+          <a:bodyPr wrap="square" lIns="0" tIns="0" rIns="0" bIns="0" rtlCol="0" anchor="t"/>
+          <a:lstStyle/>
+          <a:p>
+            <a:pPr algn="l" indent="0" marL="0">
+              <a:lnSpc>
+                <a:spcPct val="110000"/>
+              </a:lnSpc>
+              <a:buNone/>
+            </a:pPr>
+            <a:r>
+              <a:rPr lang="en-US" sz="1200" dirty="0">
+                <a:solidFill>
+                  <a:srgbClr val="2D2D2D"/>
+                </a:solidFill>
+                <a:latin typeface="微软雅黑" pitchFamily="34" charset="0"/>
+                <a:ea typeface="微软雅黑" pitchFamily="34" charset="-122"/>
+                <a:cs typeface="微软雅黑" pitchFamily="34" charset="-120"/>
+              </a:rPr>
+              <a:t>敲 i 号的门：返回 0 = 有应答</a:t>
+            </a:r>
+            <a:endParaRPr lang="en-US" sz="1200" dirty="0"/>
+          </a:p>
+        </p:txBody>
+      </p:sp>
+      <p:sp>
+        <p:nvSpPr>
+          <p:cNvPr id="53" name="Shape 50"/>
+          <p:cNvSpPr/>
+          <p:nvPr/>
+        </p:nvSpPr>
+        <p:spPr>
+          <a:xfrm>
+            <a:off x="411480" y="4224528"/>
+            <a:ext cx="8321040" cy="347472"/>
+          </a:xfrm>
+          <a:prstGeom prst="roundRect">
+            <a:avLst>
+              <a:gd name="adj" fmla="val 31579"/>
             </a:avLst>
           </a:prstGeom>
           <a:solidFill>
@@ -26817,14 +27417,14 @@
       </p:sp>
       <p:sp>
         <p:nvSpPr>
-          <p:cNvPr id="38" name="Shape 35"/>
+          <p:cNvPr id="54" name="Shape 51"/>
           <p:cNvSpPr/>
           <p:nvPr/>
         </p:nvSpPr>
         <p:spPr>
           <a:xfrm>
-            <a:off x="539496" y="4197096"/>
-            <a:ext cx="292608" cy="292608"/>
+            <a:off x="539496" y="4270248"/>
+            <a:ext cx="256032" cy="256032"/>
           </a:xfrm>
           <a:prstGeom prst="ellipse">
             <a:avLst/>
@@ -26842,7 +27442,7 @@
       </p:sp>
       <p:pic>
         <p:nvPicPr>
-          <p:cNvPr id="39" name="Image 0" descr="preencoded.png">    </p:cNvPr>
+          <p:cNvPr id="55" name="Image 0" descr="preencoded.png">    </p:cNvPr>
           <p:cNvPicPr>
             <a:picLocks noChangeAspect="1"/>
           </p:cNvPicPr>
@@ -26856,8 +27456,8 @@
         </p:blipFill>
         <p:spPr>
           <a:xfrm>
-            <a:off x="609722" y="4267322"/>
-            <a:ext cx="152156" cy="152156"/>
+            <a:off x="600944" y="4331696"/>
+            <a:ext cx="133137" cy="133137"/>
           </a:xfrm>
           <a:prstGeom prst="rect">
             <a:avLst/>
@@ -26866,14 +27466,14 @@
       </p:pic>
       <p:sp>
         <p:nvSpPr>
-          <p:cNvPr id="40" name="Text 36"/>
-          <p:cNvSpPr txBox="1"/>
-          <p:nvPr/>
-        </p:nvSpPr>
-        <p:spPr>
-          <a:xfrm>
-            <a:off x="941832" y="4114800"/>
-            <a:ext cx="4069080" cy="457200"/>
+          <p:cNvPr id="56" name="Text 52"/>
+          <p:cNvSpPr txBox="1"/>
+          <p:nvPr/>
+        </p:nvSpPr>
+        <p:spPr>
+          <a:xfrm>
+            <a:off x="905256" y="4224528"/>
+            <a:ext cx="7699248" cy="347472"/>
           </a:xfrm>
           <a:prstGeom prst="rect">
             <a:avLst/>
@@ -26900,7 +27500,7 @@
                 <a:ea typeface="微软雅黑" pitchFamily="34" charset="-122"/>
                 <a:cs typeface="微软雅黑" pitchFamily="34" charset="-120"/>
               </a:rPr>
-              <a:t>原指南漏了一行：第 1 行之前要加 </a:t>
+              <a:t>原指南这段程序漏了第一行：要在第 1 行之前补上 </a:t>
             </a:r>
             <a:pPr algn="l" indent="0" marL="0">
               <a:lnSpc>
@@ -26919,31 +27519,6 @@
               </a:rPr>
               <a:t>#include &lt;Wire.h&gt;</a:t>
             </a:r>
-            <a:endParaRPr lang="en-US" sz="1200" dirty="0"/>
-          </a:p>
-        </p:txBody>
-      </p:sp>
-      <p:sp>
-        <p:nvSpPr>
-          <p:cNvPr id="41" name="Text 37"/>
-          <p:cNvSpPr txBox="1"/>
-          <p:nvPr/>
-        </p:nvSpPr>
-        <p:spPr>
-          <a:xfrm>
-            <a:off x="5413248" y="1234440"/>
-            <a:ext cx="3319272" cy="274320"/>
-          </a:xfrm>
-          <a:prstGeom prst="rect">
-            <a:avLst/>
-          </a:prstGeom>
-          <a:noFill/>
-          <a:ln/>
-        </p:spPr>
-        <p:txBody>
-          <a:bodyPr wrap="square" lIns="0" tIns="0" rIns="0" bIns="0" rtlCol="0" anchor="ctr"/>
-          <a:lstStyle/>
-          <a:p>
             <a:pPr algn="l" indent="0" marL="0">
               <a:lnSpc>
                 <a:spcPct val="115000"/>
@@ -26951,681 +27526,15 @@
               <a:buNone/>
             </a:pPr>
             <a:r>
-              <a:rPr lang="en-US" sz="1300" b="1" dirty="0">
-                <a:solidFill>
-                  <a:srgbClr val="2D2D2D"/>
+              <a:rPr lang="en-US" sz="1200" dirty="0">
+                <a:solidFill>
+                  <a:srgbClr val="E5484D"/>
                 </a:solidFill>
                 <a:latin typeface="微软雅黑" pitchFamily="34" charset="0"/>
                 <a:ea typeface="微软雅黑" pitchFamily="34" charset="-122"/>
                 <a:cs typeface="微软雅黑" pitchFamily="34" charset="-120"/>
               </a:rPr>
-              <a:t>逐行看懂</a:t>
-            </a:r>
-            <a:endParaRPr lang="en-US" sz="1300" dirty="0"/>
-          </a:p>
-        </p:txBody>
-      </p:sp>
-      <p:sp>
-        <p:nvSpPr>
-          <p:cNvPr id="42" name="Shape 38"/>
-          <p:cNvSpPr/>
-          <p:nvPr/>
-        </p:nvSpPr>
-        <p:spPr>
-          <a:xfrm>
-            <a:off x="5413248" y="1600200"/>
-            <a:ext cx="723392" cy="219456"/>
-          </a:xfrm>
-          <a:prstGeom prst="roundRect">
-            <a:avLst>
-              <a:gd name="adj" fmla="val 50000"/>
-            </a:avLst>
-          </a:prstGeom>
-          <a:solidFill>
-            <a:srgbClr val="40E0D0"/>
-          </a:solidFill>
-          <a:ln w="12700">
-            <a:solidFill>
-              <a:srgbClr val="40E0D0"/>
-            </a:solidFill>
-            <a:prstDash val="solid"/>
-          </a:ln>
-        </p:spPr>
-      </p:sp>
-      <p:sp>
-        <p:nvSpPr>
-          <p:cNvPr id="43" name="Text 39"/>
-          <p:cNvSpPr txBox="1"/>
-          <p:nvPr/>
-        </p:nvSpPr>
-        <p:spPr>
-          <a:xfrm>
-            <a:off x="5413248" y="1600200"/>
-            <a:ext cx="723392" cy="219456"/>
-          </a:xfrm>
-          <a:prstGeom prst="rect">
-            <a:avLst/>
-          </a:prstGeom>
-          <a:noFill/>
-          <a:ln/>
-        </p:spPr>
-        <p:txBody>
-          <a:bodyPr wrap="square" lIns="0" tIns="0" rIns="0" bIns="0" rtlCol="0" anchor="ctr"/>
-          <a:lstStyle/>
-          <a:p>
-            <a:pPr algn="ctr" indent="0" marL="0">
-              <a:lnSpc>
-                <a:spcPct val="115000"/>
-              </a:lnSpc>
-              <a:buNone/>
-            </a:pPr>
-            <a:r>
-              <a:rPr lang="en-US" sz="950" b="1" dirty="0">
-                <a:solidFill>
-                  <a:srgbClr val="2D2D2D"/>
-                </a:solidFill>
-                <a:latin typeface="微软雅黑" pitchFamily="34" charset="0"/>
-                <a:ea typeface="微软雅黑" pitchFamily="34" charset="-122"/>
-                <a:cs typeface="微软雅黑" pitchFamily="34" charset="-120"/>
-              </a:rPr>
-              <a:t>第 1–2 行</a:t>
-            </a:r>
-            <a:endParaRPr lang="en-US" sz="950" dirty="0"/>
-          </a:p>
-        </p:txBody>
-      </p:sp>
-      <p:sp>
-        <p:nvSpPr>
-          <p:cNvPr id="44" name="Text 40"/>
-          <p:cNvSpPr txBox="1"/>
-          <p:nvPr/>
-        </p:nvSpPr>
-        <p:spPr>
-          <a:xfrm>
-            <a:off x="6228080" y="1591056"/>
-            <a:ext cx="2504440" cy="417576"/>
-          </a:xfrm>
-          <a:prstGeom prst="rect">
-            <a:avLst/>
-          </a:prstGeom>
-          <a:noFill/>
-          <a:ln/>
-        </p:spPr>
-        <p:txBody>
-          <a:bodyPr wrap="square" lIns="0" tIns="0" rIns="0" bIns="0" rtlCol="0" anchor="t"/>
-          <a:lstStyle/>
-          <a:p>
-            <a:pPr algn="l" indent="0" marL="0">
-              <a:lnSpc>
-                <a:spcPct val="110000"/>
-              </a:lnSpc>
-              <a:buNone/>
-            </a:pPr>
-            <a:r>
-              <a:rPr lang="en-US" sz="1200" dirty="0">
-                <a:solidFill>
-                  <a:srgbClr val="2D2D2D"/>
-                </a:solidFill>
-                <a:latin typeface="微软雅黑" pitchFamily="34" charset="0"/>
-                <a:ea typeface="微软雅黑" pitchFamily="34" charset="-122"/>
-                <a:cs typeface="微软雅黑" pitchFamily="34" charset="-120"/>
-              </a:rPr>
-              <a:t>全部写在 setup() 里：扫描一次就够</a:t>
-            </a:r>
-            <a:endParaRPr lang="en-US" sz="1200" dirty="0"/>
-          </a:p>
-        </p:txBody>
-      </p:sp>
-      <p:sp>
-        <p:nvSpPr>
-          <p:cNvPr id="45" name="Shape 41"/>
-          <p:cNvSpPr/>
-          <p:nvPr/>
-        </p:nvSpPr>
-        <p:spPr>
-          <a:xfrm>
-            <a:off x="5413248" y="2072640"/>
-            <a:ext cx="723392" cy="219456"/>
-          </a:xfrm>
-          <a:prstGeom prst="roundRect">
-            <a:avLst>
-              <a:gd name="adj" fmla="val 50000"/>
-            </a:avLst>
-          </a:prstGeom>
-          <a:solidFill>
-            <a:srgbClr val="40E0D0"/>
-          </a:solidFill>
-          <a:ln w="12700">
-            <a:solidFill>
-              <a:srgbClr val="40E0D0"/>
-            </a:solidFill>
-            <a:prstDash val="solid"/>
-          </a:ln>
-        </p:spPr>
-      </p:sp>
-      <p:sp>
-        <p:nvSpPr>
-          <p:cNvPr id="46" name="Text 42"/>
-          <p:cNvSpPr txBox="1"/>
-          <p:nvPr/>
-        </p:nvSpPr>
-        <p:spPr>
-          <a:xfrm>
-            <a:off x="5413248" y="2072640"/>
-            <a:ext cx="723392" cy="219456"/>
-          </a:xfrm>
-          <a:prstGeom prst="rect">
-            <a:avLst/>
-          </a:prstGeom>
-          <a:noFill/>
-          <a:ln/>
-        </p:spPr>
-        <p:txBody>
-          <a:bodyPr wrap="square" lIns="0" tIns="0" rIns="0" bIns="0" rtlCol="0" anchor="ctr"/>
-          <a:lstStyle/>
-          <a:p>
-            <a:pPr algn="ctr" indent="0" marL="0">
-              <a:lnSpc>
-                <a:spcPct val="115000"/>
-              </a:lnSpc>
-              <a:buNone/>
-            </a:pPr>
-            <a:r>
-              <a:rPr lang="en-US" sz="950" b="1" dirty="0">
-                <a:solidFill>
-                  <a:srgbClr val="2D2D2D"/>
-                </a:solidFill>
-                <a:latin typeface="微软雅黑" pitchFamily="34" charset="0"/>
-                <a:ea typeface="微软雅黑" pitchFamily="34" charset="-122"/>
-                <a:cs typeface="微软雅黑" pitchFamily="34" charset="-120"/>
-              </a:rPr>
-              <a:t>第 3–4 行</a:t>
-            </a:r>
-            <a:endParaRPr lang="en-US" sz="950" dirty="0"/>
-          </a:p>
-        </p:txBody>
-      </p:sp>
-      <p:sp>
-        <p:nvSpPr>
-          <p:cNvPr id="47" name="Text 43"/>
-          <p:cNvSpPr txBox="1"/>
-          <p:nvPr/>
-        </p:nvSpPr>
-        <p:spPr>
-          <a:xfrm>
-            <a:off x="6228080" y="2063496"/>
-            <a:ext cx="2504440" cy="417576"/>
-          </a:xfrm>
-          <a:prstGeom prst="rect">
-            <a:avLst/>
-          </a:prstGeom>
-          <a:noFill/>
-          <a:ln/>
-        </p:spPr>
-        <p:txBody>
-          <a:bodyPr wrap="square" lIns="0" tIns="0" rIns="0" bIns="0" rtlCol="0" anchor="t"/>
-          <a:lstStyle/>
-          <a:p>
-            <a:pPr algn="l" indent="0" marL="0">
-              <a:lnSpc>
-                <a:spcPct val="110000"/>
-              </a:lnSpc>
-              <a:buNone/>
-            </a:pPr>
-            <a:r>
-              <a:rPr lang="en-US" sz="1200" dirty="0">
-                <a:solidFill>
-                  <a:srgbClr val="2D2D2D"/>
-                </a:solidFill>
-                <a:latin typeface="微软雅黑" pitchFamily="34" charset="0"/>
-                <a:ea typeface="微软雅黑" pitchFamily="34" charset="-122"/>
-                <a:cs typeface="微软雅黑" pitchFamily="34" charset="-120"/>
-              </a:rPr>
-              <a:t>打开串口 9600，等它准备好（UNO 马上通过）</a:t>
-            </a:r>
-            <a:endParaRPr lang="en-US" sz="1200" dirty="0"/>
-          </a:p>
-        </p:txBody>
-      </p:sp>
-      <p:sp>
-        <p:nvSpPr>
-          <p:cNvPr id="48" name="Shape 44"/>
-          <p:cNvSpPr/>
-          <p:nvPr/>
-        </p:nvSpPr>
-        <p:spPr>
-          <a:xfrm>
-            <a:off x="5413248" y="2545080"/>
-            <a:ext cx="723392" cy="219456"/>
-          </a:xfrm>
-          <a:prstGeom prst="roundRect">
-            <a:avLst>
-              <a:gd name="adj" fmla="val 50000"/>
-            </a:avLst>
-          </a:prstGeom>
-          <a:solidFill>
-            <a:srgbClr val="40E0D0"/>
-          </a:solidFill>
-          <a:ln w="12700">
-            <a:solidFill>
-              <a:srgbClr val="40E0D0"/>
-            </a:solidFill>
-            <a:prstDash val="solid"/>
-          </a:ln>
-        </p:spPr>
-      </p:sp>
-      <p:sp>
-        <p:nvSpPr>
-          <p:cNvPr id="49" name="Text 45"/>
-          <p:cNvSpPr txBox="1"/>
-          <p:nvPr/>
-        </p:nvSpPr>
-        <p:spPr>
-          <a:xfrm>
-            <a:off x="5413248" y="2545080"/>
-            <a:ext cx="723392" cy="219456"/>
-          </a:xfrm>
-          <a:prstGeom prst="rect">
-            <a:avLst/>
-          </a:prstGeom>
-          <a:noFill/>
-          <a:ln/>
-        </p:spPr>
-        <p:txBody>
-          <a:bodyPr wrap="square" lIns="0" tIns="0" rIns="0" bIns="0" rtlCol="0" anchor="ctr"/>
-          <a:lstStyle/>
-          <a:p>
-            <a:pPr algn="ctr" indent="0" marL="0">
-              <a:lnSpc>
-                <a:spcPct val="115000"/>
-              </a:lnSpc>
-              <a:buNone/>
-            </a:pPr>
-            <a:r>
-              <a:rPr lang="en-US" sz="950" b="1" dirty="0">
-                <a:solidFill>
-                  <a:srgbClr val="2D2D2D"/>
-                </a:solidFill>
-                <a:latin typeface="微软雅黑" pitchFamily="34" charset="0"/>
-                <a:ea typeface="微软雅黑" pitchFamily="34" charset="-122"/>
-                <a:cs typeface="微软雅黑" pitchFamily="34" charset="-120"/>
-              </a:rPr>
-              <a:t>第 5–7 行</a:t>
-            </a:r>
-            <a:endParaRPr lang="en-US" sz="950" dirty="0"/>
-          </a:p>
-        </p:txBody>
-      </p:sp>
-      <p:sp>
-        <p:nvSpPr>
-          <p:cNvPr id="50" name="Text 46"/>
-          <p:cNvSpPr txBox="1"/>
-          <p:nvPr/>
-        </p:nvSpPr>
-        <p:spPr>
-          <a:xfrm>
-            <a:off x="6228080" y="2535936"/>
-            <a:ext cx="2504440" cy="417576"/>
-          </a:xfrm>
-          <a:prstGeom prst="rect">
-            <a:avLst/>
-          </a:prstGeom>
-          <a:noFill/>
-          <a:ln/>
-        </p:spPr>
-        <p:txBody>
-          <a:bodyPr wrap="square" lIns="0" tIns="0" rIns="0" bIns="0" rtlCol="0" anchor="t"/>
-          <a:lstStyle/>
-          <a:p>
-            <a:pPr algn="l" indent="0" marL="0">
-              <a:lnSpc>
-                <a:spcPct val="110000"/>
-              </a:lnSpc>
-              <a:buNone/>
-            </a:pPr>
-            <a:r>
-              <a:rPr lang="en-US" sz="1200" dirty="0">
-                <a:solidFill>
-                  <a:srgbClr val="2D2D2D"/>
-                </a:solidFill>
-                <a:latin typeface="微软雅黑" pitchFamily="34" charset="0"/>
-                <a:ea typeface="微软雅黑" pitchFamily="34" charset="-122"/>
-                <a:cs typeface="微软雅黑" pitchFamily="34" charset="-120"/>
-              </a:rPr>
-              <a:t>打印标题；count 记录找到几个设备</a:t>
-            </a:r>
-            <a:endParaRPr lang="en-US" sz="1200" dirty="0"/>
-          </a:p>
-        </p:txBody>
-      </p:sp>
-      <p:sp>
-        <p:nvSpPr>
-          <p:cNvPr id="51" name="Shape 47"/>
-          <p:cNvSpPr/>
-          <p:nvPr/>
-        </p:nvSpPr>
-        <p:spPr>
-          <a:xfrm>
-            <a:off x="5413248" y="3017520"/>
-            <a:ext cx="578612" cy="219456"/>
-          </a:xfrm>
-          <a:prstGeom prst="roundRect">
-            <a:avLst>
-              <a:gd name="adj" fmla="val 50000"/>
-            </a:avLst>
-          </a:prstGeom>
-          <a:solidFill>
-            <a:srgbClr val="40E0D0"/>
-          </a:solidFill>
-          <a:ln w="12700">
-            <a:solidFill>
-              <a:srgbClr val="40E0D0"/>
-            </a:solidFill>
-            <a:prstDash val="solid"/>
-          </a:ln>
-        </p:spPr>
-      </p:sp>
-      <p:sp>
-        <p:nvSpPr>
-          <p:cNvPr id="52" name="Text 48"/>
-          <p:cNvSpPr txBox="1"/>
-          <p:nvPr/>
-        </p:nvSpPr>
-        <p:spPr>
-          <a:xfrm>
-            <a:off x="5413248" y="3017520"/>
-            <a:ext cx="578612" cy="219456"/>
-          </a:xfrm>
-          <a:prstGeom prst="rect">
-            <a:avLst/>
-          </a:prstGeom>
-          <a:noFill/>
-          <a:ln/>
-        </p:spPr>
-        <p:txBody>
-          <a:bodyPr wrap="square" lIns="0" tIns="0" rIns="0" bIns="0" rtlCol="0" anchor="ctr"/>
-          <a:lstStyle/>
-          <a:p>
-            <a:pPr algn="ctr" indent="0" marL="0">
-              <a:lnSpc>
-                <a:spcPct val="115000"/>
-              </a:lnSpc>
-              <a:buNone/>
-            </a:pPr>
-            <a:r>
-              <a:rPr lang="en-US" sz="950" b="1" dirty="0">
-                <a:solidFill>
-                  <a:srgbClr val="2D2D2D"/>
-                </a:solidFill>
-                <a:latin typeface="微软雅黑" pitchFamily="34" charset="0"/>
-                <a:ea typeface="微软雅黑" pitchFamily="34" charset="-122"/>
-                <a:cs typeface="微软雅黑" pitchFamily="34" charset="-120"/>
-              </a:rPr>
-              <a:t>第 8 行</a:t>
-            </a:r>
-            <a:endParaRPr lang="en-US" sz="950" dirty="0"/>
-          </a:p>
-        </p:txBody>
-      </p:sp>
-      <p:sp>
-        <p:nvSpPr>
-          <p:cNvPr id="53" name="Text 49"/>
-          <p:cNvSpPr txBox="1"/>
-          <p:nvPr/>
-        </p:nvSpPr>
-        <p:spPr>
-          <a:xfrm>
-            <a:off x="6083300" y="3008376"/>
-            <a:ext cx="2649220" cy="417576"/>
-          </a:xfrm>
-          <a:prstGeom prst="rect">
-            <a:avLst/>
-          </a:prstGeom>
-          <a:noFill/>
-          <a:ln/>
-        </p:spPr>
-        <p:txBody>
-          <a:bodyPr wrap="square" lIns="0" tIns="0" rIns="0" bIns="0" rtlCol="0" anchor="t"/>
-          <a:lstStyle/>
-          <a:p>
-            <a:pPr algn="l" indent="0" marL="0">
-              <a:lnSpc>
-                <a:spcPct val="110000"/>
-              </a:lnSpc>
-              <a:buNone/>
-            </a:pPr>
-            <a:r>
-              <a:rPr lang="en-US" sz="1200" dirty="0">
-                <a:solidFill>
-                  <a:srgbClr val="2D2D2D"/>
-                </a:solidFill>
-                <a:latin typeface="微软雅黑" pitchFamily="34" charset="0"/>
-                <a:ea typeface="微软雅黑" pitchFamily="34" charset="-122"/>
-                <a:cs typeface="微软雅黑" pitchFamily="34" charset="-120"/>
-              </a:rPr>
-              <a:t>加入 I2C 总线（SDA = A4，SCL = A5）</a:t>
-            </a:r>
-            <a:endParaRPr lang="en-US" sz="1200" dirty="0"/>
-          </a:p>
-        </p:txBody>
-      </p:sp>
-      <p:sp>
-        <p:nvSpPr>
-          <p:cNvPr id="54" name="Shape 50"/>
-          <p:cNvSpPr/>
-          <p:nvPr/>
-        </p:nvSpPr>
-        <p:spPr>
-          <a:xfrm>
-            <a:off x="5413248" y="3489960"/>
-            <a:ext cx="578612" cy="219456"/>
-          </a:xfrm>
-          <a:prstGeom prst="roundRect">
-            <a:avLst>
-              <a:gd name="adj" fmla="val 50000"/>
-            </a:avLst>
-          </a:prstGeom>
-          <a:solidFill>
-            <a:srgbClr val="40E0D0"/>
-          </a:solidFill>
-          <a:ln w="12700">
-            <a:solidFill>
-              <a:srgbClr val="40E0D0"/>
-            </a:solidFill>
-            <a:prstDash val="solid"/>
-          </a:ln>
-        </p:spPr>
-      </p:sp>
-      <p:sp>
-        <p:nvSpPr>
-          <p:cNvPr id="55" name="Text 51"/>
-          <p:cNvSpPr txBox="1"/>
-          <p:nvPr/>
-        </p:nvSpPr>
-        <p:spPr>
-          <a:xfrm>
-            <a:off x="5413248" y="3489960"/>
-            <a:ext cx="578612" cy="219456"/>
-          </a:xfrm>
-          <a:prstGeom prst="rect">
-            <a:avLst/>
-          </a:prstGeom>
-          <a:noFill/>
-          <a:ln/>
-        </p:spPr>
-        <p:txBody>
-          <a:bodyPr wrap="square" lIns="0" tIns="0" rIns="0" bIns="0" rtlCol="0" anchor="ctr"/>
-          <a:lstStyle/>
-          <a:p>
-            <a:pPr algn="ctr" indent="0" marL="0">
-              <a:lnSpc>
-                <a:spcPct val="115000"/>
-              </a:lnSpc>
-              <a:buNone/>
-            </a:pPr>
-            <a:r>
-              <a:rPr lang="en-US" sz="950" b="1" dirty="0">
-                <a:solidFill>
-                  <a:srgbClr val="2D2D2D"/>
-                </a:solidFill>
-                <a:latin typeface="微软雅黑" pitchFamily="34" charset="0"/>
-                <a:ea typeface="微软雅黑" pitchFamily="34" charset="-122"/>
-                <a:cs typeface="微软雅黑" pitchFamily="34" charset="-120"/>
-              </a:rPr>
-              <a:t>第 9 行</a:t>
-            </a:r>
-            <a:endParaRPr lang="en-US" sz="950" dirty="0"/>
-          </a:p>
-        </p:txBody>
-      </p:sp>
-      <p:sp>
-        <p:nvSpPr>
-          <p:cNvPr id="56" name="Text 52"/>
-          <p:cNvSpPr txBox="1"/>
-          <p:nvPr/>
-        </p:nvSpPr>
-        <p:spPr>
-          <a:xfrm>
-            <a:off x="6083300" y="3480816"/>
-            <a:ext cx="2649220" cy="256032"/>
-          </a:xfrm>
-          <a:prstGeom prst="rect">
-            <a:avLst/>
-          </a:prstGeom>
-          <a:noFill/>
-          <a:ln/>
-        </p:spPr>
-        <p:txBody>
-          <a:bodyPr wrap="square" lIns="0" tIns="0" rIns="0" bIns="0" rtlCol="0" anchor="t"/>
-          <a:lstStyle/>
-          <a:p>
-            <a:pPr algn="l" indent="0" marL="0">
-              <a:lnSpc>
-                <a:spcPct val="110000"/>
-              </a:lnSpc>
-              <a:buNone/>
-            </a:pPr>
-            <a:r>
-              <a:rPr lang="en-US" sz="1200" dirty="0">
-                <a:solidFill>
-                  <a:srgbClr val="2D2D2D"/>
-                </a:solidFill>
-                <a:latin typeface="微软雅黑" pitchFamily="34" charset="0"/>
-                <a:ea typeface="微软雅黑" pitchFamily="34" charset="-122"/>
-                <a:cs typeface="微软雅黑" pitchFamily="34" charset="-120"/>
-              </a:rPr>
-              <a:t>i 从 8 数到 119，挨个试</a:t>
-            </a:r>
-            <a:endParaRPr lang="en-US" sz="1200" dirty="0"/>
-          </a:p>
-        </p:txBody>
-      </p:sp>
-      <p:sp>
-        <p:nvSpPr>
-          <p:cNvPr id="57" name="Shape 53"/>
-          <p:cNvSpPr/>
-          <p:nvPr/>
-        </p:nvSpPr>
-        <p:spPr>
-          <a:xfrm>
-            <a:off x="5413248" y="3800856"/>
-            <a:ext cx="877824" cy="219456"/>
-          </a:xfrm>
-          <a:prstGeom prst="roundRect">
-            <a:avLst>
-              <a:gd name="adj" fmla="val 50000"/>
-            </a:avLst>
-          </a:prstGeom>
-          <a:solidFill>
-            <a:srgbClr val="40E0D0"/>
-          </a:solidFill>
-          <a:ln w="12700">
-            <a:solidFill>
-              <a:srgbClr val="40E0D0"/>
-            </a:solidFill>
-            <a:prstDash val="solid"/>
-          </a:ln>
-        </p:spPr>
-      </p:sp>
-      <p:sp>
-        <p:nvSpPr>
-          <p:cNvPr id="58" name="Text 54"/>
-          <p:cNvSpPr txBox="1"/>
-          <p:nvPr/>
-        </p:nvSpPr>
-        <p:spPr>
-          <a:xfrm>
-            <a:off x="5413248" y="3800856"/>
-            <a:ext cx="877824" cy="219456"/>
-          </a:xfrm>
-          <a:prstGeom prst="rect">
-            <a:avLst/>
-          </a:prstGeom>
-          <a:noFill/>
-          <a:ln/>
-        </p:spPr>
-        <p:txBody>
-          <a:bodyPr wrap="square" lIns="0" tIns="0" rIns="0" bIns="0" rtlCol="0" anchor="ctr"/>
-          <a:lstStyle/>
-          <a:p>
-            <a:pPr algn="ctr" indent="0" marL="0">
-              <a:lnSpc>
-                <a:spcPct val="115000"/>
-              </a:lnSpc>
-              <a:buNone/>
-            </a:pPr>
-            <a:r>
-              <a:rPr lang="en-US" sz="950" b="1" dirty="0">
-                <a:solidFill>
-                  <a:srgbClr val="2D2D2D"/>
-                </a:solidFill>
-                <a:latin typeface="微软雅黑" pitchFamily="34" charset="0"/>
-                <a:ea typeface="微软雅黑" pitchFamily="34" charset="-122"/>
-                <a:cs typeface="微软雅黑" pitchFamily="34" charset="-120"/>
-              </a:rPr>
-              <a:t>第 10–11 行</a:t>
-            </a:r>
-            <a:endParaRPr lang="en-US" sz="950" dirty="0"/>
-          </a:p>
-        </p:txBody>
-      </p:sp>
-      <p:sp>
-        <p:nvSpPr>
-          <p:cNvPr id="59" name="Text 55"/>
-          <p:cNvSpPr txBox="1"/>
-          <p:nvPr/>
-        </p:nvSpPr>
-        <p:spPr>
-          <a:xfrm>
-            <a:off x="6382512" y="3791712"/>
-            <a:ext cx="2350008" cy="417576"/>
-          </a:xfrm>
-          <a:prstGeom prst="rect">
-            <a:avLst/>
-          </a:prstGeom>
-          <a:noFill/>
-          <a:ln/>
-        </p:spPr>
-        <p:txBody>
-          <a:bodyPr wrap="square" lIns="0" tIns="0" rIns="0" bIns="0" rtlCol="0" anchor="t"/>
-          <a:lstStyle/>
-          <a:p>
-            <a:pPr algn="l" indent="0" marL="0">
-              <a:lnSpc>
-                <a:spcPct val="110000"/>
-              </a:lnSpc>
-              <a:buNone/>
-            </a:pPr>
-            <a:r>
-              <a:rPr lang="en-US" sz="1200" dirty="0">
-                <a:solidFill>
-                  <a:srgbClr val="2D2D2D"/>
-                </a:solidFill>
-                <a:latin typeface="微软雅黑" pitchFamily="34" charset="0"/>
-                <a:ea typeface="微软雅黑" pitchFamily="34" charset="-122"/>
-                <a:cs typeface="微软雅黑" pitchFamily="34" charset="-120"/>
-              </a:rPr>
-              <a:t>敲 i 号的门；返回 0 = 有设备应答</a:t>
+              <a:t>，否则编译报错。</a:t>
             </a:r>
             <a:endParaRPr lang="en-US" sz="1200" dirty="0"/>
           </a:p>
@@ -30559,7 +30468,7 @@
                 <a:ea typeface="微软雅黑" pitchFamily="34" charset="-122"/>
                 <a:cs typeface="微软雅黑" pitchFamily="34" charset="-120"/>
               </a:rPr>
-              <a:t>拼出一行 “Found address: 39 (0x27)”：DEC 印十进制，HEX 印十六进制</a:t>
+              <a:t>拼出一行：DEC 印出 39，HEX 印出 27，前后补上 “(0x” 和 “)”</a:t>
             </a:r>
             <a:endParaRPr lang="en-US" sz="1200" dirty="0"/>
           </a:p>
@@ -30865,7 +30774,7 @@
         <p:spPr>
           <a:xfrm>
             <a:off x="6382512" y="3112262"/>
-            <a:ext cx="2350008" cy="417576"/>
+            <a:ext cx="2350008" cy="256032"/>
           </a:xfrm>
           <a:prstGeom prst="rect">
             <a:avLst/>
@@ -30892,7 +30801,7 @@
                 <a:ea typeface="微软雅黑" pitchFamily="34" charset="-122"/>
                 <a:cs typeface="微软雅黑" pitchFamily="34" charset="-120"/>
               </a:rPr>
-              <a:t>打印 “Done.” 和 “Found 1 device(s).”</a:t>
+              <a:t>打印 Done. 和找到的设备总数</a:t>
             </a:r>
             <a:endParaRPr lang="en-US" sz="1200" dirty="0"/>
           </a:p>
@@ -30976,7 +30885,7 @@
         <p:spPr>
           <a:xfrm>
             <a:off x="6382512" y="3805682"/>
-            <a:ext cx="2350008" cy="417576"/>
+            <a:ext cx="2350008" cy="256032"/>
           </a:xfrm>
           <a:prstGeom prst="rect">
             <a:avLst/>
@@ -31003,7 +30912,7 @@
                 <a:ea typeface="微软雅黑" pitchFamily="34" charset="-122"/>
                 <a:cs typeface="微软雅黑" pitchFamily="34" charset="-120"/>
               </a:rPr>
-              <a:t>loop() 空着；想再扫一次，按复位键</a:t>
+              <a:t>loop() 空着；重扫按复位键</a:t>
             </a:r>
             <a:endParaRPr lang="en-US" sz="1200" dirty="0"/>
           </a:p>
@@ -31349,11 +31258,11 @@
         <p:spPr>
           <a:xfrm>
             <a:off x="4617720" y="1600200"/>
-            <a:ext cx="2999232" cy="347472"/>
+            <a:ext cx="2999232" cy="310896"/>
           </a:xfrm>
           <a:prstGeom prst="roundRect">
             <a:avLst>
-              <a:gd name="adj" fmla="val 15789"/>
+              <a:gd name="adj" fmla="val 17647"/>
             </a:avLst>
           </a:prstGeom>
           <a:solidFill>
@@ -31376,7 +31285,7 @@
         <p:spPr>
           <a:xfrm>
             <a:off x="4727448" y="1600200"/>
-            <a:ext cx="2834640" cy="347472"/>
+            <a:ext cx="2834640" cy="310896"/>
           </a:xfrm>
           <a:prstGeom prst="rect">
             <a:avLst/>
@@ -31417,7 +31326,7 @@
         </p:nvSpPr>
         <p:spPr>
           <a:xfrm>
-            <a:off x="7726680" y="1655064"/>
+            <a:off x="7726680" y="1636776"/>
             <a:ext cx="1005840" cy="237744"/>
           </a:xfrm>
           <a:prstGeom prst="roundRect">
@@ -31444,7 +31353,7 @@
         </p:nvSpPr>
         <p:spPr>
           <a:xfrm>
-            <a:off x="7726680" y="1655064"/>
+            <a:off x="7726680" y="1636776"/>
             <a:ext cx="1005840" cy="237744"/>
           </a:xfrm>
           <a:prstGeom prst="rect">
@@ -31486,12 +31395,12 @@
         </p:nvSpPr>
         <p:spPr>
           <a:xfrm>
-            <a:off x="4617720" y="2039112"/>
-            <a:ext cx="2999232" cy="347472"/>
+            <a:off x="4617720" y="1984248"/>
+            <a:ext cx="2999232" cy="310896"/>
           </a:xfrm>
           <a:prstGeom prst="roundRect">
             <a:avLst>
-              <a:gd name="adj" fmla="val 15789"/>
+              <a:gd name="adj" fmla="val 17647"/>
             </a:avLst>
           </a:prstGeom>
           <a:solidFill>
@@ -31513,8 +31422,8 @@
         </p:nvSpPr>
         <p:spPr>
           <a:xfrm>
-            <a:off x="4727448" y="2039112"/>
-            <a:ext cx="2834640" cy="347472"/>
+            <a:off x="4727448" y="1984248"/>
+            <a:ext cx="2834640" cy="310896"/>
           </a:xfrm>
           <a:prstGeom prst="rect">
             <a:avLst/>
@@ -31555,7 +31464,7 @@
         </p:nvSpPr>
         <p:spPr>
           <a:xfrm>
-            <a:off x="7726680" y="2093976"/>
+            <a:off x="7726680" y="2020824"/>
             <a:ext cx="1005840" cy="237744"/>
           </a:xfrm>
           <a:prstGeom prst="roundRect">
@@ -31582,7 +31491,7 @@
         </p:nvSpPr>
         <p:spPr>
           <a:xfrm>
-            <a:off x="7726680" y="2093976"/>
+            <a:off x="7726680" y="2020824"/>
             <a:ext cx="1005840" cy="237744"/>
           </a:xfrm>
           <a:prstGeom prst="rect">
@@ -31624,12 +31533,12 @@
         </p:nvSpPr>
         <p:spPr>
           <a:xfrm>
-            <a:off x="4617720" y="2478024"/>
-            <a:ext cx="2999232" cy="347472"/>
+            <a:off x="4617720" y="2368296"/>
+            <a:ext cx="2999232" cy="310896"/>
           </a:xfrm>
           <a:prstGeom prst="roundRect">
             <a:avLst>
-              <a:gd name="adj" fmla="val 15789"/>
+              <a:gd name="adj" fmla="val 17647"/>
             </a:avLst>
           </a:prstGeom>
           <a:solidFill>
@@ -31651,8 +31560,8 @@
         </p:nvSpPr>
         <p:spPr>
           <a:xfrm>
-            <a:off x="4727448" y="2478024"/>
-            <a:ext cx="2834640" cy="347472"/>
+            <a:off x="4727448" y="2368296"/>
+            <a:ext cx="2834640" cy="310896"/>
           </a:xfrm>
           <a:prstGeom prst="rect">
             <a:avLst/>
@@ -31693,7 +31602,7 @@
         </p:nvSpPr>
         <p:spPr>
           <a:xfrm>
-            <a:off x="7726680" y="2532888"/>
+            <a:off x="7726680" y="2404872"/>
             <a:ext cx="1005840" cy="237744"/>
           </a:xfrm>
           <a:prstGeom prst="roundRect">
@@ -31720,7 +31629,7 @@
         </p:nvSpPr>
         <p:spPr>
           <a:xfrm>
-            <a:off x="7726680" y="2532888"/>
+            <a:off x="7726680" y="2404872"/>
             <a:ext cx="1005840" cy="237744"/>
           </a:xfrm>
           <a:prstGeom prst="rect">
@@ -31762,12 +31671,12 @@
         </p:nvSpPr>
         <p:spPr>
           <a:xfrm>
-            <a:off x="4617720" y="2916936"/>
-            <a:ext cx="2999232" cy="347472"/>
+            <a:off x="4617720" y="2752344"/>
+            <a:ext cx="2999232" cy="310896"/>
           </a:xfrm>
           <a:prstGeom prst="roundRect">
             <a:avLst>
-              <a:gd name="adj" fmla="val 15789"/>
+              <a:gd name="adj" fmla="val 17647"/>
             </a:avLst>
           </a:prstGeom>
           <a:solidFill>
@@ -31789,8 +31698,8 @@
         </p:nvSpPr>
         <p:spPr>
           <a:xfrm>
-            <a:off x="4727448" y="2916936"/>
-            <a:ext cx="2834640" cy="347472"/>
+            <a:off x="4727448" y="2752344"/>
+            <a:ext cx="2834640" cy="310896"/>
           </a:xfrm>
           <a:prstGeom prst="rect">
             <a:avLst/>
@@ -31831,7 +31740,7 @@
         </p:nvSpPr>
         <p:spPr>
           <a:xfrm>
-            <a:off x="7726680" y="2971800"/>
+            <a:off x="7726680" y="2788920"/>
             <a:ext cx="1005840" cy="237744"/>
           </a:xfrm>
           <a:prstGeom prst="roundRect">
@@ -31858,7 +31767,7 @@
         </p:nvSpPr>
         <p:spPr>
           <a:xfrm>
-            <a:off x="7726680" y="2971800"/>
+            <a:off x="7726680" y="2788920"/>
             <a:ext cx="1005840" cy="237744"/>
           </a:xfrm>
           <a:prstGeom prst="rect">
@@ -31900,12 +31809,12 @@
         </p:nvSpPr>
         <p:spPr>
           <a:xfrm>
-            <a:off x="4617720" y="3538728"/>
-            <a:ext cx="4114800" cy="1033272"/>
+            <a:off x="4617720" y="3337560"/>
+            <a:ext cx="4114800" cy="1234440"/>
           </a:xfrm>
           <a:prstGeom prst="roundRect">
             <a:avLst>
-              <a:gd name="adj" fmla="val 10619"/>
+              <a:gd name="adj" fmla="val 8889"/>
             </a:avLst>
           </a:prstGeom>
           <a:solidFill>
@@ -31927,7 +31836,7 @@
         </p:nvSpPr>
         <p:spPr>
           <a:xfrm>
-            <a:off x="4764024" y="3685032"/>
+            <a:off x="4764024" y="3483864"/>
             <a:ext cx="329184" cy="329184"/>
           </a:xfrm>
           <a:prstGeom prst="ellipse">
@@ -31960,7 +31869,7 @@
         </p:blipFill>
         <p:spPr>
           <a:xfrm>
-            <a:off x="4843028" y="3764036"/>
+            <a:off x="4843028" y="3562868"/>
             <a:ext cx="171176" cy="171176"/>
           </a:xfrm>
           <a:prstGeom prst="rect">
@@ -31976,7 +31885,7 @@
         </p:nvSpPr>
         <p:spPr>
           <a:xfrm>
-            <a:off x="5221224" y="3675888"/>
+            <a:off x="5221224" y="3474720"/>
             <a:ext cx="3364992" cy="274320"/>
           </a:xfrm>
           <a:prstGeom prst="rect">
@@ -32004,7 +31913,7 @@
                 <a:ea typeface="微软雅黑" pitchFamily="34" charset="-122"/>
                 <a:cs typeface="微软雅黑" pitchFamily="34" charset="-120"/>
               </a:rPr>
-              <a:t>原指南提示</a:t>
+              <a:t>最好自己扫一下</a:t>
             </a:r>
             <a:endParaRPr lang="en-US" sz="1300" dirty="0"/>
           </a:p>
@@ -32018,8 +31927,8 @@
         </p:nvSpPr>
         <p:spPr>
           <a:xfrm>
-            <a:off x="5221224" y="3986784"/>
-            <a:ext cx="3364992" cy="438912"/>
+            <a:off x="5221224" y="3785616"/>
+            <a:ext cx="3364992" cy="640080"/>
           </a:xfrm>
           <a:prstGeom prst="rect">
             <a:avLst/>
@@ -32046,7 +31955,7 @@
                 <a:ea typeface="微软雅黑" pitchFamily="34" charset="-122"/>
                 <a:cs typeface="微软雅黑" pitchFamily="34" charset="-120"/>
               </a:rPr>
-              <a:t>很多转接板默认是 0x27，但最好自己扫一下。扫出 0x3F，程序②里的 0x27 也要改成 0x3F。</a:t>
+              <a:t>原指南：很多转接板默认是 0x27，但要以扫描结果为准。若扫出 0x3F，程序②里的 0x27 也要改成 0x3F。</a:t>
             </a:r>
             <a:endParaRPr lang="en-US" sz="1200" dirty="0"/>
           </a:p>
@@ -33210,8 +33119,8 @@
         </p:nvSpPr>
         <p:spPr>
           <a:xfrm>
-            <a:off x="4617720" y="1645920"/>
-            <a:ext cx="365760" cy="201168"/>
+            <a:off x="4636008" y="1645920"/>
+            <a:ext cx="457200" cy="201168"/>
           </a:xfrm>
           <a:prstGeom prst="rect">
             <a:avLst/>
@@ -33252,8 +33161,8 @@
         </p:nvSpPr>
         <p:spPr>
           <a:xfrm>
-            <a:off x="4976165" y="1903781"/>
-            <a:ext cx="211226" cy="343814"/>
+            <a:off x="5195621" y="1903781"/>
+            <a:ext cx="197510" cy="343814"/>
           </a:xfrm>
           <a:prstGeom prst="rect">
             <a:avLst/>
@@ -33277,8 +33186,8 @@
         </p:nvSpPr>
         <p:spPr>
           <a:xfrm>
-            <a:off x="4965192" y="1892808"/>
-            <a:ext cx="233172" cy="365760"/>
+            <a:off x="5184648" y="1892808"/>
+            <a:ext cx="219456" cy="365760"/>
           </a:xfrm>
           <a:prstGeom prst="rect">
             <a:avLst/>
@@ -33319,8 +33228,8 @@
         </p:nvSpPr>
         <p:spPr>
           <a:xfrm>
-            <a:off x="5209337" y="1903781"/>
-            <a:ext cx="211226" cy="343814"/>
+            <a:off x="5415077" y="1903781"/>
+            <a:ext cx="197510" cy="343814"/>
           </a:xfrm>
           <a:prstGeom prst="rect">
             <a:avLst/>
@@ -33344,8 +33253,8 @@
         </p:nvSpPr>
         <p:spPr>
           <a:xfrm>
-            <a:off x="5442509" y="1903781"/>
-            <a:ext cx="211226" cy="343814"/>
+            <a:off x="5634533" y="1903781"/>
+            <a:ext cx="197510" cy="343814"/>
           </a:xfrm>
           <a:prstGeom prst="rect">
             <a:avLst/>
@@ -33369,8 +33278,8 @@
         </p:nvSpPr>
         <p:spPr>
           <a:xfrm>
-            <a:off x="5675681" y="1903781"/>
-            <a:ext cx="211226" cy="343814"/>
+            <a:off x="5853989" y="1903781"/>
+            <a:ext cx="197510" cy="343814"/>
           </a:xfrm>
           <a:prstGeom prst="rect">
             <a:avLst/>
@@ -33394,8 +33303,8 @@
         </p:nvSpPr>
         <p:spPr>
           <a:xfrm>
-            <a:off x="5908853" y="1903781"/>
-            <a:ext cx="211226" cy="343814"/>
+            <a:off x="6073445" y="1903781"/>
+            <a:ext cx="197510" cy="343814"/>
           </a:xfrm>
           <a:prstGeom prst="rect">
             <a:avLst/>
@@ -33419,8 +33328,8 @@
         </p:nvSpPr>
         <p:spPr>
           <a:xfrm>
-            <a:off x="6142025" y="1903781"/>
-            <a:ext cx="211226" cy="343814"/>
+            <a:off x="6292901" y="1903781"/>
+            <a:ext cx="197510" cy="343814"/>
           </a:xfrm>
           <a:prstGeom prst="rect">
             <a:avLst/>
@@ -33444,8 +33353,8 @@
         </p:nvSpPr>
         <p:spPr>
           <a:xfrm>
-            <a:off x="6375197" y="1903781"/>
-            <a:ext cx="211226" cy="343814"/>
+            <a:off x="6512357" y="1903781"/>
+            <a:ext cx="197510" cy="343814"/>
           </a:xfrm>
           <a:prstGeom prst="rect">
             <a:avLst/>
@@ -33469,8 +33378,8 @@
         </p:nvSpPr>
         <p:spPr>
           <a:xfrm>
-            <a:off x="6608369" y="1903781"/>
-            <a:ext cx="211226" cy="343814"/>
+            <a:off x="6731813" y="1903781"/>
+            <a:ext cx="197510" cy="343814"/>
           </a:xfrm>
           <a:prstGeom prst="rect">
             <a:avLst/>
@@ -33494,8 +33403,8 @@
         </p:nvSpPr>
         <p:spPr>
           <a:xfrm>
-            <a:off x="6841541" y="1903781"/>
-            <a:ext cx="211226" cy="343814"/>
+            <a:off x="6951269" y="1903781"/>
+            <a:ext cx="197510" cy="343814"/>
           </a:xfrm>
           <a:prstGeom prst="rect">
             <a:avLst/>
@@ -33519,8 +33428,8 @@
         </p:nvSpPr>
         <p:spPr>
           <a:xfrm>
-            <a:off x="7074713" y="1903781"/>
-            <a:ext cx="211226" cy="343814"/>
+            <a:off x="7170725" y="1903781"/>
+            <a:ext cx="197510" cy="343814"/>
           </a:xfrm>
           <a:prstGeom prst="rect">
             <a:avLst/>
@@ -33544,8 +33453,8 @@
         </p:nvSpPr>
         <p:spPr>
           <a:xfrm>
-            <a:off x="7307885" y="1903781"/>
-            <a:ext cx="211226" cy="343814"/>
+            <a:off x="7390181" y="1903781"/>
+            <a:ext cx="197510" cy="343814"/>
           </a:xfrm>
           <a:prstGeom prst="rect">
             <a:avLst/>
@@ -33569,8 +33478,8 @@
         </p:nvSpPr>
         <p:spPr>
           <a:xfrm>
-            <a:off x="7541057" y="1903781"/>
-            <a:ext cx="211226" cy="343814"/>
+            <a:off x="7609637" y="1903781"/>
+            <a:ext cx="197510" cy="343814"/>
           </a:xfrm>
           <a:prstGeom prst="rect">
             <a:avLst/>
@@ -33594,8 +33503,8 @@
         </p:nvSpPr>
         <p:spPr>
           <a:xfrm>
-            <a:off x="7774229" y="1903781"/>
-            <a:ext cx="211226" cy="343814"/>
+            <a:off x="7829093" y="1903781"/>
+            <a:ext cx="197510" cy="343814"/>
           </a:xfrm>
           <a:prstGeom prst="rect">
             <a:avLst/>
@@ -33619,8 +33528,8 @@
         </p:nvSpPr>
         <p:spPr>
           <a:xfrm>
-            <a:off x="8007401" y="1903781"/>
-            <a:ext cx="211226" cy="343814"/>
+            <a:off x="8048549" y="1903781"/>
+            <a:ext cx="197510" cy="343814"/>
           </a:xfrm>
           <a:prstGeom prst="rect">
             <a:avLst/>
@@ -33644,8 +33553,8 @@
         </p:nvSpPr>
         <p:spPr>
           <a:xfrm>
-            <a:off x="8240573" y="1903781"/>
-            <a:ext cx="211226" cy="343814"/>
+            <a:off x="8268005" y="1903781"/>
+            <a:ext cx="197510" cy="343814"/>
           </a:xfrm>
           <a:prstGeom prst="rect">
             <a:avLst/>
@@ -33669,8 +33578,8 @@
         </p:nvSpPr>
         <p:spPr>
           <a:xfrm>
-            <a:off x="8473745" y="1903781"/>
-            <a:ext cx="211226" cy="343814"/>
+            <a:off x="8487461" y="1903781"/>
+            <a:ext cx="197510" cy="343814"/>
           </a:xfrm>
           <a:prstGeom prst="rect">
             <a:avLst/>
@@ -33694,8 +33603,8 @@
         </p:nvSpPr>
         <p:spPr>
           <a:xfrm>
-            <a:off x="4976165" y="2269541"/>
-            <a:ext cx="211226" cy="343814"/>
+            <a:off x="5195621" y="2269541"/>
+            <a:ext cx="197510" cy="343814"/>
           </a:xfrm>
           <a:prstGeom prst="rect">
             <a:avLst/>
@@ -33719,8 +33628,8 @@
         </p:nvSpPr>
         <p:spPr>
           <a:xfrm>
-            <a:off x="5209337" y="2269541"/>
-            <a:ext cx="211226" cy="343814"/>
+            <a:off x="5415077" y="2269541"/>
+            <a:ext cx="197510" cy="343814"/>
           </a:xfrm>
           <a:prstGeom prst="rect">
             <a:avLst/>
@@ -33744,8 +33653,8 @@
         </p:nvSpPr>
         <p:spPr>
           <a:xfrm>
-            <a:off x="5442509" y="2269541"/>
-            <a:ext cx="211226" cy="343814"/>
+            <a:off x="5634533" y="2269541"/>
+            <a:ext cx="197510" cy="343814"/>
           </a:xfrm>
           <a:prstGeom prst="rect">
             <a:avLst/>
@@ -33769,8 +33678,8 @@
         </p:nvSpPr>
         <p:spPr>
           <a:xfrm>
-            <a:off x="5675681" y="2269541"/>
-            <a:ext cx="211226" cy="343814"/>
+            <a:off x="5853989" y="2269541"/>
+            <a:ext cx="197510" cy="343814"/>
           </a:xfrm>
           <a:prstGeom prst="rect">
             <a:avLst/>
@@ -33794,8 +33703,8 @@
         </p:nvSpPr>
         <p:spPr>
           <a:xfrm>
-            <a:off x="5908853" y="2269541"/>
-            <a:ext cx="211226" cy="343814"/>
+            <a:off x="6073445" y="2269541"/>
+            <a:ext cx="197510" cy="343814"/>
           </a:xfrm>
           <a:prstGeom prst="rect">
             <a:avLst/>
@@ -33819,8 +33728,8 @@
         </p:nvSpPr>
         <p:spPr>
           <a:xfrm>
-            <a:off x="5897880" y="2258568"/>
-            <a:ext cx="233172" cy="365760"/>
+            <a:off x="6062472" y="2258568"/>
+            <a:ext cx="219456" cy="365760"/>
           </a:xfrm>
           <a:prstGeom prst="rect">
             <a:avLst/>
@@ -33861,8 +33770,8 @@
         </p:nvSpPr>
         <p:spPr>
           <a:xfrm>
-            <a:off x="6142025" y="2269541"/>
-            <a:ext cx="211226" cy="343814"/>
+            <a:off x="6292901" y="2269541"/>
+            <a:ext cx="197510" cy="343814"/>
           </a:xfrm>
           <a:prstGeom prst="rect">
             <a:avLst/>
@@ -33886,8 +33795,8 @@
         </p:nvSpPr>
         <p:spPr>
           <a:xfrm>
-            <a:off x="6375197" y="2269541"/>
-            <a:ext cx="211226" cy="343814"/>
+            <a:off x="6512357" y="2269541"/>
+            <a:ext cx="197510" cy="343814"/>
           </a:xfrm>
           <a:prstGeom prst="rect">
             <a:avLst/>
@@ -33911,8 +33820,8 @@
         </p:nvSpPr>
         <p:spPr>
           <a:xfrm>
-            <a:off x="6608369" y="2269541"/>
-            <a:ext cx="211226" cy="343814"/>
+            <a:off x="6731813" y="2269541"/>
+            <a:ext cx="197510" cy="343814"/>
           </a:xfrm>
           <a:prstGeom prst="rect">
             <a:avLst/>
@@ -33936,8 +33845,8 @@
         </p:nvSpPr>
         <p:spPr>
           <a:xfrm>
-            <a:off x="6841541" y="2269541"/>
-            <a:ext cx="211226" cy="343814"/>
+            <a:off x="6951269" y="2269541"/>
+            <a:ext cx="197510" cy="343814"/>
           </a:xfrm>
           <a:prstGeom prst="rect">
             <a:avLst/>
@@ -33961,8 +33870,8 @@
         </p:nvSpPr>
         <p:spPr>
           <a:xfrm>
-            <a:off x="7074713" y="2269541"/>
-            <a:ext cx="211226" cy="343814"/>
+            <a:off x="7170725" y="2269541"/>
+            <a:ext cx="197510" cy="343814"/>
           </a:xfrm>
           <a:prstGeom prst="rect">
             <a:avLst/>
@@ -33986,8 +33895,8 @@
         </p:nvSpPr>
         <p:spPr>
           <a:xfrm>
-            <a:off x="7307885" y="2269541"/>
-            <a:ext cx="211226" cy="343814"/>
+            <a:off x="7390181" y="2269541"/>
+            <a:ext cx="197510" cy="343814"/>
           </a:xfrm>
           <a:prstGeom prst="rect">
             <a:avLst/>
@@ -34011,8 +33920,8 @@
         </p:nvSpPr>
         <p:spPr>
           <a:xfrm>
-            <a:off x="7541057" y="2269541"/>
-            <a:ext cx="211226" cy="343814"/>
+            <a:off x="7609637" y="2269541"/>
+            <a:ext cx="197510" cy="343814"/>
           </a:xfrm>
           <a:prstGeom prst="rect">
             <a:avLst/>
@@ -34036,8 +33945,8 @@
         </p:nvSpPr>
         <p:spPr>
           <a:xfrm>
-            <a:off x="7774229" y="2269541"/>
-            <a:ext cx="211226" cy="343814"/>
+            <a:off x="7829093" y="2269541"/>
+            <a:ext cx="197510" cy="343814"/>
           </a:xfrm>
           <a:prstGeom prst="rect">
             <a:avLst/>
@@ -34061,8 +33970,8 @@
         </p:nvSpPr>
         <p:spPr>
           <a:xfrm>
-            <a:off x="8007401" y="2269541"/>
-            <a:ext cx="211226" cy="343814"/>
+            <a:off x="8048549" y="2269541"/>
+            <a:ext cx="197510" cy="343814"/>
           </a:xfrm>
           <a:prstGeom prst="rect">
             <a:avLst/>
@@ -34086,8 +33995,8 @@
         </p:nvSpPr>
         <p:spPr>
           <a:xfrm>
-            <a:off x="8240573" y="2269541"/>
-            <a:ext cx="211226" cy="343814"/>
+            <a:off x="8268005" y="2269541"/>
+            <a:ext cx="197510" cy="343814"/>
           </a:xfrm>
           <a:prstGeom prst="rect">
             <a:avLst/>
@@ -34111,8 +34020,8 @@
         </p:nvSpPr>
         <p:spPr>
           <a:xfrm>
-            <a:off x="8473745" y="2269541"/>
-            <a:ext cx="211226" cy="343814"/>
+            <a:off x="8487461" y="2269541"/>
+            <a:ext cx="197510" cy="343814"/>
           </a:xfrm>
           <a:prstGeom prst="rect">
             <a:avLst/>
@@ -34136,8 +34045,8 @@
         </p:nvSpPr>
         <p:spPr>
           <a:xfrm>
-            <a:off x="4965192" y="1655064"/>
-            <a:ext cx="233172" cy="201168"/>
+            <a:off x="5184648" y="1655064"/>
+            <a:ext cx="219456" cy="201168"/>
           </a:xfrm>
           <a:prstGeom prst="rect">
             <a:avLst/>
@@ -34178,8 +34087,8 @@
         </p:nvSpPr>
         <p:spPr>
           <a:xfrm>
-            <a:off x="5198364" y="1655064"/>
-            <a:ext cx="233172" cy="201168"/>
+            <a:off x="5404104" y="1655064"/>
+            <a:ext cx="219456" cy="201168"/>
           </a:xfrm>
           <a:prstGeom prst="rect">
             <a:avLst/>
@@ -34220,8 +34129,8 @@
         </p:nvSpPr>
         <p:spPr>
           <a:xfrm>
-            <a:off x="5431536" y="1655064"/>
-            <a:ext cx="233172" cy="201168"/>
+            <a:off x="5623560" y="1655064"/>
+            <a:ext cx="219456" cy="201168"/>
           </a:xfrm>
           <a:prstGeom prst="rect">
             <a:avLst/>
@@ -34262,8 +34171,8 @@
         </p:nvSpPr>
         <p:spPr>
           <a:xfrm>
-            <a:off x="5664708" y="1655064"/>
-            <a:ext cx="233172" cy="201168"/>
+            <a:off x="5843016" y="1655064"/>
+            <a:ext cx="219456" cy="201168"/>
           </a:xfrm>
           <a:prstGeom prst="rect">
             <a:avLst/>
@@ -34304,8 +34213,8 @@
         </p:nvSpPr>
         <p:spPr>
           <a:xfrm>
-            <a:off x="5897880" y="1655064"/>
-            <a:ext cx="233172" cy="201168"/>
+            <a:off x="6062472" y="1655064"/>
+            <a:ext cx="219456" cy="201168"/>
           </a:xfrm>
           <a:prstGeom prst="rect">
             <a:avLst/>
@@ -34346,8 +34255,8 @@
         </p:nvSpPr>
         <p:spPr>
           <a:xfrm>
-            <a:off x="6131052" y="1655064"/>
-            <a:ext cx="233172" cy="201168"/>
+            <a:off x="6281928" y="1655064"/>
+            <a:ext cx="219456" cy="201168"/>
           </a:xfrm>
           <a:prstGeom prst="rect">
             <a:avLst/>
@@ -34388,8 +34297,8 @@
         </p:nvSpPr>
         <p:spPr>
           <a:xfrm>
-            <a:off x="6364224" y="1655064"/>
-            <a:ext cx="233172" cy="201168"/>
+            <a:off x="6501384" y="1655064"/>
+            <a:ext cx="219456" cy="201168"/>
           </a:xfrm>
           <a:prstGeom prst="rect">
             <a:avLst/>
@@ -34430,8 +34339,8 @@
         </p:nvSpPr>
         <p:spPr>
           <a:xfrm>
-            <a:off x="6597396" y="1655064"/>
-            <a:ext cx="233172" cy="201168"/>
+            <a:off x="6720840" y="1655064"/>
+            <a:ext cx="219456" cy="201168"/>
           </a:xfrm>
           <a:prstGeom prst="rect">
             <a:avLst/>
@@ -34472,8 +34381,8 @@
         </p:nvSpPr>
         <p:spPr>
           <a:xfrm>
-            <a:off x="6830568" y="1655064"/>
-            <a:ext cx="233172" cy="201168"/>
+            <a:off x="6940296" y="1655064"/>
+            <a:ext cx="219456" cy="201168"/>
           </a:xfrm>
           <a:prstGeom prst="rect">
             <a:avLst/>
@@ -34514,8 +34423,8 @@
         </p:nvSpPr>
         <p:spPr>
           <a:xfrm>
-            <a:off x="7063740" y="1655064"/>
-            <a:ext cx="233172" cy="201168"/>
+            <a:off x="7159752" y="1655064"/>
+            <a:ext cx="219456" cy="201168"/>
           </a:xfrm>
           <a:prstGeom prst="rect">
             <a:avLst/>
@@ -34556,8 +34465,8 @@
         </p:nvSpPr>
         <p:spPr>
           <a:xfrm>
-            <a:off x="7296912" y="1655064"/>
-            <a:ext cx="233172" cy="201168"/>
+            <a:off x="7379208" y="1655064"/>
+            <a:ext cx="219456" cy="201168"/>
           </a:xfrm>
           <a:prstGeom prst="rect">
             <a:avLst/>
@@ -34598,8 +34507,8 @@
         </p:nvSpPr>
         <p:spPr>
           <a:xfrm>
-            <a:off x="7530084" y="1655064"/>
-            <a:ext cx="233172" cy="201168"/>
+            <a:off x="7598664" y="1655064"/>
+            <a:ext cx="219456" cy="201168"/>
           </a:xfrm>
           <a:prstGeom prst="rect">
             <a:avLst/>
@@ -34640,8 +34549,8 @@
         </p:nvSpPr>
         <p:spPr>
           <a:xfrm>
-            <a:off x="7763256" y="1655064"/>
-            <a:ext cx="233172" cy="201168"/>
+            <a:off x="7818120" y="1655064"/>
+            <a:ext cx="219456" cy="201168"/>
           </a:xfrm>
           <a:prstGeom prst="rect">
             <a:avLst/>
@@ -34682,8 +34591,8 @@
         </p:nvSpPr>
         <p:spPr>
           <a:xfrm>
-            <a:off x="7996428" y="1655064"/>
-            <a:ext cx="233172" cy="201168"/>
+            <a:off x="8037576" y="1655064"/>
+            <a:ext cx="219456" cy="201168"/>
           </a:xfrm>
           <a:prstGeom prst="rect">
             <a:avLst/>
@@ -34724,8 +34633,8 @@
         </p:nvSpPr>
         <p:spPr>
           <a:xfrm>
-            <a:off x="8229600" y="1655064"/>
-            <a:ext cx="233172" cy="201168"/>
+            <a:off x="8257032" y="1655064"/>
+            <a:ext cx="219456" cy="201168"/>
           </a:xfrm>
           <a:prstGeom prst="rect">
             <a:avLst/>
@@ -34766,8 +34675,8 @@
         </p:nvSpPr>
         <p:spPr>
           <a:xfrm>
-            <a:off x="8462772" y="1655064"/>
-            <a:ext cx="233172" cy="201168"/>
+            <a:off x="8476488" y="1655064"/>
+            <a:ext cx="219456" cy="201168"/>
           </a:xfrm>
           <a:prstGeom prst="rect">
             <a:avLst/>
@@ -34808,7 +34717,7 @@
         </p:nvSpPr>
         <p:spPr>
           <a:xfrm>
-            <a:off x="4654296" y="1892808"/>
+            <a:off x="4873752" y="1892808"/>
             <a:ext cx="237744" cy="365760"/>
           </a:xfrm>
           <a:prstGeom prst="rect">
@@ -34850,7 +34759,7 @@
         </p:nvSpPr>
         <p:spPr>
           <a:xfrm>
-            <a:off x="4654296" y="2258568"/>
+            <a:off x="4873752" y="2258568"/>
             <a:ext cx="237744" cy="365760"/>
           </a:xfrm>
           <a:prstGeom prst="rect">
@@ -34892,8 +34801,8 @@
         </p:nvSpPr>
         <p:spPr>
           <a:xfrm>
-            <a:off x="4617720" y="2642616"/>
-            <a:ext cx="310896" cy="201168"/>
+            <a:off x="4617720" y="1984248"/>
+            <a:ext cx="219456" cy="548640"/>
           </a:xfrm>
           <a:prstGeom prst="rect">
             <a:avLst/>
@@ -34905,9 +34814,9 @@
           <a:bodyPr wrap="square" lIns="0" tIns="0" rIns="0" bIns="0" rtlCol="0" anchor="ctr"/>
           <a:lstStyle/>
           <a:p>
-            <a:pPr algn="r" indent="0" marL="0">
-              <a:lnSpc>
-                <a:spcPct val="115000"/>
+            <a:pPr algn="ctr" indent="0" marL="0">
+              <a:lnSpc>
+                <a:spcPct val="100000"/>
               </a:lnSpc>
               <a:buNone/>
             </a:pPr>
@@ -34924,6 +34833,26 @@
             </a:r>
             <a:endParaRPr lang="en-US" sz="1000" dirty="0"/>
           </a:p>
+          <a:p>
+            <a:pPr algn="ctr" indent="0" marL="0">
+              <a:lnSpc>
+                <a:spcPct val="100000"/>
+              </a:lnSpc>
+              <a:buNone/>
+            </a:pPr>
+            <a:r>
+              <a:rPr lang="en-US" sz="1000" dirty="0">
+                <a:solidFill>
+                  <a:srgbClr val="6B6B6B"/>
+                </a:solidFill>
+                <a:latin typeface="微软雅黑" pitchFamily="34" charset="0"/>
+                <a:ea typeface="微软雅黑" pitchFamily="34" charset="-122"/>
+                <a:cs typeface="微软雅黑" pitchFamily="34" charset="-120"/>
+              </a:rPr>
+              <a:t>↓</a:t>
+            </a:r>
+            <a:endParaRPr lang="en-US" sz="1000" dirty="0"/>
+          </a:p>
         </p:txBody>
       </p:sp>
       <p:sp>
@@ -34934,7 +34863,7 @@
         </p:nvSpPr>
         <p:spPr>
           <a:xfrm>
-            <a:off x="4617720" y="2916936"/>
+            <a:off x="4617720" y="2825496"/>
             <a:ext cx="1417320" cy="256032"/>
           </a:xfrm>
           <a:prstGeom prst="roundRect">
@@ -34961,7 +34890,7 @@
         </p:nvSpPr>
         <p:spPr>
           <a:xfrm>
-            <a:off x="4617720" y="2916936"/>
+            <a:off x="4617720" y="2825496"/>
             <a:ext cx="1417320" cy="256032"/>
           </a:xfrm>
           <a:prstGeom prst="rect">
@@ -35003,7 +34932,7 @@
         </p:nvSpPr>
         <p:spPr>
           <a:xfrm>
-            <a:off x="6144768" y="2898648"/>
+            <a:off x="6144768" y="2807208"/>
             <a:ext cx="2560320" cy="292608"/>
           </a:xfrm>
           <a:prstGeom prst="rect">
@@ -35045,7 +34974,7 @@
         </p:nvSpPr>
         <p:spPr>
           <a:xfrm>
-            <a:off x="4617720" y="3246120"/>
+            <a:off x="4617720" y="3136392"/>
             <a:ext cx="1417320" cy="256032"/>
           </a:xfrm>
           <a:prstGeom prst="roundRect">
@@ -35072,7 +35001,7 @@
         </p:nvSpPr>
         <p:spPr>
           <a:xfrm>
-            <a:off x="4617720" y="3246120"/>
+            <a:off x="4617720" y="3136392"/>
             <a:ext cx="1417320" cy="256032"/>
           </a:xfrm>
           <a:prstGeom prst="rect">
@@ -35114,7 +35043,7 @@
         </p:nvSpPr>
         <p:spPr>
           <a:xfrm>
-            <a:off x="6144768" y="3227832"/>
+            <a:off x="6144768" y="3118104"/>
             <a:ext cx="2560320" cy="292608"/>
           </a:xfrm>
           <a:prstGeom prst="rect">
@@ -35156,12 +35085,12 @@
         </p:nvSpPr>
         <p:spPr>
           <a:xfrm>
-            <a:off x="4617720" y="3794760"/>
-            <a:ext cx="4114800" cy="777240"/>
+            <a:off x="4617720" y="3648456"/>
+            <a:ext cx="4114800" cy="923544"/>
           </a:xfrm>
           <a:prstGeom prst="roundRect">
             <a:avLst>
-              <a:gd name="adj" fmla="val 14118"/>
+              <a:gd name="adj" fmla="val 11881"/>
             </a:avLst>
           </a:prstGeom>
           <a:solidFill>
@@ -35183,7 +35112,7 @@
         </p:nvSpPr>
         <p:spPr>
           <a:xfrm>
-            <a:off x="4782312" y="3959352"/>
+            <a:off x="4764024" y="3954780"/>
             <a:ext cx="310896" cy="310896"/>
           </a:xfrm>
           <a:prstGeom prst="ellipse">
@@ -35216,7 +35145,7 @@
         </p:blipFill>
         <p:spPr>
           <a:xfrm>
-            <a:off x="4856927" y="4033967"/>
+            <a:off x="4838639" y="4029395"/>
             <a:ext cx="161666" cy="161666"/>
           </a:xfrm>
           <a:prstGeom prst="rect">
@@ -35232,8 +35161,8 @@
         </p:nvSpPr>
         <p:spPr>
           <a:xfrm>
-            <a:off x="5202936" y="3959352"/>
-            <a:ext cx="3364992" cy="310896"/>
+            <a:off x="5202936" y="3739896"/>
+            <a:ext cx="3383280" cy="274320"/>
           </a:xfrm>
           <a:prstGeom prst="rect">
             <a:avLst/>
@@ -35252,7 +35181,7 @@
               <a:buNone/>
             </a:pPr>
             <a:r>
-              <a:rPr lang="en-US" sz="1350" b="1" dirty="0">
+              <a:rPr lang="en-US" sz="1300" b="1" dirty="0">
                 <a:solidFill>
                   <a:srgbClr val="E5484D"/>
                 </a:solidFill>
@@ -35262,7 +35191,7 @@
               </a:rPr>
               <a:t>行、列都从 0 开始</a:t>
             </a:r>
-            <a:endParaRPr lang="en-US" sz="1350" dirty="0"/>
+            <a:endParaRPr lang="en-US" sz="1300" dirty="0"/>
           </a:p>
         </p:txBody>
       </p:sp>
@@ -35274,8 +35203,8 @@
         </p:nvSpPr>
         <p:spPr>
           <a:xfrm>
-            <a:off x="4782312" y="4361688"/>
-            <a:ext cx="3785616" cy="82296"/>
+            <a:off x="5202936" y="4032504"/>
+            <a:ext cx="3383280" cy="466344"/>
           </a:xfrm>
           <a:prstGeom prst="rect">
             <a:avLst/>
@@ -35319,7 +35248,7 @@
                 <a:ea typeface="微软雅黑" pitchFamily="34" charset="-122"/>
                 <a:cs typeface="微软雅黑" pitchFamily="34" charset="-120"/>
               </a:rPr>
-              <a:t> 不是第 1 行第 1 格，而是第 2 行第 2 格。</a:t>
+              <a:t> 指的是第 2 行、第 2 格。</a:t>
             </a:r>
             <a:endParaRPr lang="en-US" sz="1200" dirty="0"/>
           </a:p>
@@ -37296,7 +37225,7 @@
         <p:spPr>
           <a:xfrm>
             <a:off x="6083300" y="2121662"/>
-            <a:ext cx="2649220" cy="417576"/>
+            <a:ext cx="2649220" cy="608076"/>
           </a:xfrm>
           <a:prstGeom prst="rect">
             <a:avLst/>
@@ -37323,7 +37252,7 @@
                 <a:ea typeface="微软雅黑" pitchFamily="34" charset="-122"/>
                 <a:cs typeface="微软雅黑" pitchFamily="34" charset="-120"/>
               </a:rPr>
-              <a:t>创建 lcd 对象：地址 0x27、16 列、2 行（地址要和扫描结果一致）</a:t>
+              <a:t>创建 lcd 对象：地址 0x27、16 列、2 行。注意：地址要和程序①扫描到的一致</a:t>
             </a:r>
             <a:endParaRPr lang="en-US" sz="1200" dirty="0"/>
           </a:p>
@@ -37518,7 +37447,7 @@
         <p:spPr>
           <a:xfrm>
             <a:off x="6083300" y="3313430"/>
-            <a:ext cx="2649220" cy="417576"/>
+            <a:ext cx="2649220" cy="256032"/>
           </a:xfrm>
           <a:prstGeom prst="rect">
             <a:avLst/>
@@ -37545,7 +37474,7 @@
                 <a:ea typeface="微软雅黑" pitchFamily="34" charset="-122"/>
                 <a:cs typeface="微软雅黑" pitchFamily="34" charset="-120"/>
               </a:rPr>
-              <a:t>init()：屏幕开工（像灯环的 begin()）</a:t>
+              <a:t>init()：屏幕开工，像 begin()</a:t>
             </a:r>
             <a:endParaRPr lang="en-US" sz="1200" dirty="0"/>
           </a:p>
@@ -37559,8 +37488,8 @@
         </p:nvSpPr>
         <p:spPr>
           <a:xfrm>
-            <a:off x="5413248" y="3795014"/>
-            <a:ext cx="578612" cy="219456"/>
+            <a:off x="5413248" y="3596894"/>
+            <a:ext cx="800608" cy="219456"/>
           </a:xfrm>
           <a:prstGeom prst="roundRect">
             <a:avLst>
@@ -37586,8 +37515,8 @@
         </p:nvSpPr>
         <p:spPr>
           <a:xfrm>
-            <a:off x="5413248" y="3795014"/>
-            <a:ext cx="578612" cy="219456"/>
+            <a:off x="5413248" y="3596894"/>
+            <a:ext cx="800608" cy="219456"/>
           </a:xfrm>
           <a:prstGeom prst="rect">
             <a:avLst/>
@@ -37614,7 +37543,7 @@
                 <a:ea typeface="微软雅黑" pitchFamily="34" charset="-122"/>
                 <a:cs typeface="微软雅黑" pitchFamily="34" charset="-120"/>
               </a:rPr>
-              <a:t>第 9 行</a:t>
+              <a:t>第 9–10 行</a:t>
             </a:r>
             <a:endParaRPr lang="en-US" sz="950" dirty="0"/>
           </a:p>
@@ -37628,8 +37557,8 @@
         </p:nvSpPr>
         <p:spPr>
           <a:xfrm>
-            <a:off x="6083300" y="3785870"/>
-            <a:ext cx="2649220" cy="256032"/>
+            <a:off x="6305296" y="3587750"/>
+            <a:ext cx="2427224" cy="256032"/>
           </a:xfrm>
           <a:prstGeom prst="rect">
             <a:avLst/>
@@ -37656,118 +37585,7 @@
                 <a:ea typeface="微软雅黑" pitchFamily="34" charset="-122"/>
                 <a:cs typeface="微软雅黑" pitchFamily="34" charset="-120"/>
               </a:rPr>
-              <a:t>注释：下面开始往屏幕上写字</a:t>
-            </a:r>
-            <a:endParaRPr lang="en-US" sz="1200" dirty="0"/>
-          </a:p>
-        </p:txBody>
-      </p:sp>
-      <p:sp>
-        <p:nvSpPr>
-          <p:cNvPr id="54" name="Shape 51"/>
-          <p:cNvSpPr/>
-          <p:nvPr/>
-        </p:nvSpPr>
-        <p:spPr>
-          <a:xfrm>
-            <a:off x="5413248" y="4105910"/>
-            <a:ext cx="655828" cy="219456"/>
-          </a:xfrm>
-          <a:prstGeom prst="roundRect">
-            <a:avLst>
-              <a:gd name="adj" fmla="val 50000"/>
-            </a:avLst>
-          </a:prstGeom>
-          <a:solidFill>
-            <a:srgbClr val="40E0D0"/>
-          </a:solidFill>
-          <a:ln w="12700">
-            <a:solidFill>
-              <a:srgbClr val="40E0D0"/>
-            </a:solidFill>
-            <a:prstDash val="solid"/>
-          </a:ln>
-        </p:spPr>
-      </p:sp>
-      <p:sp>
-        <p:nvSpPr>
-          <p:cNvPr id="55" name="Text 52"/>
-          <p:cNvSpPr txBox="1"/>
-          <p:nvPr/>
-        </p:nvSpPr>
-        <p:spPr>
-          <a:xfrm>
-            <a:off x="5413248" y="4105910"/>
-            <a:ext cx="655828" cy="219456"/>
-          </a:xfrm>
-          <a:prstGeom prst="rect">
-            <a:avLst/>
-          </a:prstGeom>
-          <a:noFill/>
-          <a:ln/>
-        </p:spPr>
-        <p:txBody>
-          <a:bodyPr wrap="square" lIns="0" tIns="0" rIns="0" bIns="0" rtlCol="0" anchor="ctr"/>
-          <a:lstStyle/>
-          <a:p>
-            <a:pPr algn="ctr" indent="0" marL="0">
-              <a:lnSpc>
-                <a:spcPct val="115000"/>
-              </a:lnSpc>
-              <a:buNone/>
-            </a:pPr>
-            <a:r>
-              <a:rPr lang="en-US" sz="950" b="1" dirty="0">
-                <a:solidFill>
-                  <a:srgbClr val="2D2D2D"/>
-                </a:solidFill>
-                <a:latin typeface="微软雅黑" pitchFamily="34" charset="0"/>
-                <a:ea typeface="微软雅黑" pitchFamily="34" charset="-122"/>
-                <a:cs typeface="微软雅黑" pitchFamily="34" charset="-120"/>
-              </a:rPr>
-              <a:t>第 10 行</a:t>
-            </a:r>
-            <a:endParaRPr lang="en-US" sz="950" dirty="0"/>
-          </a:p>
-        </p:txBody>
-      </p:sp>
-      <p:sp>
-        <p:nvSpPr>
-          <p:cNvPr id="56" name="Text 53"/>
-          <p:cNvSpPr txBox="1"/>
-          <p:nvPr/>
-        </p:nvSpPr>
-        <p:spPr>
-          <a:xfrm>
-            <a:off x="6160516" y="4096766"/>
-            <a:ext cx="2572004" cy="256032"/>
-          </a:xfrm>
-          <a:prstGeom prst="rect">
-            <a:avLst/>
-          </a:prstGeom>
-          <a:noFill/>
-          <a:ln/>
-        </p:spPr>
-        <p:txBody>
-          <a:bodyPr wrap="square" lIns="0" tIns="0" rIns="0" bIns="0" rtlCol="0" anchor="t"/>
-          <a:lstStyle/>
-          <a:p>
-            <a:pPr algn="l" indent="0" marL="0">
-              <a:lnSpc>
-                <a:spcPct val="110000"/>
-              </a:lnSpc>
-              <a:buNone/>
-            </a:pPr>
-            <a:r>
-              <a:rPr lang="en-US" sz="1200" dirty="0">
-                <a:solidFill>
-                  <a:srgbClr val="2D2D2D"/>
-                </a:solidFill>
-                <a:latin typeface="微软雅黑" pitchFamily="34" charset="0"/>
-                <a:ea typeface="微软雅黑" pitchFamily="34" charset="-122"/>
-                <a:cs typeface="微软雅黑" pitchFamily="34" charset="-120"/>
-              </a:rPr>
-              <a:t>backlight()：打开背光</a:t>
+              <a:t>注释；backlight() 开背光</a:t>
             </a:r>
             <a:endParaRPr lang="en-US" sz="1200" dirty="0"/>
           </a:p>
@@ -37978,11 +37796,11 @@
         <p:spPr>
           <a:xfrm>
             <a:off x="411480" y="1234440"/>
-            <a:ext cx="4709160" cy="2148840"/>
+            <a:ext cx="4709160" cy="2157984"/>
           </a:xfrm>
           <a:prstGeom prst="roundRect">
             <a:avLst>
-              <a:gd name="adj" fmla="val 4255"/>
+              <a:gd name="adj" fmla="val 4237"/>
             </a:avLst>
           </a:prstGeom>
           <a:solidFill>
@@ -39352,7 +39170,7 @@
         <p:spPr>
           <a:xfrm>
             <a:off x="5413248" y="1600200"/>
-            <a:ext cx="655828" cy="219456"/>
+            <a:ext cx="877824" cy="219456"/>
           </a:xfrm>
           <a:prstGeom prst="roundRect">
             <a:avLst>
@@ -39379,7 +39197,7 @@
         <p:spPr>
           <a:xfrm>
             <a:off x="5413248" y="1600200"/>
-            <a:ext cx="655828" cy="219456"/>
+            <a:ext cx="877824" cy="219456"/>
           </a:xfrm>
           <a:prstGeom prst="rect">
             <a:avLst/>
@@ -39406,7 +39224,7 @@
                 <a:ea typeface="微软雅黑" pitchFamily="34" charset="-122"/>
                 <a:cs typeface="微软雅黑" pitchFamily="34" charset="-120"/>
               </a:rPr>
-              <a:t>第 11 行</a:t>
+              <a:t>第 11–12 行</a:t>
             </a:r>
             <a:endParaRPr lang="en-US" sz="950" dirty="0"/>
           </a:p>
@@ -39420,8 +39238,8 @@
         </p:nvSpPr>
         <p:spPr>
           <a:xfrm>
-            <a:off x="6160516" y="1591056"/>
-            <a:ext cx="2572004" cy="417576"/>
+            <a:off x="6382512" y="1591056"/>
+            <a:ext cx="2350008" cy="417576"/>
           </a:xfrm>
           <a:prstGeom prst="rect">
             <a:avLst/>
@@ -39448,7 +39266,7 @@
                 <a:ea typeface="微软雅黑" pitchFamily="34" charset="-122"/>
                 <a:cs typeface="微软雅黑" pitchFamily="34" charset="-120"/>
               </a:rPr>
-              <a:t>落笔到第 1 行第 1 格（注释写成 2nd line，是原程序的笔误）</a:t>
+              <a:t>(0,0) 是第 1 行第 1 格，写 “Hello Word”</a:t>
             </a:r>
             <a:endParaRPr lang="en-US" sz="1200" dirty="0"/>
           </a:p>
@@ -39462,8 +39280,8 @@
         </p:nvSpPr>
         <p:spPr>
           <a:xfrm>
-            <a:off x="5413248" y="2072640"/>
-            <a:ext cx="655828" cy="219456"/>
+            <a:off x="5413248" y="2036064"/>
+            <a:ext cx="877824" cy="219456"/>
           </a:xfrm>
           <a:prstGeom prst="roundRect">
             <a:avLst>
@@ -39489,8 +39307,8 @@
         </p:nvSpPr>
         <p:spPr>
           <a:xfrm>
-            <a:off x="5413248" y="2072640"/>
-            <a:ext cx="655828" cy="219456"/>
+            <a:off x="5413248" y="2036064"/>
+            <a:ext cx="877824" cy="219456"/>
           </a:xfrm>
           <a:prstGeom prst="rect">
             <a:avLst/>
@@ -39517,7 +39335,7 @@
                 <a:ea typeface="微软雅黑" pitchFamily="34" charset="-122"/>
                 <a:cs typeface="微软雅黑" pitchFamily="34" charset="-120"/>
               </a:rPr>
-              <a:t>第 12 行</a:t>
+              <a:t>第 13–14 行</a:t>
             </a:r>
             <a:endParaRPr lang="en-US" sz="950" dirty="0"/>
           </a:p>
@@ -39531,8 +39349,8 @@
         </p:nvSpPr>
         <p:spPr>
           <a:xfrm>
-            <a:off x="6160516" y="2063496"/>
-            <a:ext cx="2572004" cy="417576"/>
+            <a:off x="6382512" y="2026920"/>
+            <a:ext cx="2350008" cy="417576"/>
           </a:xfrm>
           <a:prstGeom prst="rect">
             <a:avLst/>
@@ -39559,7 +39377,7 @@
                 <a:ea typeface="微软雅黑" pitchFamily="34" charset="-122"/>
                 <a:cs typeface="微软雅黑" pitchFamily="34" charset="-120"/>
               </a:rPr>
-              <a:t>写 “Hello Word”（原拼写，应为 World）</a:t>
+              <a:t>(4,1) 是第 2 行第 5 格，写 “Science Robot”</a:t>
             </a:r>
             <a:endParaRPr lang="en-US" sz="1200" dirty="0"/>
           </a:p>
@@ -39573,8 +39391,8 @@
         </p:nvSpPr>
         <p:spPr>
           <a:xfrm>
-            <a:off x="5413248" y="2545080"/>
-            <a:ext cx="655828" cy="219456"/>
+            <a:off x="5413248" y="2670556"/>
+            <a:ext cx="877824" cy="219456"/>
           </a:xfrm>
           <a:prstGeom prst="roundRect">
             <a:avLst>
@@ -39600,8 +39418,8 @@
         </p:nvSpPr>
         <p:spPr>
           <a:xfrm>
-            <a:off x="5413248" y="2545080"/>
-            <a:ext cx="655828" cy="219456"/>
+            <a:off x="5413248" y="2670556"/>
+            <a:ext cx="877824" cy="219456"/>
           </a:xfrm>
           <a:prstGeom prst="rect">
             <a:avLst/>
@@ -39628,7 +39446,7 @@
                 <a:ea typeface="微软雅黑" pitchFamily="34" charset="-122"/>
                 <a:cs typeface="微软雅黑" pitchFamily="34" charset="-120"/>
               </a:rPr>
-              <a:t>第 13 行</a:t>
+              <a:t>第 17–19 行</a:t>
             </a:r>
             <a:endParaRPr lang="en-US" sz="950" dirty="0"/>
           </a:p>
@@ -39642,8 +39460,8 @@
         </p:nvSpPr>
         <p:spPr>
           <a:xfrm>
-            <a:off x="6160516" y="2535936"/>
-            <a:ext cx="2572004" cy="256032"/>
+            <a:off x="6382512" y="2661412"/>
+            <a:ext cx="2350008" cy="256032"/>
           </a:xfrm>
           <a:prstGeom prst="rect">
             <a:avLst/>
@@ -39670,7 +39488,7 @@
                 <a:ea typeface="微软雅黑" pitchFamily="34" charset="-122"/>
                 <a:cs typeface="微软雅黑" pitchFamily="34" charset="-120"/>
               </a:rPr>
-              <a:t>落笔到第 2 行第 5 格</a:t>
+              <a:t>loop() 空着：字会一直留着</a:t>
             </a:r>
             <a:endParaRPr lang="en-US" sz="1200" dirty="0"/>
           </a:p>
@@ -39684,20 +39502,20 @@
         </p:nvSpPr>
         <p:spPr>
           <a:xfrm>
-            <a:off x="5413248" y="2855976"/>
-            <a:ext cx="655828" cy="219456"/>
+            <a:off x="5413248" y="3200400"/>
+            <a:ext cx="3319272" cy="1371600"/>
           </a:xfrm>
           <a:prstGeom prst="roundRect">
             <a:avLst>
-              <a:gd name="adj" fmla="val 50000"/>
+              <a:gd name="adj" fmla="val 8000"/>
             </a:avLst>
           </a:prstGeom>
           <a:solidFill>
-            <a:srgbClr val="40E0D0"/>
+            <a:srgbClr val="FFFFFF"/>
           </a:solidFill>
           <a:ln w="12700">
             <a:solidFill>
-              <a:srgbClr val="40E0D0"/>
+              <a:srgbClr val="E5484D"/>
             </a:solidFill>
             <a:prstDash val="solid"/>
           </a:ln>
@@ -39705,14 +39523,63 @@
       </p:sp>
       <p:sp>
         <p:nvSpPr>
-          <p:cNvPr id="42" name="Text 39"/>
-          <p:cNvSpPr txBox="1"/>
-          <p:nvPr/>
-        </p:nvSpPr>
-        <p:spPr>
-          <a:xfrm>
-            <a:off x="5413248" y="2855976"/>
-            <a:ext cx="655828" cy="219456"/>
+          <p:cNvPr id="42" name="Shape 39"/>
+          <p:cNvSpPr/>
+          <p:nvPr/>
+        </p:nvSpPr>
+        <p:spPr>
+          <a:xfrm>
+            <a:off x="5577840" y="3364992"/>
+            <a:ext cx="310896" cy="310896"/>
+          </a:xfrm>
+          <a:prstGeom prst="ellipse">
+            <a:avLst/>
+          </a:prstGeom>
+          <a:solidFill>
+            <a:srgbClr val="E5484D"/>
+          </a:solidFill>
+          <a:ln w="12700">
+            <a:solidFill>
+              <a:srgbClr val="E5484D"/>
+            </a:solidFill>
+            <a:prstDash val="solid"/>
+          </a:ln>
+        </p:spPr>
+      </p:sp>
+      <p:pic>
+        <p:nvPicPr>
+          <p:cNvPr id="43" name="Image 0" descr="preencoded.png">    </p:cNvPr>
+          <p:cNvPicPr>
+            <a:picLocks noChangeAspect="1"/>
+          </p:cNvPicPr>
+          <p:nvPr/>
+        </p:nvPicPr>
+        <p:blipFill>
+          <a:blip r:embed="rId1"/>
+          <a:stretch>
+            <a:fillRect/>
+          </a:stretch>
+        </p:blipFill>
+        <p:spPr>
+          <a:xfrm>
+            <a:off x="5652455" y="3439607"/>
+            <a:ext cx="161666" cy="161666"/>
+          </a:xfrm>
+          <a:prstGeom prst="rect">
+            <a:avLst/>
+          </a:prstGeom>
+        </p:spPr>
+      </p:pic>
+      <p:sp>
+        <p:nvSpPr>
+          <p:cNvPr id="44" name="Text 40"/>
+          <p:cNvSpPr txBox="1"/>
+          <p:nvPr/>
+        </p:nvSpPr>
+        <p:spPr>
+          <a:xfrm>
+            <a:off x="5998464" y="3364992"/>
+            <a:ext cx="2569464" cy="310896"/>
           </a:xfrm>
           <a:prstGeom prst="rect">
             <a:avLst/>
@@ -39724,64 +39591,131 @@
           <a:bodyPr wrap="square" lIns="0" tIns="0" rIns="0" bIns="0" rtlCol="0" anchor="ctr"/>
           <a:lstStyle/>
           <a:p>
-            <a:pPr algn="ctr" indent="0" marL="0">
+            <a:pPr algn="l" indent="0" marL="0">
               <a:lnSpc>
                 <a:spcPct val="115000"/>
               </a:lnSpc>
               <a:buNone/>
             </a:pPr>
             <a:r>
-              <a:rPr lang="en-US" sz="950" b="1" dirty="0">
-                <a:solidFill>
-                  <a:srgbClr val="2D2D2D"/>
+              <a:rPr lang="en-US" sz="1350" b="1" dirty="0">
+                <a:solidFill>
+                  <a:srgbClr val="E5484D"/>
                 </a:solidFill>
                 <a:latin typeface="微软雅黑" pitchFamily="34" charset="0"/>
                 <a:ea typeface="微软雅黑" pitchFamily="34" charset="-122"/>
                 <a:cs typeface="微软雅黑" pitchFamily="34" charset="-120"/>
               </a:rPr>
-              <a:t>第 14 行</a:t>
-            </a:r>
-            <a:endParaRPr lang="en-US" sz="950" dirty="0"/>
-          </a:p>
-        </p:txBody>
-      </p:sp>
-      <p:sp>
-        <p:nvSpPr>
-          <p:cNvPr id="43" name="Text 40"/>
-          <p:cNvSpPr txBox="1"/>
-          <p:nvPr/>
-        </p:nvSpPr>
-        <p:spPr>
-          <a:xfrm>
-            <a:off x="6160516" y="2846832"/>
-            <a:ext cx="2572004" cy="417576"/>
-          </a:xfrm>
-          <a:prstGeom prst="rect">
-            <a:avLst/>
-          </a:prstGeom>
-          <a:noFill/>
-          <a:ln/>
-        </p:spPr>
-        <p:txBody>
-          <a:bodyPr wrap="square" lIns="0" tIns="0" rIns="0" bIns="0" rtlCol="0" anchor="t"/>
-          <a:lstStyle/>
-          <a:p>
-            <a:pPr algn="l" indent="0" marL="0">
-              <a:lnSpc>
-                <a:spcPct val="110000"/>
-              </a:lnSpc>
-              <a:buNone/>
-            </a:pPr>
-            <a:r>
-              <a:rPr lang="en-US" sz="1200" dirty="0">
-                <a:solidFill>
-                  <a:srgbClr val="2D2D2D"/>
+              <a:t>原程序的两处笔误</a:t>
+            </a:r>
+            <a:endParaRPr lang="en-US" sz="1350" dirty="0"/>
+          </a:p>
+        </p:txBody>
+      </p:sp>
+      <p:sp>
+        <p:nvSpPr>
+          <p:cNvPr id="45" name="Shape 41"/>
+          <p:cNvSpPr/>
+          <p:nvPr/>
+        </p:nvSpPr>
+        <p:spPr>
+          <a:xfrm>
+            <a:off x="5577840" y="3785616"/>
+            <a:ext cx="219456" cy="219456"/>
+          </a:xfrm>
+          <a:prstGeom prst="ellipse">
+            <a:avLst/>
+          </a:prstGeom>
+          <a:solidFill>
+            <a:srgbClr val="E5484D"/>
+          </a:solidFill>
+          <a:ln w="12700">
+            <a:solidFill>
+              <a:srgbClr val="E5484D"/>
+            </a:solidFill>
+            <a:prstDash val="solid"/>
+          </a:ln>
+        </p:spPr>
+      </p:sp>
+      <p:sp>
+        <p:nvSpPr>
+          <p:cNvPr id="46" name="Text 42"/>
+          <p:cNvSpPr txBox="1"/>
+          <p:nvPr/>
+        </p:nvSpPr>
+        <p:spPr>
+          <a:xfrm>
+            <a:off x="5577840" y="3785616"/>
+            <a:ext cx="219456" cy="219456"/>
+          </a:xfrm>
+          <a:prstGeom prst="rect">
+            <a:avLst/>
+          </a:prstGeom>
+          <a:noFill/>
+          <a:ln/>
+        </p:spPr>
+        <p:txBody>
+          <a:bodyPr wrap="square" lIns="0" tIns="0" rIns="0" bIns="0" rtlCol="0" anchor="ctr"/>
+          <a:lstStyle/>
+          <a:p>
+            <a:pPr algn="ctr" indent="0" marL="0">
+              <a:lnSpc>
+                <a:spcPct val="115000"/>
+              </a:lnSpc>
+              <a:buNone/>
+            </a:pPr>
+            <a:r>
+              <a:rPr lang="en-US" sz="1100" b="1" dirty="0">
+                <a:solidFill>
+                  <a:srgbClr val="FFFFFF"/>
                 </a:solidFill>
                 <a:latin typeface="微软雅黑" pitchFamily="34" charset="0"/>
                 <a:ea typeface="微软雅黑" pitchFamily="34" charset="-122"/>
                 <a:cs typeface="微软雅黑" pitchFamily="34" charset="-120"/>
               </a:rPr>
-              <a:t>写 “Science Robot”：13 个字符只剩 12 格，t 显示不出来</a:t>
+              <a:t>1</a:t>
+            </a:r>
+            <a:endParaRPr lang="en-US" sz="1100" dirty="0"/>
+          </a:p>
+        </p:txBody>
+      </p:sp>
+      <p:sp>
+        <p:nvSpPr>
+          <p:cNvPr id="47" name="Text 43"/>
+          <p:cNvSpPr txBox="1"/>
+          <p:nvPr/>
+        </p:nvSpPr>
+        <p:spPr>
+          <a:xfrm>
+            <a:off x="5925312" y="3790569"/>
+            <a:ext cx="2642616" cy="227838"/>
+          </a:xfrm>
+          <a:prstGeom prst="rect">
+            <a:avLst/>
+          </a:prstGeom>
+          <a:noFill/>
+          <a:ln/>
+        </p:spPr>
+        <p:txBody>
+          <a:bodyPr wrap="square" lIns="0" tIns="0" rIns="0" bIns="0" rtlCol="0" anchor="t"/>
+          <a:lstStyle/>
+          <a:p>
+            <a:pPr algn="l" indent="0" marL="0">
+              <a:lnSpc>
+                <a:spcPct val="115000"/>
+              </a:lnSpc>
+              <a:buNone/>
+            </a:pPr>
+            <a:r>
+              <a:rPr lang="en-US" sz="1200" dirty="0">
+                <a:solidFill>
+                  <a:srgbClr val="2D2D2D"/>
+                </a:solidFill>
+                <a:latin typeface="微软雅黑" pitchFamily="34" charset="0"/>
+                <a:ea typeface="微软雅黑" pitchFamily="34" charset="-122"/>
+                <a:cs typeface="微软雅黑" pitchFamily="34" charset="-120"/>
+              </a:rPr>
+              <a:t>第 11 行注释 2nd line 应为第 1 行</a:t>
             </a:r>
             <a:endParaRPr lang="en-US" sz="1200" dirty="0"/>
           </a:p>
@@ -39789,26 +39723,24 @@
       </p:sp>
       <p:sp>
         <p:nvSpPr>
-          <p:cNvPr id="44" name="Shape 41"/>
+          <p:cNvPr id="48" name="Shape 44"/>
           <p:cNvSpPr/>
           <p:nvPr/>
         </p:nvSpPr>
         <p:spPr>
           <a:xfrm>
-            <a:off x="5413248" y="3328416"/>
-            <a:ext cx="877824" cy="219456"/>
-          </a:xfrm>
-          <a:prstGeom prst="roundRect">
-            <a:avLst>
-              <a:gd name="adj" fmla="val 50000"/>
-            </a:avLst>
+            <a:off x="5577840" y="4096512"/>
+            <a:ext cx="219456" cy="219456"/>
+          </a:xfrm>
+          <a:prstGeom prst="ellipse">
+            <a:avLst/>
           </a:prstGeom>
           <a:solidFill>
-            <a:srgbClr val="40E0D0"/>
+            <a:srgbClr val="E5484D"/>
           </a:solidFill>
           <a:ln w="12700">
             <a:solidFill>
-              <a:srgbClr val="40E0D0"/>
+              <a:srgbClr val="E5484D"/>
             </a:solidFill>
             <a:prstDash val="solid"/>
           </a:ln>
@@ -39816,14 +39748,14 @@
       </p:sp>
       <p:sp>
         <p:nvSpPr>
-          <p:cNvPr id="45" name="Text 42"/>
-          <p:cNvSpPr txBox="1"/>
-          <p:nvPr/>
-        </p:nvSpPr>
-        <p:spPr>
-          <a:xfrm>
-            <a:off x="5413248" y="3328416"/>
-            <a:ext cx="877824" cy="219456"/>
+          <p:cNvPr id="49" name="Text 45"/>
+          <p:cNvSpPr txBox="1"/>
+          <p:nvPr/>
+        </p:nvSpPr>
+        <p:spPr>
+          <a:xfrm>
+            <a:off x="5577840" y="4096512"/>
+            <a:ext cx="219456" cy="219456"/>
           </a:xfrm>
           <a:prstGeom prst="rect">
             <a:avLst/>
@@ -39842,30 +39774,30 @@
               <a:buNone/>
             </a:pPr>
             <a:r>
-              <a:rPr lang="en-US" sz="950" b="1" dirty="0">
-                <a:solidFill>
-                  <a:srgbClr val="2D2D2D"/>
+              <a:rPr lang="en-US" sz="1100" b="1" dirty="0">
+                <a:solidFill>
+                  <a:srgbClr val="FFFFFF"/>
                 </a:solidFill>
                 <a:latin typeface="微软雅黑" pitchFamily="34" charset="0"/>
                 <a:ea typeface="微软雅黑" pitchFamily="34" charset="-122"/>
                 <a:cs typeface="微软雅黑" pitchFamily="34" charset="-120"/>
               </a:rPr>
-              <a:t>第 17–19 行</a:t>
-            </a:r>
-            <a:endParaRPr lang="en-US" sz="950" dirty="0"/>
-          </a:p>
-        </p:txBody>
-      </p:sp>
-      <p:sp>
-        <p:nvSpPr>
-          <p:cNvPr id="46" name="Text 43"/>
-          <p:cNvSpPr txBox="1"/>
-          <p:nvPr/>
-        </p:nvSpPr>
-        <p:spPr>
-          <a:xfrm>
-            <a:off x="6382512" y="3319272"/>
-            <a:ext cx="2350008" cy="417576"/>
+              <a:t>2</a:t>
+            </a:r>
+            <a:endParaRPr lang="en-US" sz="1100" dirty="0"/>
+          </a:p>
+        </p:txBody>
+      </p:sp>
+      <p:sp>
+        <p:nvSpPr>
+          <p:cNvPr id="50" name="Text 46"/>
+          <p:cNvSpPr txBox="1"/>
+          <p:nvPr/>
+        </p:nvSpPr>
+        <p:spPr>
+          <a:xfrm>
+            <a:off x="5925312" y="4101465"/>
+            <a:ext cx="2642616" cy="227838"/>
           </a:xfrm>
           <a:prstGeom prst="rect">
             <a:avLst/>
@@ -39879,7 +39811,7 @@
           <a:p>
             <a:pPr algn="l" indent="0" marL="0">
               <a:lnSpc>
-                <a:spcPct val="110000"/>
+                <a:spcPct val="115000"/>
               </a:lnSpc>
               <a:buNone/>
             </a:pPr>
@@ -39892,7 +39824,7 @@
                 <a:ea typeface="微软雅黑" pitchFamily="34" charset="-122"/>
                 <a:cs typeface="微软雅黑" pitchFamily="34" charset="-120"/>
               </a:rPr>
-              <a:t>loop() 空着：字写一次就一直留在屏幕上</a:t>
+              <a:t>“Hello Word” 应为 Hello World</a:t>
             </a:r>
             <a:endParaRPr lang="en-US" sz="1200" dirty="0"/>
           </a:p>
@@ -39900,18 +39832,18 @@
       </p:sp>
       <p:sp>
         <p:nvSpPr>
-          <p:cNvPr id="47" name="Shape 44"/>
+          <p:cNvPr id="51" name="Shape 47"/>
           <p:cNvSpPr/>
           <p:nvPr/>
         </p:nvSpPr>
         <p:spPr>
           <a:xfrm>
-            <a:off x="411480" y="3657600"/>
-            <a:ext cx="4709160" cy="914400"/>
+            <a:off x="411480" y="3666744"/>
+            <a:ext cx="4709160" cy="905256"/>
           </a:xfrm>
           <a:prstGeom prst="roundRect">
             <a:avLst>
-              <a:gd name="adj" fmla="val 12000"/>
+              <a:gd name="adj" fmla="val 12121"/>
             </a:avLst>
           </a:prstGeom>
           <a:solidFill>
@@ -39927,14 +39859,14 @@
       </p:sp>
       <p:sp>
         <p:nvSpPr>
-          <p:cNvPr id="48" name="Text 45"/>
-          <p:cNvSpPr txBox="1"/>
-          <p:nvPr/>
-        </p:nvSpPr>
-        <p:spPr>
-          <a:xfrm>
-            <a:off x="576072" y="3749040"/>
-            <a:ext cx="2743200" cy="256032"/>
+          <p:cNvPr id="52" name="Text 48"/>
+          <p:cNvSpPr txBox="1"/>
+          <p:nvPr/>
+        </p:nvSpPr>
+        <p:spPr>
+          <a:xfrm>
+            <a:off x="576072" y="3721608"/>
+            <a:ext cx="4379976" cy="256032"/>
           </a:xfrm>
           <a:prstGeom prst="rect">
             <a:avLst/>
@@ -39953,7 +39885,7 @@
               <a:buNone/>
             </a:pPr>
             <a:r>
-              <a:rPr lang="en-US" sz="1300" b="1" dirty="0">
+              <a:rPr lang="en-US" sz="1250" b="1" dirty="0">
                 <a:solidFill>
                   <a:srgbClr val="2D2D2D"/>
                 </a:solidFill>
@@ -39961,22 +39893,39 @@
                 <a:ea typeface="微软雅黑" pitchFamily="34" charset="-122"/>
                 <a:cs typeface="微软雅黑" pitchFamily="34" charset="-120"/>
               </a:rPr>
-              <a:t>数一数第 2 行的格子</a:t>
-            </a:r>
-            <a:endParaRPr lang="en-US" sz="1300" dirty="0"/>
-          </a:p>
-        </p:txBody>
-      </p:sp>
-      <p:sp>
-        <p:nvSpPr>
-          <p:cNvPr id="49" name="Shape 46"/>
+              <a:t>数一数第 2 行：</a:t>
+            </a:r>
+            <a:pPr algn="l" indent="0" marL="0">
+              <a:lnSpc>
+                <a:spcPct val="115000"/>
+              </a:lnSpc>
+              <a:buNone/>
+            </a:pPr>
+            <a:r>
+              <a:rPr lang="en-US" sz="1250" dirty="0">
+                <a:solidFill>
+                  <a:srgbClr val="E5484D"/>
+                </a:solidFill>
+                <a:latin typeface="微软雅黑" pitchFamily="34" charset="0"/>
+                <a:ea typeface="微软雅黑" pitchFamily="34" charset="-122"/>
+                <a:cs typeface="微软雅黑" pitchFamily="34" charset="-120"/>
+              </a:rPr>
+              <a:t>编号 16 的格子不存在，t 看不见</a:t>
+            </a:r>
+            <a:endParaRPr lang="en-US" sz="1250" dirty="0"/>
+          </a:p>
+        </p:txBody>
+      </p:sp>
+      <p:sp>
+        <p:nvSpPr>
+          <p:cNvPr id="53" name="Shape 49"/>
           <p:cNvSpPr/>
           <p:nvPr/>
         </p:nvSpPr>
         <p:spPr>
           <a:xfrm>
-            <a:off x="640080" y="4233672"/>
-            <a:ext cx="228600" cy="329184"/>
+            <a:off x="640080" y="4151376"/>
+            <a:ext cx="228600" cy="310896"/>
           </a:xfrm>
           <a:prstGeom prst="rect">
             <a:avLst/>
@@ -39994,14 +39943,14 @@
       </p:sp>
       <p:sp>
         <p:nvSpPr>
-          <p:cNvPr id="50" name="Text 47"/>
-          <p:cNvSpPr txBox="1"/>
-          <p:nvPr/>
-        </p:nvSpPr>
-        <p:spPr>
-          <a:xfrm>
-            <a:off x="630936" y="4005072"/>
-            <a:ext cx="246888" cy="182880"/>
+          <p:cNvPr id="54" name="Text 50"/>
+          <p:cNvSpPr txBox="1"/>
+          <p:nvPr/>
+        </p:nvSpPr>
+        <p:spPr>
+          <a:xfrm>
+            <a:off x="630936" y="3959352"/>
+            <a:ext cx="246888" cy="164592"/>
           </a:xfrm>
           <a:prstGeom prst="rect">
             <a:avLst/>
@@ -40036,14 +39985,14 @@
       </p:sp>
       <p:sp>
         <p:nvSpPr>
-          <p:cNvPr id="51" name="Shape 48"/>
+          <p:cNvPr id="55" name="Shape 51"/>
           <p:cNvSpPr/>
           <p:nvPr/>
         </p:nvSpPr>
         <p:spPr>
           <a:xfrm>
-            <a:off x="886968" y="4233672"/>
-            <a:ext cx="228600" cy="329184"/>
+            <a:off x="886968" y="4151376"/>
+            <a:ext cx="228600" cy="310896"/>
           </a:xfrm>
           <a:prstGeom prst="rect">
             <a:avLst/>
@@ -40061,14 +40010,14 @@
       </p:sp>
       <p:sp>
         <p:nvSpPr>
-          <p:cNvPr id="52" name="Shape 49"/>
+          <p:cNvPr id="56" name="Shape 52"/>
           <p:cNvSpPr/>
           <p:nvPr/>
         </p:nvSpPr>
         <p:spPr>
           <a:xfrm>
-            <a:off x="1133856" y="4233672"/>
-            <a:ext cx="228600" cy="329184"/>
+            <a:off x="1133856" y="4151376"/>
+            <a:ext cx="228600" cy="310896"/>
           </a:xfrm>
           <a:prstGeom prst="rect">
             <a:avLst/>
@@ -40086,14 +40035,14 @@
       </p:sp>
       <p:sp>
         <p:nvSpPr>
-          <p:cNvPr id="53" name="Shape 50"/>
+          <p:cNvPr id="57" name="Shape 53"/>
           <p:cNvSpPr/>
           <p:nvPr/>
         </p:nvSpPr>
         <p:spPr>
           <a:xfrm>
-            <a:off x="1380744" y="4233672"/>
-            <a:ext cx="228600" cy="329184"/>
+            <a:off x="1380744" y="4151376"/>
+            <a:ext cx="228600" cy="310896"/>
           </a:xfrm>
           <a:prstGeom prst="rect">
             <a:avLst/>
@@ -40111,14 +40060,14 @@
       </p:sp>
       <p:sp>
         <p:nvSpPr>
-          <p:cNvPr id="54" name="Shape 51"/>
+          <p:cNvPr id="58" name="Shape 54"/>
           <p:cNvSpPr/>
           <p:nvPr/>
         </p:nvSpPr>
         <p:spPr>
           <a:xfrm>
-            <a:off x="1627632" y="4233672"/>
-            <a:ext cx="228600" cy="329184"/>
+            <a:off x="1627632" y="4151376"/>
+            <a:ext cx="228600" cy="310896"/>
           </a:xfrm>
           <a:prstGeom prst="rect">
             <a:avLst/>
@@ -40136,14 +40085,14 @@
       </p:sp>
       <p:sp>
         <p:nvSpPr>
-          <p:cNvPr id="55" name="Text 52"/>
-          <p:cNvSpPr txBox="1"/>
-          <p:nvPr/>
-        </p:nvSpPr>
-        <p:spPr>
-          <a:xfrm>
-            <a:off x="1618488" y="4224528"/>
-            <a:ext cx="246888" cy="347472"/>
+          <p:cNvPr id="59" name="Text 55"/>
+          <p:cNvSpPr txBox="1"/>
+          <p:nvPr/>
+        </p:nvSpPr>
+        <p:spPr>
+          <a:xfrm>
+            <a:off x="1618488" y="4142232"/>
+            <a:ext cx="246888" cy="329184"/>
           </a:xfrm>
           <a:prstGeom prst="rect">
             <a:avLst/>
@@ -40178,14 +40127,14 @@
       </p:sp>
       <p:sp>
         <p:nvSpPr>
-          <p:cNvPr id="56" name="Text 53"/>
-          <p:cNvSpPr txBox="1"/>
-          <p:nvPr/>
-        </p:nvSpPr>
-        <p:spPr>
-          <a:xfrm>
-            <a:off x="1618488" y="4005072"/>
-            <a:ext cx="246888" cy="182880"/>
+          <p:cNvPr id="60" name="Text 56"/>
+          <p:cNvSpPr txBox="1"/>
+          <p:nvPr/>
+        </p:nvSpPr>
+        <p:spPr>
+          <a:xfrm>
+            <a:off x="1618488" y="3959352"/>
+            <a:ext cx="246888" cy="164592"/>
           </a:xfrm>
           <a:prstGeom prst="rect">
             <a:avLst/>
@@ -40220,14 +40169,14 @@
       </p:sp>
       <p:sp>
         <p:nvSpPr>
-          <p:cNvPr id="57" name="Shape 54"/>
+          <p:cNvPr id="61" name="Shape 57"/>
           <p:cNvSpPr/>
           <p:nvPr/>
         </p:nvSpPr>
         <p:spPr>
           <a:xfrm>
-            <a:off x="1874520" y="4233672"/>
-            <a:ext cx="228600" cy="329184"/>
+            <a:off x="1874520" y="4151376"/>
+            <a:ext cx="228600" cy="310896"/>
           </a:xfrm>
           <a:prstGeom prst="rect">
             <a:avLst/>
@@ -40245,14 +40194,14 @@
       </p:sp>
       <p:sp>
         <p:nvSpPr>
-          <p:cNvPr id="58" name="Text 55"/>
-          <p:cNvSpPr txBox="1"/>
-          <p:nvPr/>
-        </p:nvSpPr>
-        <p:spPr>
-          <a:xfrm>
-            <a:off x="1865376" y="4224528"/>
-            <a:ext cx="246888" cy="347472"/>
+          <p:cNvPr id="62" name="Text 58"/>
+          <p:cNvSpPr txBox="1"/>
+          <p:nvPr/>
+        </p:nvSpPr>
+        <p:spPr>
+          <a:xfrm>
+            <a:off x="1865376" y="4142232"/>
+            <a:ext cx="246888" cy="329184"/>
           </a:xfrm>
           <a:prstGeom prst="rect">
             <a:avLst/>
@@ -40287,14 +40236,14 @@
       </p:sp>
       <p:sp>
         <p:nvSpPr>
-          <p:cNvPr id="59" name="Shape 56"/>
+          <p:cNvPr id="63" name="Shape 59"/>
           <p:cNvSpPr/>
           <p:nvPr/>
         </p:nvSpPr>
         <p:spPr>
           <a:xfrm>
-            <a:off x="2121408" y="4233672"/>
-            <a:ext cx="228600" cy="329184"/>
+            <a:off x="2121408" y="4151376"/>
+            <a:ext cx="228600" cy="310896"/>
           </a:xfrm>
           <a:prstGeom prst="rect">
             <a:avLst/>
@@ -40312,14 +40261,14 @@
       </p:sp>
       <p:sp>
         <p:nvSpPr>
-          <p:cNvPr id="60" name="Text 57"/>
-          <p:cNvSpPr txBox="1"/>
-          <p:nvPr/>
-        </p:nvSpPr>
-        <p:spPr>
-          <a:xfrm>
-            <a:off x="2112264" y="4224528"/>
-            <a:ext cx="246888" cy="347472"/>
+          <p:cNvPr id="64" name="Text 60"/>
+          <p:cNvSpPr txBox="1"/>
+          <p:nvPr/>
+        </p:nvSpPr>
+        <p:spPr>
+          <a:xfrm>
+            <a:off x="2112264" y="4142232"/>
+            <a:ext cx="246888" cy="329184"/>
           </a:xfrm>
           <a:prstGeom prst="rect">
             <a:avLst/>
@@ -40354,14 +40303,14 @@
       </p:sp>
       <p:sp>
         <p:nvSpPr>
-          <p:cNvPr id="61" name="Shape 58"/>
+          <p:cNvPr id="65" name="Shape 61"/>
           <p:cNvSpPr/>
           <p:nvPr/>
         </p:nvSpPr>
         <p:spPr>
           <a:xfrm>
-            <a:off x="2368296" y="4233672"/>
-            <a:ext cx="228600" cy="329184"/>
+            <a:off x="2368296" y="4151376"/>
+            <a:ext cx="228600" cy="310896"/>
           </a:xfrm>
           <a:prstGeom prst="rect">
             <a:avLst/>
@@ -40379,14 +40328,14 @@
       </p:sp>
       <p:sp>
         <p:nvSpPr>
-          <p:cNvPr id="62" name="Text 59"/>
-          <p:cNvSpPr txBox="1"/>
-          <p:nvPr/>
-        </p:nvSpPr>
-        <p:spPr>
-          <a:xfrm>
-            <a:off x="2359152" y="4224528"/>
-            <a:ext cx="246888" cy="347472"/>
+          <p:cNvPr id="66" name="Text 62"/>
+          <p:cNvSpPr txBox="1"/>
+          <p:nvPr/>
+        </p:nvSpPr>
+        <p:spPr>
+          <a:xfrm>
+            <a:off x="2359152" y="4142232"/>
+            <a:ext cx="246888" cy="329184"/>
           </a:xfrm>
           <a:prstGeom prst="rect">
             <a:avLst/>
@@ -40421,14 +40370,14 @@
       </p:sp>
       <p:sp>
         <p:nvSpPr>
-          <p:cNvPr id="63" name="Shape 60"/>
+          <p:cNvPr id="67" name="Shape 63"/>
           <p:cNvSpPr/>
           <p:nvPr/>
         </p:nvSpPr>
         <p:spPr>
           <a:xfrm>
-            <a:off x="2615184" y="4233672"/>
-            <a:ext cx="228600" cy="329184"/>
+            <a:off x="2615184" y="4151376"/>
+            <a:ext cx="228600" cy="310896"/>
           </a:xfrm>
           <a:prstGeom prst="rect">
             <a:avLst/>
@@ -40446,14 +40395,14 @@
       </p:sp>
       <p:sp>
         <p:nvSpPr>
-          <p:cNvPr id="64" name="Text 61"/>
-          <p:cNvSpPr txBox="1"/>
-          <p:nvPr/>
-        </p:nvSpPr>
-        <p:spPr>
-          <a:xfrm>
-            <a:off x="2606040" y="4224528"/>
-            <a:ext cx="246888" cy="347472"/>
+          <p:cNvPr id="68" name="Text 64"/>
+          <p:cNvSpPr txBox="1"/>
+          <p:nvPr/>
+        </p:nvSpPr>
+        <p:spPr>
+          <a:xfrm>
+            <a:off x="2606040" y="4142232"/>
+            <a:ext cx="246888" cy="329184"/>
           </a:xfrm>
           <a:prstGeom prst="rect">
             <a:avLst/>
@@ -40488,14 +40437,14 @@
       </p:sp>
       <p:sp>
         <p:nvSpPr>
-          <p:cNvPr id="65" name="Shape 62"/>
+          <p:cNvPr id="69" name="Shape 65"/>
           <p:cNvSpPr/>
           <p:nvPr/>
         </p:nvSpPr>
         <p:spPr>
           <a:xfrm>
-            <a:off x="2862072" y="4233672"/>
-            <a:ext cx="228600" cy="329184"/>
+            <a:off x="2862072" y="4151376"/>
+            <a:ext cx="228600" cy="310896"/>
           </a:xfrm>
           <a:prstGeom prst="rect">
             <a:avLst/>
@@ -40513,14 +40462,14 @@
       </p:sp>
       <p:sp>
         <p:nvSpPr>
-          <p:cNvPr id="66" name="Text 63"/>
-          <p:cNvSpPr txBox="1"/>
-          <p:nvPr/>
-        </p:nvSpPr>
-        <p:spPr>
-          <a:xfrm>
-            <a:off x="2852928" y="4224528"/>
-            <a:ext cx="246888" cy="347472"/>
+          <p:cNvPr id="70" name="Text 66"/>
+          <p:cNvSpPr txBox="1"/>
+          <p:nvPr/>
+        </p:nvSpPr>
+        <p:spPr>
+          <a:xfrm>
+            <a:off x="2852928" y="4142232"/>
+            <a:ext cx="246888" cy="329184"/>
           </a:xfrm>
           <a:prstGeom prst="rect">
             <a:avLst/>
@@ -40555,14 +40504,14 @@
       </p:sp>
       <p:sp>
         <p:nvSpPr>
-          <p:cNvPr id="67" name="Shape 64"/>
+          <p:cNvPr id="71" name="Shape 67"/>
           <p:cNvSpPr/>
           <p:nvPr/>
         </p:nvSpPr>
         <p:spPr>
           <a:xfrm>
-            <a:off x="3108960" y="4233672"/>
-            <a:ext cx="228600" cy="329184"/>
+            <a:off x="3108960" y="4151376"/>
+            <a:ext cx="228600" cy="310896"/>
           </a:xfrm>
           <a:prstGeom prst="rect">
             <a:avLst/>
@@ -40580,14 +40529,14 @@
       </p:sp>
       <p:sp>
         <p:nvSpPr>
-          <p:cNvPr id="68" name="Text 65"/>
-          <p:cNvSpPr txBox="1"/>
-          <p:nvPr/>
-        </p:nvSpPr>
-        <p:spPr>
-          <a:xfrm>
-            <a:off x="3099816" y="4224528"/>
-            <a:ext cx="246888" cy="347472"/>
+          <p:cNvPr id="72" name="Text 68"/>
+          <p:cNvSpPr txBox="1"/>
+          <p:nvPr/>
+        </p:nvSpPr>
+        <p:spPr>
+          <a:xfrm>
+            <a:off x="3099816" y="4142232"/>
+            <a:ext cx="246888" cy="329184"/>
           </a:xfrm>
           <a:prstGeom prst="rect">
             <a:avLst/>
@@ -40622,14 +40571,14 @@
       </p:sp>
       <p:sp>
         <p:nvSpPr>
-          <p:cNvPr id="69" name="Shape 66"/>
+          <p:cNvPr id="73" name="Shape 69"/>
           <p:cNvSpPr/>
           <p:nvPr/>
         </p:nvSpPr>
         <p:spPr>
           <a:xfrm>
-            <a:off x="3355848" y="4233672"/>
-            <a:ext cx="228600" cy="329184"/>
+            <a:off x="3355848" y="4151376"/>
+            <a:ext cx="228600" cy="310896"/>
           </a:xfrm>
           <a:prstGeom prst="rect">
             <a:avLst/>
@@ -40647,14 +40596,14 @@
       </p:sp>
       <p:sp>
         <p:nvSpPr>
-          <p:cNvPr id="70" name="Shape 67"/>
+          <p:cNvPr id="74" name="Shape 70"/>
           <p:cNvSpPr/>
           <p:nvPr/>
         </p:nvSpPr>
         <p:spPr>
           <a:xfrm>
-            <a:off x="3602736" y="4233672"/>
-            <a:ext cx="228600" cy="329184"/>
+            <a:off x="3602736" y="4151376"/>
+            <a:ext cx="228600" cy="310896"/>
           </a:xfrm>
           <a:prstGeom prst="rect">
             <a:avLst/>
@@ -40672,14 +40621,14 @@
       </p:sp>
       <p:sp>
         <p:nvSpPr>
-          <p:cNvPr id="71" name="Text 68"/>
-          <p:cNvSpPr txBox="1"/>
-          <p:nvPr/>
-        </p:nvSpPr>
-        <p:spPr>
-          <a:xfrm>
-            <a:off x="3593592" y="4224528"/>
-            <a:ext cx="246888" cy="347472"/>
+          <p:cNvPr id="75" name="Text 71"/>
+          <p:cNvSpPr txBox="1"/>
+          <p:nvPr/>
+        </p:nvSpPr>
+        <p:spPr>
+          <a:xfrm>
+            <a:off x="3593592" y="4142232"/>
+            <a:ext cx="246888" cy="329184"/>
           </a:xfrm>
           <a:prstGeom prst="rect">
             <a:avLst/>
@@ -40714,14 +40663,14 @@
       </p:sp>
       <p:sp>
         <p:nvSpPr>
-          <p:cNvPr id="72" name="Shape 69"/>
+          <p:cNvPr id="76" name="Shape 72"/>
           <p:cNvSpPr/>
           <p:nvPr/>
         </p:nvSpPr>
         <p:spPr>
           <a:xfrm>
-            <a:off x="3849624" y="4233672"/>
-            <a:ext cx="228600" cy="329184"/>
+            <a:off x="3849624" y="4151376"/>
+            <a:ext cx="228600" cy="310896"/>
           </a:xfrm>
           <a:prstGeom prst="rect">
             <a:avLst/>
@@ -40739,14 +40688,14 @@
       </p:sp>
       <p:sp>
         <p:nvSpPr>
-          <p:cNvPr id="73" name="Text 70"/>
-          <p:cNvSpPr txBox="1"/>
-          <p:nvPr/>
-        </p:nvSpPr>
-        <p:spPr>
-          <a:xfrm>
-            <a:off x="3840480" y="4224528"/>
-            <a:ext cx="246888" cy="347472"/>
+          <p:cNvPr id="77" name="Text 73"/>
+          <p:cNvSpPr txBox="1"/>
+          <p:nvPr/>
+        </p:nvSpPr>
+        <p:spPr>
+          <a:xfrm>
+            <a:off x="3840480" y="4142232"/>
+            <a:ext cx="246888" cy="329184"/>
           </a:xfrm>
           <a:prstGeom prst="rect">
             <a:avLst/>
@@ -40781,14 +40730,14 @@
       </p:sp>
       <p:sp>
         <p:nvSpPr>
-          <p:cNvPr id="74" name="Shape 71"/>
+          <p:cNvPr id="78" name="Shape 74"/>
           <p:cNvSpPr/>
           <p:nvPr/>
         </p:nvSpPr>
         <p:spPr>
           <a:xfrm>
-            <a:off x="4096512" y="4233672"/>
-            <a:ext cx="228600" cy="329184"/>
+            <a:off x="4096512" y="4151376"/>
+            <a:ext cx="228600" cy="310896"/>
           </a:xfrm>
           <a:prstGeom prst="rect">
             <a:avLst/>
@@ -40806,14 +40755,14 @@
       </p:sp>
       <p:sp>
         <p:nvSpPr>
-          <p:cNvPr id="75" name="Text 72"/>
-          <p:cNvSpPr txBox="1"/>
-          <p:nvPr/>
-        </p:nvSpPr>
-        <p:spPr>
-          <a:xfrm>
-            <a:off x="4087368" y="4224528"/>
-            <a:ext cx="246888" cy="347472"/>
+          <p:cNvPr id="79" name="Text 75"/>
+          <p:cNvSpPr txBox="1"/>
+          <p:nvPr/>
+        </p:nvSpPr>
+        <p:spPr>
+          <a:xfrm>
+            <a:off x="4087368" y="4142232"/>
+            <a:ext cx="246888" cy="329184"/>
           </a:xfrm>
           <a:prstGeom prst="rect">
             <a:avLst/>
@@ -40848,14 +40797,14 @@
       </p:sp>
       <p:sp>
         <p:nvSpPr>
-          <p:cNvPr id="76" name="Shape 73"/>
+          <p:cNvPr id="80" name="Shape 76"/>
           <p:cNvSpPr/>
           <p:nvPr/>
         </p:nvSpPr>
         <p:spPr>
           <a:xfrm>
-            <a:off x="4343400" y="4233672"/>
-            <a:ext cx="228600" cy="329184"/>
+            <a:off x="4343400" y="4151376"/>
+            <a:ext cx="228600" cy="310896"/>
           </a:xfrm>
           <a:prstGeom prst="rect">
             <a:avLst/>
@@ -40873,14 +40822,14 @@
       </p:sp>
       <p:sp>
         <p:nvSpPr>
-          <p:cNvPr id="77" name="Text 74"/>
-          <p:cNvSpPr txBox="1"/>
-          <p:nvPr/>
-        </p:nvSpPr>
-        <p:spPr>
-          <a:xfrm>
-            <a:off x="4334256" y="4224528"/>
-            <a:ext cx="246888" cy="347472"/>
+          <p:cNvPr id="81" name="Text 77"/>
+          <p:cNvSpPr txBox="1"/>
+          <p:nvPr/>
+        </p:nvSpPr>
+        <p:spPr>
+          <a:xfrm>
+            <a:off x="4334256" y="4142232"/>
+            <a:ext cx="246888" cy="329184"/>
           </a:xfrm>
           <a:prstGeom prst="rect">
             <a:avLst/>
@@ -40915,14 +40864,14 @@
       </p:sp>
       <p:sp>
         <p:nvSpPr>
-          <p:cNvPr id="78" name="Text 75"/>
-          <p:cNvSpPr txBox="1"/>
-          <p:nvPr/>
-        </p:nvSpPr>
-        <p:spPr>
-          <a:xfrm>
-            <a:off x="4334256" y="4005072"/>
-            <a:ext cx="246888" cy="182880"/>
+          <p:cNvPr id="82" name="Text 78"/>
+          <p:cNvSpPr txBox="1"/>
+          <p:nvPr/>
+        </p:nvSpPr>
+        <p:spPr>
+          <a:xfrm>
+            <a:off x="4334256" y="3959352"/>
+            <a:ext cx="246888" cy="164592"/>
           </a:xfrm>
           <a:prstGeom prst="rect">
             <a:avLst/>
@@ -40957,14 +40906,14 @@
       </p:sp>
       <p:sp>
         <p:nvSpPr>
-          <p:cNvPr id="79" name="Shape 76"/>
+          <p:cNvPr id="83" name="Shape 79"/>
           <p:cNvSpPr/>
           <p:nvPr/>
         </p:nvSpPr>
         <p:spPr>
           <a:xfrm>
-            <a:off x="4608576" y="4233672"/>
-            <a:ext cx="228600" cy="329184"/>
+            <a:off x="4608576" y="4151376"/>
+            <a:ext cx="228600" cy="310896"/>
           </a:xfrm>
           <a:prstGeom prst="roundRect">
             <a:avLst>
@@ -40984,14 +40933,14 @@
       </p:sp>
       <p:sp>
         <p:nvSpPr>
-          <p:cNvPr id="80" name="Text 77"/>
-          <p:cNvSpPr txBox="1"/>
-          <p:nvPr/>
-        </p:nvSpPr>
-        <p:spPr>
-          <a:xfrm>
-            <a:off x="4581144" y="4224528"/>
-            <a:ext cx="246888" cy="347472"/>
+          <p:cNvPr id="84" name="Text 80"/>
+          <p:cNvSpPr txBox="1"/>
+          <p:nvPr/>
+        </p:nvSpPr>
+        <p:spPr>
+          <a:xfrm>
+            <a:off x="4581144" y="4142232"/>
+            <a:ext cx="246888" cy="329184"/>
           </a:xfrm>
           <a:prstGeom prst="rect">
             <a:avLst/>
@@ -41021,48 +40970,6 @@
               <a:t>t</a:t>
             </a:r>
             <a:endParaRPr lang="en-US" sz="1200" dirty="0"/>
-          </a:p>
-        </p:txBody>
-      </p:sp>
-      <p:sp>
-        <p:nvSpPr>
-          <p:cNvPr id="81" name="Text 78"/>
-          <p:cNvSpPr txBox="1"/>
-          <p:nvPr/>
-        </p:nvSpPr>
-        <p:spPr>
-          <a:xfrm>
-            <a:off x="630936" y="4626864"/>
-            <a:ext cx="4251960" cy="237744"/>
-          </a:xfrm>
-          <a:prstGeom prst="rect">
-            <a:avLst/>
-          </a:prstGeom>
-          <a:noFill/>
-          <a:ln/>
-        </p:spPr>
-        <p:txBody>
-          <a:bodyPr wrap="square" lIns="0" tIns="0" rIns="0" bIns="0" rtlCol="0" anchor="ctr"/>
-          <a:lstStyle/>
-          <a:p>
-            <a:pPr algn="l" indent="0" marL="0">
-              <a:lnSpc>
-                <a:spcPct val="115000"/>
-              </a:lnSpc>
-              <a:buNone/>
-            </a:pPr>
-            <a:r>
-              <a:rPr lang="en-US" sz="1150" dirty="0">
-                <a:solidFill>
-                  <a:srgbClr val="E5484D"/>
-                </a:solidFill>
-                <a:latin typeface="微软雅黑" pitchFamily="34" charset="0"/>
-                <a:ea typeface="微软雅黑" pitchFamily="34" charset="-122"/>
-                <a:cs typeface="微软雅黑" pitchFamily="34" charset="-120"/>
-              </a:rPr>
-              <a:t>第 16 格不存在 → t 看不见</a:t>
-            </a:r>
-            <a:endParaRPr lang="en-US" sz="1150" dirty="0"/>
           </a:p>
         </p:txBody>
       </p:sp>
@@ -41271,7 +41178,7 @@
         <p:spPr>
           <a:xfrm>
             <a:off x="411480" y="1234440"/>
-            <a:ext cx="4663440" cy="3337560"/>
+            <a:ext cx="4389120" cy="3337560"/>
           </a:xfrm>
           <a:prstGeom prst="roundRect">
             <a:avLst>
@@ -41305,8 +41212,8 @@
         </p:blipFill>
         <p:spPr>
           <a:xfrm>
-            <a:off x="521208" y="1534161"/>
-            <a:ext cx="4443984" cy="2463797"/>
+            <a:off x="521208" y="1610205"/>
+            <a:ext cx="4169664" cy="2311711"/>
           </a:xfrm>
           <a:prstGeom prst="rect">
             <a:avLst/>
@@ -41322,7 +41229,7 @@
         <p:spPr>
           <a:xfrm>
             <a:off x="521208" y="4224528"/>
-            <a:ext cx="4443984" cy="237744"/>
+            <a:ext cx="4169664" cy="237744"/>
           </a:xfrm>
           <a:prstGeom prst="rect">
             <a:avLst/>
@@ -41363,8 +41270,8 @@
         </p:nvSpPr>
         <p:spPr>
           <a:xfrm>
-            <a:off x="5349240" y="1234440"/>
-            <a:ext cx="3383280" cy="274320"/>
+            <a:off x="5074920" y="1234440"/>
+            <a:ext cx="3657600" cy="274320"/>
           </a:xfrm>
           <a:prstGeom prst="rect">
             <a:avLst/>
@@ -41405,12 +41312,12 @@
         </p:nvSpPr>
         <p:spPr>
           <a:xfrm>
-            <a:off x="5394960" y="1645920"/>
-            <a:ext cx="3291840" cy="950976"/>
+            <a:off x="5120640" y="1600200"/>
+            <a:ext cx="3566160" cy="841248"/>
           </a:xfrm>
           <a:prstGeom prst="roundRect">
             <a:avLst>
-              <a:gd name="adj" fmla="val 5769"/>
+              <a:gd name="adj" fmla="val 6522"/>
             </a:avLst>
           </a:prstGeom>
           <a:solidFill>
@@ -41432,8 +41339,8 @@
         </p:nvSpPr>
         <p:spPr>
           <a:xfrm>
-            <a:off x="5497373" y="1748333"/>
-            <a:ext cx="172364" cy="362102"/>
+            <a:off x="5223053" y="1702613"/>
+            <a:ext cx="189509" cy="307238"/>
           </a:xfrm>
           <a:prstGeom prst="rect">
             <a:avLst/>
@@ -41457,8 +41364,8 @@
         </p:nvSpPr>
         <p:spPr>
           <a:xfrm>
-            <a:off x="5486400" y="1737360"/>
-            <a:ext cx="194310" cy="384048"/>
+            <a:off x="5212080" y="1691640"/>
+            <a:ext cx="211455" cy="329184"/>
           </a:xfrm>
           <a:prstGeom prst="rect">
             <a:avLst/>
@@ -41499,8 +41406,8 @@
         </p:nvSpPr>
         <p:spPr>
           <a:xfrm>
-            <a:off x="5691683" y="1748333"/>
-            <a:ext cx="172364" cy="362102"/>
+            <a:off x="5434508" y="1702613"/>
+            <a:ext cx="189509" cy="307238"/>
           </a:xfrm>
           <a:prstGeom prst="rect">
             <a:avLst/>
@@ -41524,8 +41431,8 @@
         </p:nvSpPr>
         <p:spPr>
           <a:xfrm>
-            <a:off x="5680710" y="1737360"/>
-            <a:ext cx="194310" cy="384048"/>
+            <a:off x="5423535" y="1691640"/>
+            <a:ext cx="211455" cy="329184"/>
           </a:xfrm>
           <a:prstGeom prst="rect">
             <a:avLst/>
@@ -41566,8 +41473,8 @@
         </p:nvSpPr>
         <p:spPr>
           <a:xfrm>
-            <a:off x="5885993" y="1748333"/>
-            <a:ext cx="172364" cy="362102"/>
+            <a:off x="5645963" y="1702613"/>
+            <a:ext cx="189509" cy="307238"/>
           </a:xfrm>
           <a:prstGeom prst="rect">
             <a:avLst/>
@@ -41591,8 +41498,8 @@
         </p:nvSpPr>
         <p:spPr>
           <a:xfrm>
-            <a:off x="5875020" y="1737360"/>
-            <a:ext cx="194310" cy="384048"/>
+            <a:off x="5634990" y="1691640"/>
+            <a:ext cx="211455" cy="329184"/>
           </a:xfrm>
           <a:prstGeom prst="rect">
             <a:avLst/>
@@ -41633,8 +41540,8 @@
         </p:nvSpPr>
         <p:spPr>
           <a:xfrm>
-            <a:off x="6080303" y="1748333"/>
-            <a:ext cx="172364" cy="362102"/>
+            <a:off x="5857418" y="1702613"/>
+            <a:ext cx="189509" cy="307238"/>
           </a:xfrm>
           <a:prstGeom prst="rect">
             <a:avLst/>
@@ -41658,8 +41565,8 @@
         </p:nvSpPr>
         <p:spPr>
           <a:xfrm>
-            <a:off x="6069330" y="1737360"/>
-            <a:ext cx="194310" cy="384048"/>
+            <a:off x="5846445" y="1691640"/>
+            <a:ext cx="211455" cy="329184"/>
           </a:xfrm>
           <a:prstGeom prst="rect">
             <a:avLst/>
@@ -41700,8 +41607,8 @@
         </p:nvSpPr>
         <p:spPr>
           <a:xfrm>
-            <a:off x="6274613" y="1748333"/>
-            <a:ext cx="172364" cy="362102"/>
+            <a:off x="6068873" y="1702613"/>
+            <a:ext cx="189509" cy="307238"/>
           </a:xfrm>
           <a:prstGeom prst="rect">
             <a:avLst/>
@@ -41725,8 +41632,8 @@
         </p:nvSpPr>
         <p:spPr>
           <a:xfrm>
-            <a:off x="6263640" y="1737360"/>
-            <a:ext cx="194310" cy="384048"/>
+            <a:off x="6057900" y="1691640"/>
+            <a:ext cx="211455" cy="329184"/>
           </a:xfrm>
           <a:prstGeom prst="rect">
             <a:avLst/>
@@ -41767,8 +41674,8 @@
         </p:nvSpPr>
         <p:spPr>
           <a:xfrm>
-            <a:off x="6468923" y="1748333"/>
-            <a:ext cx="172364" cy="362102"/>
+            <a:off x="6280328" y="1702613"/>
+            <a:ext cx="189509" cy="307238"/>
           </a:xfrm>
           <a:prstGeom prst="rect">
             <a:avLst/>
@@ -41792,8 +41699,8 @@
         </p:nvSpPr>
         <p:spPr>
           <a:xfrm>
-            <a:off x="6663233" y="1748333"/>
-            <a:ext cx="172364" cy="362102"/>
+            <a:off x="6491783" y="1702613"/>
+            <a:ext cx="189509" cy="307238"/>
           </a:xfrm>
           <a:prstGeom prst="rect">
             <a:avLst/>
@@ -41817,8 +41724,8 @@
         </p:nvSpPr>
         <p:spPr>
           <a:xfrm>
-            <a:off x="6652260" y="1737360"/>
-            <a:ext cx="194310" cy="384048"/>
+            <a:off x="6480810" y="1691640"/>
+            <a:ext cx="211455" cy="329184"/>
           </a:xfrm>
           <a:prstGeom prst="rect">
             <a:avLst/>
@@ -41859,8 +41766,8 @@
         </p:nvSpPr>
         <p:spPr>
           <a:xfrm>
-            <a:off x="6857543" y="1748333"/>
-            <a:ext cx="172364" cy="362102"/>
+            <a:off x="6703238" y="1702613"/>
+            <a:ext cx="189509" cy="307238"/>
           </a:xfrm>
           <a:prstGeom prst="rect">
             <a:avLst/>
@@ -41884,8 +41791,8 @@
         </p:nvSpPr>
         <p:spPr>
           <a:xfrm>
-            <a:off x="6846570" y="1737360"/>
-            <a:ext cx="194310" cy="384048"/>
+            <a:off x="6692265" y="1691640"/>
+            <a:ext cx="211455" cy="329184"/>
           </a:xfrm>
           <a:prstGeom prst="rect">
             <a:avLst/>
@@ -41926,8 +41833,8 @@
         </p:nvSpPr>
         <p:spPr>
           <a:xfrm>
-            <a:off x="7051853" y="1748333"/>
-            <a:ext cx="172364" cy="362102"/>
+            <a:off x="6914693" y="1702613"/>
+            <a:ext cx="189509" cy="307238"/>
           </a:xfrm>
           <a:prstGeom prst="rect">
             <a:avLst/>
@@ -41951,8 +41858,8 @@
         </p:nvSpPr>
         <p:spPr>
           <a:xfrm>
-            <a:off x="7040880" y="1737360"/>
-            <a:ext cx="194310" cy="384048"/>
+            <a:off x="6903720" y="1691640"/>
+            <a:ext cx="211455" cy="329184"/>
           </a:xfrm>
           <a:prstGeom prst="rect">
             <a:avLst/>
@@ -41993,8 +41900,8 @@
         </p:nvSpPr>
         <p:spPr>
           <a:xfrm>
-            <a:off x="7246163" y="1748333"/>
-            <a:ext cx="172364" cy="362102"/>
+            <a:off x="7126148" y="1702613"/>
+            <a:ext cx="189509" cy="307238"/>
           </a:xfrm>
           <a:prstGeom prst="rect">
             <a:avLst/>
@@ -42018,8 +41925,8 @@
         </p:nvSpPr>
         <p:spPr>
           <a:xfrm>
-            <a:off x="7235190" y="1737360"/>
-            <a:ext cx="194310" cy="384048"/>
+            <a:off x="7115175" y="1691640"/>
+            <a:ext cx="211455" cy="329184"/>
           </a:xfrm>
           <a:prstGeom prst="rect">
             <a:avLst/>
@@ -42060,8 +41967,8 @@
         </p:nvSpPr>
         <p:spPr>
           <a:xfrm>
-            <a:off x="7440473" y="1748333"/>
-            <a:ext cx="172364" cy="362102"/>
+            <a:off x="7337603" y="1702613"/>
+            <a:ext cx="189509" cy="307238"/>
           </a:xfrm>
           <a:prstGeom prst="rect">
             <a:avLst/>
@@ -42085,8 +41992,8 @@
         </p:nvSpPr>
         <p:spPr>
           <a:xfrm>
-            <a:off x="7634783" y="1748333"/>
-            <a:ext cx="172364" cy="362102"/>
+            <a:off x="7549058" y="1702613"/>
+            <a:ext cx="189509" cy="307238"/>
           </a:xfrm>
           <a:prstGeom prst="rect">
             <a:avLst/>
@@ -42110,8 +42017,8 @@
         </p:nvSpPr>
         <p:spPr>
           <a:xfrm>
-            <a:off x="7829093" y="1748333"/>
-            <a:ext cx="172364" cy="362102"/>
+            <a:off x="7760513" y="1702613"/>
+            <a:ext cx="189509" cy="307238"/>
           </a:xfrm>
           <a:prstGeom prst="rect">
             <a:avLst/>
@@ -42135,8 +42042,8 @@
         </p:nvSpPr>
         <p:spPr>
           <a:xfrm>
-            <a:off x="8023403" y="1748333"/>
-            <a:ext cx="172364" cy="362102"/>
+            <a:off x="7971968" y="1702613"/>
+            <a:ext cx="189509" cy="307238"/>
           </a:xfrm>
           <a:prstGeom prst="rect">
             <a:avLst/>
@@ -42160,8 +42067,8 @@
         </p:nvSpPr>
         <p:spPr>
           <a:xfrm>
-            <a:off x="8217713" y="1748333"/>
-            <a:ext cx="172364" cy="362102"/>
+            <a:off x="8183423" y="1702613"/>
+            <a:ext cx="189509" cy="307238"/>
           </a:xfrm>
           <a:prstGeom prst="rect">
             <a:avLst/>
@@ -42185,8 +42092,8 @@
         </p:nvSpPr>
         <p:spPr>
           <a:xfrm>
-            <a:off x="8412023" y="1748333"/>
-            <a:ext cx="172364" cy="362102"/>
+            <a:off x="8394878" y="1702613"/>
+            <a:ext cx="189509" cy="307238"/>
           </a:xfrm>
           <a:prstGeom prst="rect">
             <a:avLst/>
@@ -42210,8 +42117,8 @@
         </p:nvSpPr>
         <p:spPr>
           <a:xfrm>
-            <a:off x="5497373" y="2132381"/>
-            <a:ext cx="172364" cy="362102"/>
+            <a:off x="5223053" y="2031797"/>
+            <a:ext cx="189509" cy="307238"/>
           </a:xfrm>
           <a:prstGeom prst="rect">
             <a:avLst/>
@@ -42235,8 +42142,8 @@
         </p:nvSpPr>
         <p:spPr>
           <a:xfrm>
-            <a:off x="5691683" y="2132381"/>
-            <a:ext cx="172364" cy="362102"/>
+            <a:off x="5434508" y="2031797"/>
+            <a:ext cx="189509" cy="307238"/>
           </a:xfrm>
           <a:prstGeom prst="rect">
             <a:avLst/>
@@ -42260,8 +42167,8 @@
         </p:nvSpPr>
         <p:spPr>
           <a:xfrm>
-            <a:off x="5885993" y="2132381"/>
-            <a:ext cx="172364" cy="362102"/>
+            <a:off x="5645963" y="2031797"/>
+            <a:ext cx="189509" cy="307238"/>
           </a:xfrm>
           <a:prstGeom prst="rect">
             <a:avLst/>
@@ -42285,8 +42192,8 @@
         </p:nvSpPr>
         <p:spPr>
           <a:xfrm>
-            <a:off x="6080303" y="2132381"/>
-            <a:ext cx="172364" cy="362102"/>
+            <a:off x="5857418" y="2031797"/>
+            <a:ext cx="189509" cy="307238"/>
           </a:xfrm>
           <a:prstGeom prst="rect">
             <a:avLst/>
@@ -42310,8 +42217,8 @@
         </p:nvSpPr>
         <p:spPr>
           <a:xfrm>
-            <a:off x="6274613" y="2132381"/>
-            <a:ext cx="172364" cy="362102"/>
+            <a:off x="6068873" y="2031797"/>
+            <a:ext cx="189509" cy="307238"/>
           </a:xfrm>
           <a:prstGeom prst="rect">
             <a:avLst/>
@@ -42335,8 +42242,8 @@
         </p:nvSpPr>
         <p:spPr>
           <a:xfrm>
-            <a:off x="6263640" y="2121408"/>
-            <a:ext cx="194310" cy="384048"/>
+            <a:off x="6057900" y="2020824"/>
+            <a:ext cx="211455" cy="329184"/>
           </a:xfrm>
           <a:prstGeom prst="rect">
             <a:avLst/>
@@ -42377,8 +42284,8 @@
         </p:nvSpPr>
         <p:spPr>
           <a:xfrm>
-            <a:off x="6468923" y="2132381"/>
-            <a:ext cx="172364" cy="362102"/>
+            <a:off x="6280328" y="2031797"/>
+            <a:ext cx="189509" cy="307238"/>
           </a:xfrm>
           <a:prstGeom prst="rect">
             <a:avLst/>
@@ -42402,8 +42309,8 @@
         </p:nvSpPr>
         <p:spPr>
           <a:xfrm>
-            <a:off x="6457950" y="2121408"/>
-            <a:ext cx="194310" cy="384048"/>
+            <a:off x="6269355" y="2020824"/>
+            <a:ext cx="211455" cy="329184"/>
           </a:xfrm>
           <a:prstGeom prst="rect">
             <a:avLst/>
@@ -42444,8 +42351,8 @@
         </p:nvSpPr>
         <p:spPr>
           <a:xfrm>
-            <a:off x="6663233" y="2132381"/>
-            <a:ext cx="172364" cy="362102"/>
+            <a:off x="6491783" y="2031797"/>
+            <a:ext cx="189509" cy="307238"/>
           </a:xfrm>
           <a:prstGeom prst="rect">
             <a:avLst/>
@@ -42469,8 +42376,8 @@
         </p:nvSpPr>
         <p:spPr>
           <a:xfrm>
-            <a:off x="6652260" y="2121408"/>
-            <a:ext cx="194310" cy="384048"/>
+            <a:off x="6480810" y="2020824"/>
+            <a:ext cx="211455" cy="329184"/>
           </a:xfrm>
           <a:prstGeom prst="rect">
             <a:avLst/>
@@ -42511,8 +42418,8 @@
         </p:nvSpPr>
         <p:spPr>
           <a:xfrm>
-            <a:off x="6857543" y="2132381"/>
-            <a:ext cx="172364" cy="362102"/>
+            <a:off x="6703238" y="2031797"/>
+            <a:ext cx="189509" cy="307238"/>
           </a:xfrm>
           <a:prstGeom prst="rect">
             <a:avLst/>
@@ -42536,8 +42443,8 @@
         </p:nvSpPr>
         <p:spPr>
           <a:xfrm>
-            <a:off x="6846570" y="2121408"/>
-            <a:ext cx="194310" cy="384048"/>
+            <a:off x="6692265" y="2020824"/>
+            <a:ext cx="211455" cy="329184"/>
           </a:xfrm>
           <a:prstGeom prst="rect">
             <a:avLst/>
@@ -42578,8 +42485,8 @@
         </p:nvSpPr>
         <p:spPr>
           <a:xfrm>
-            <a:off x="7051853" y="2132381"/>
-            <a:ext cx="172364" cy="362102"/>
+            <a:off x="6914693" y="2031797"/>
+            <a:ext cx="189509" cy="307238"/>
           </a:xfrm>
           <a:prstGeom prst="rect">
             <a:avLst/>
@@ -42603,8 +42510,8 @@
         </p:nvSpPr>
         <p:spPr>
           <a:xfrm>
-            <a:off x="7040880" y="2121408"/>
-            <a:ext cx="194310" cy="384048"/>
+            <a:off x="6903720" y="2020824"/>
+            <a:ext cx="211455" cy="329184"/>
           </a:xfrm>
           <a:prstGeom prst="rect">
             <a:avLst/>
@@ -42645,8 +42552,8 @@
         </p:nvSpPr>
         <p:spPr>
           <a:xfrm>
-            <a:off x="7246163" y="2132381"/>
-            <a:ext cx="172364" cy="362102"/>
+            <a:off x="7126148" y="2031797"/>
+            <a:ext cx="189509" cy="307238"/>
           </a:xfrm>
           <a:prstGeom prst="rect">
             <a:avLst/>
@@ -42670,8 +42577,8 @@
         </p:nvSpPr>
         <p:spPr>
           <a:xfrm>
-            <a:off x="7235190" y="2121408"/>
-            <a:ext cx="194310" cy="384048"/>
+            <a:off x="7115175" y="2020824"/>
+            <a:ext cx="211455" cy="329184"/>
           </a:xfrm>
           <a:prstGeom prst="rect">
             <a:avLst/>
@@ -42712,8 +42619,8 @@
         </p:nvSpPr>
         <p:spPr>
           <a:xfrm>
-            <a:off x="7440473" y="2132381"/>
-            <a:ext cx="172364" cy="362102"/>
+            <a:off x="7337603" y="2031797"/>
+            <a:ext cx="189509" cy="307238"/>
           </a:xfrm>
           <a:prstGeom prst="rect">
             <a:avLst/>
@@ -42737,8 +42644,8 @@
         </p:nvSpPr>
         <p:spPr>
           <a:xfrm>
-            <a:off x="7429500" y="2121408"/>
-            <a:ext cx="194310" cy="384048"/>
+            <a:off x="7326630" y="2020824"/>
+            <a:ext cx="211455" cy="329184"/>
           </a:xfrm>
           <a:prstGeom prst="rect">
             <a:avLst/>
@@ -42779,8 +42686,8 @@
         </p:nvSpPr>
         <p:spPr>
           <a:xfrm>
-            <a:off x="7634783" y="2132381"/>
-            <a:ext cx="172364" cy="362102"/>
+            <a:off x="7549058" y="2031797"/>
+            <a:ext cx="189509" cy="307238"/>
           </a:xfrm>
           <a:prstGeom prst="rect">
             <a:avLst/>
@@ -42804,8 +42711,8 @@
         </p:nvSpPr>
         <p:spPr>
           <a:xfrm>
-            <a:off x="7829093" y="2132381"/>
-            <a:ext cx="172364" cy="362102"/>
+            <a:off x="7760513" y="2031797"/>
+            <a:ext cx="189509" cy="307238"/>
           </a:xfrm>
           <a:prstGeom prst="rect">
             <a:avLst/>
@@ -42829,8 +42736,8 @@
         </p:nvSpPr>
         <p:spPr>
           <a:xfrm>
-            <a:off x="7818120" y="2121408"/>
-            <a:ext cx="194310" cy="384048"/>
+            <a:off x="7749540" y="2020824"/>
+            <a:ext cx="211455" cy="329184"/>
           </a:xfrm>
           <a:prstGeom prst="rect">
             <a:avLst/>
@@ -42871,8 +42778,8 @@
         </p:nvSpPr>
         <p:spPr>
           <a:xfrm>
-            <a:off x="8023403" y="2132381"/>
-            <a:ext cx="172364" cy="362102"/>
+            <a:off x="7971968" y="2031797"/>
+            <a:ext cx="189509" cy="307238"/>
           </a:xfrm>
           <a:prstGeom prst="rect">
             <a:avLst/>
@@ -42896,8 +42803,8 @@
         </p:nvSpPr>
         <p:spPr>
           <a:xfrm>
-            <a:off x="8012430" y="2121408"/>
-            <a:ext cx="194310" cy="384048"/>
+            <a:off x="7960995" y="2020824"/>
+            <a:ext cx="211455" cy="329184"/>
           </a:xfrm>
           <a:prstGeom prst="rect">
             <a:avLst/>
@@ -42938,8 +42845,8 @@
         </p:nvSpPr>
         <p:spPr>
           <a:xfrm>
-            <a:off x="8217713" y="2132381"/>
-            <a:ext cx="172364" cy="362102"/>
+            <a:off x="8183423" y="2031797"/>
+            <a:ext cx="189509" cy="307238"/>
           </a:xfrm>
           <a:prstGeom prst="rect">
             <a:avLst/>
@@ -42963,8 +42870,8 @@
         </p:nvSpPr>
         <p:spPr>
           <a:xfrm>
-            <a:off x="8206740" y="2121408"/>
-            <a:ext cx="194310" cy="384048"/>
+            <a:off x="8172450" y="2020824"/>
+            <a:ext cx="211455" cy="329184"/>
           </a:xfrm>
           <a:prstGeom prst="rect">
             <a:avLst/>
@@ -43005,8 +42912,8 @@
         </p:nvSpPr>
         <p:spPr>
           <a:xfrm>
-            <a:off x="8412023" y="2132381"/>
-            <a:ext cx="172364" cy="362102"/>
+            <a:off x="8394878" y="2031797"/>
+            <a:ext cx="189509" cy="307238"/>
           </a:xfrm>
           <a:prstGeom prst="rect">
             <a:avLst/>
@@ -43030,8 +42937,8 @@
         </p:nvSpPr>
         <p:spPr>
           <a:xfrm>
-            <a:off x="8401050" y="2121408"/>
-            <a:ext cx="194310" cy="384048"/>
+            <a:off x="8383905" y="2020824"/>
+            <a:ext cx="211455" cy="329184"/>
           </a:xfrm>
           <a:prstGeom prst="rect">
             <a:avLst/>
@@ -43072,12 +42979,12 @@
         </p:nvSpPr>
         <p:spPr>
           <a:xfrm>
-            <a:off x="5349240" y="2871216"/>
-            <a:ext cx="3383280" cy="1051560"/>
+            <a:off x="5074920" y="2715768"/>
+            <a:ext cx="3657600" cy="786384"/>
           </a:xfrm>
           <a:prstGeom prst="roundRect">
             <a:avLst>
-              <a:gd name="adj" fmla="val 10435"/>
+              <a:gd name="adj" fmla="val 13953"/>
             </a:avLst>
           </a:prstGeom>
           <a:solidFill>
@@ -43099,7 +43006,7 @@
         </p:nvSpPr>
         <p:spPr>
           <a:xfrm>
-            <a:off x="5495544" y="3017520"/>
+            <a:off x="5221224" y="2862072"/>
             <a:ext cx="329184" cy="329184"/>
           </a:xfrm>
           <a:prstGeom prst="ellipse">
@@ -43132,7 +43039,7 @@
         </p:blipFill>
         <p:spPr>
           <a:xfrm>
-            <a:off x="5574548" y="3096524"/>
+            <a:off x="5300228" y="2941076"/>
             <a:ext cx="171176" cy="171176"/>
           </a:xfrm>
           <a:prstGeom prst="rect">
@@ -43148,8 +43055,8 @@
         </p:nvSpPr>
         <p:spPr>
           <a:xfrm>
-            <a:off x="5952744" y="3008376"/>
-            <a:ext cx="2633472" cy="274320"/>
+            <a:off x="5678424" y="2852928"/>
+            <a:ext cx="2907792" cy="274320"/>
           </a:xfrm>
           <a:prstGeom prst="rect">
             <a:avLst/>
@@ -43190,8 +43097,8 @@
         </p:nvSpPr>
         <p:spPr>
           <a:xfrm>
-            <a:off x="5952744" y="3319272"/>
-            <a:ext cx="2633472" cy="457200"/>
+            <a:off x="5678424" y="3163824"/>
+            <a:ext cx="2907792" cy="192024"/>
           </a:xfrm>
           <a:prstGeom prst="rect">
             <a:avLst/>
@@ -43218,7 +43125,7 @@
                 <a:ea typeface="微软雅黑" pitchFamily="34" charset="-122"/>
                 <a:cs typeface="微软雅黑" pitchFamily="34" charset="-120"/>
               </a:rPr>
-              <a:t>照片里的文字来自另一版程序；我们以本页程序为准。</a:t>
+              <a:t>照片拍的是另一版程序，以本页为准。</a:t>
             </a:r>
             <a:endParaRPr lang="en-US" sz="1200" dirty="0"/>
           </a:p>
@@ -43232,12 +43139,12 @@
         </p:nvSpPr>
         <p:spPr>
           <a:xfrm>
-            <a:off x="5349240" y="4197096"/>
-            <a:ext cx="3383280" cy="374904"/>
+            <a:off x="5074920" y="3776472"/>
+            <a:ext cx="3657600" cy="795528"/>
           </a:xfrm>
           <a:prstGeom prst="roundRect">
             <a:avLst>
-              <a:gd name="adj" fmla="val 29268"/>
+              <a:gd name="adj" fmla="val 13793"/>
             </a:avLst>
           </a:prstGeom>
           <a:solidFill>
@@ -43259,7 +43166,7 @@
         </p:nvSpPr>
         <p:spPr>
           <a:xfrm>
-            <a:off x="5495544" y="4343400"/>
+            <a:off x="5221224" y="3922776"/>
             <a:ext cx="329184" cy="329184"/>
           </a:xfrm>
           <a:prstGeom prst="ellipse">
@@ -43292,7 +43199,7 @@
         </p:blipFill>
         <p:spPr>
           <a:xfrm>
-            <a:off x="5574548" y="4422404"/>
+            <a:off x="5300228" y="4001780"/>
             <a:ext cx="171176" cy="171176"/>
           </a:xfrm>
           <a:prstGeom prst="rect">
@@ -43308,17 +43215,17 @@
         </p:nvSpPr>
         <p:spPr>
           <a:xfrm>
-            <a:off x="5952744" y="4334256"/>
-            <a:ext cx="2633472" cy="91440"/>
-          </a:xfrm>
-          <a:prstGeom prst="rect">
-            <a:avLst/>
-          </a:prstGeom>
-          <a:noFill/>
-          <a:ln/>
-        </p:spPr>
-        <p:txBody>
-          <a:bodyPr wrap="square" lIns="0" tIns="0" rIns="0" bIns="0" rtlCol="0" anchor="t"/>
+            <a:off x="5678424" y="3913632"/>
+            <a:ext cx="2907792" cy="274320"/>
+          </a:xfrm>
+          <a:prstGeom prst="rect">
+            <a:avLst/>
+          </a:prstGeom>
+          <a:noFill/>
+          <a:ln/>
+        </p:spPr>
+        <p:txBody>
+          <a:bodyPr wrap="square" lIns="0" tIns="0" rIns="0" bIns="0" rtlCol="0" anchor="ctr"/>
           <a:lstStyle/>
           <a:p>
             <a:pPr algn="l" indent="0" marL="0">
@@ -43328,7 +43235,7 @@
               <a:buNone/>
             </a:pPr>
             <a:r>
-              <a:rPr lang="en-US" sz="1200" dirty="0">
+              <a:rPr lang="en-US" sz="1300" b="1" dirty="0">
                 <a:solidFill>
                   <a:srgbClr val="2D2D2D"/>
                 </a:solidFill>
@@ -43336,7 +43243,49 @@
                 <a:ea typeface="微软雅黑" pitchFamily="34" charset="-122"/>
                 <a:cs typeface="微软雅黑" pitchFamily="34" charset="-120"/>
               </a:rPr>
-              <a:t>想显示 Hello World？把第 12 行的 Word 改成 World 再上传。</a:t>
+              <a:t>想显示 Hello World？</a:t>
+            </a:r>
+            <a:endParaRPr lang="en-US" sz="1300" dirty="0"/>
+          </a:p>
+        </p:txBody>
+      </p:sp>
+      <p:sp>
+        <p:nvSpPr>
+          <p:cNvPr id="72" name="Text 66"/>
+          <p:cNvSpPr txBox="1"/>
+          <p:nvPr/>
+        </p:nvSpPr>
+        <p:spPr>
+          <a:xfrm>
+            <a:off x="5678424" y="4224528"/>
+            <a:ext cx="2907792" cy="201168"/>
+          </a:xfrm>
+          <a:prstGeom prst="rect">
+            <a:avLst/>
+          </a:prstGeom>
+          <a:noFill/>
+          <a:ln/>
+        </p:spPr>
+        <p:txBody>
+          <a:bodyPr wrap="square" lIns="0" tIns="0" rIns="0" bIns="0" rtlCol="0" anchor="t"/>
+          <a:lstStyle/>
+          <a:p>
+            <a:pPr algn="l" indent="0" marL="0">
+              <a:lnSpc>
+                <a:spcPct val="115000"/>
+              </a:lnSpc>
+              <a:buNone/>
+            </a:pPr>
+            <a:r>
+              <a:rPr lang="en-US" sz="1200" dirty="0">
+                <a:solidFill>
+                  <a:srgbClr val="2D2D2D"/>
+                </a:solidFill>
+                <a:latin typeface="微软雅黑" pitchFamily="34" charset="0"/>
+                <a:ea typeface="微软雅黑" pitchFamily="34" charset="-122"/>
+                <a:cs typeface="微软雅黑" pitchFamily="34" charset="-120"/>
+              </a:rPr>
+              <a:t>把第 12 行的 Word 改成 World 再上传。</a:t>
             </a:r>
             <a:endParaRPr lang="en-US" sz="1200" dirty="0"/>
           </a:p>
@@ -43664,12 +43613,12 @@
         </p:nvSpPr>
         <p:spPr>
           <a:xfrm>
-            <a:off x="3026664" y="1362456"/>
-            <a:ext cx="1691640" cy="1572768"/>
+            <a:off x="3255264" y="1362456"/>
+            <a:ext cx="1463040" cy="1572768"/>
           </a:xfrm>
           <a:prstGeom prst="roundRect">
             <a:avLst>
-              <a:gd name="adj" fmla="val 6977"/>
+              <a:gd name="adj" fmla="val 7500"/>
             </a:avLst>
           </a:prstGeom>
           <a:solidFill>
@@ -43699,8 +43648,8 @@
         </p:blipFill>
         <p:spPr>
           <a:xfrm>
-            <a:off x="3136392" y="1723491"/>
-            <a:ext cx="1472184" cy="612954"/>
+            <a:off x="3364992" y="1771081"/>
+            <a:ext cx="1243584" cy="517775"/>
           </a:xfrm>
           <a:prstGeom prst="rect">
             <a:avLst/>
@@ -43715,8 +43664,8 @@
         </p:nvSpPr>
         <p:spPr>
           <a:xfrm>
-            <a:off x="3136392" y="2624328"/>
-            <a:ext cx="1472184" cy="201168"/>
+            <a:off x="3364992" y="2624328"/>
+            <a:ext cx="1243584" cy="201168"/>
           </a:xfrm>
           <a:prstGeom prst="rect">
             <a:avLst/>
@@ -43757,7 +43706,7 @@
         </p:nvSpPr>
         <p:spPr>
           <a:xfrm>
-            <a:off x="576072" y="1856232"/>
+            <a:off x="576072" y="1874520"/>
             <a:ext cx="219456" cy="219456"/>
           </a:xfrm>
           <a:prstGeom prst="ellipse">
@@ -43782,7 +43731,7 @@
         </p:nvSpPr>
         <p:spPr>
           <a:xfrm>
-            <a:off x="576072" y="1856232"/>
+            <a:off x="576072" y="1874520"/>
             <a:ext cx="219456" cy="219456"/>
           </a:xfrm>
           <a:prstGeom prst="rect">
@@ -43824,8 +43773,8 @@
         </p:nvSpPr>
         <p:spPr>
           <a:xfrm>
-            <a:off x="923544" y="1847088"/>
-            <a:ext cx="1938528" cy="437388"/>
+            <a:off x="923544" y="1879473"/>
+            <a:ext cx="2167128" cy="227838"/>
           </a:xfrm>
           <a:prstGeom prst="rect">
             <a:avLst/>
@@ -43852,7 +43801,7 @@
                 <a:ea typeface="微软雅黑" pitchFamily="34" charset="-122"/>
                 <a:cs typeface="微软雅黑" pitchFamily="34" charset="-120"/>
               </a:rPr>
-              <a:t>原指南：调转接板背面的蓝色电位器</a:t>
+              <a:t>原指南：调背面的蓝色电位器</a:t>
             </a:r>
             <a:endParaRPr lang="en-US" sz="1200" dirty="0"/>
           </a:p>
@@ -43866,7 +43815,7 @@
         </p:nvSpPr>
         <p:spPr>
           <a:xfrm>
-            <a:off x="576072" y="2348484"/>
+            <a:off x="576072" y="2203704"/>
             <a:ext cx="219456" cy="219456"/>
           </a:xfrm>
           <a:prstGeom prst="ellipse">
@@ -43891,7 +43840,7 @@
         </p:nvSpPr>
         <p:spPr>
           <a:xfrm>
-            <a:off x="576072" y="2348484"/>
+            <a:off x="576072" y="2203704"/>
             <a:ext cx="219456" cy="219456"/>
           </a:xfrm>
           <a:prstGeom prst="rect">
@@ -43933,8 +43882,8 @@
         </p:nvSpPr>
         <p:spPr>
           <a:xfrm>
-            <a:off x="923544" y="2353437"/>
-            <a:ext cx="1938528" cy="227838"/>
+            <a:off x="923544" y="2208657"/>
+            <a:ext cx="2167128" cy="227838"/>
           </a:xfrm>
           <a:prstGeom prst="rect">
             <a:avLst/>
@@ -43975,7 +43924,7 @@
         </p:nvSpPr>
         <p:spPr>
           <a:xfrm>
-            <a:off x="576072" y="2641092"/>
+            <a:off x="576072" y="2532888"/>
             <a:ext cx="219456" cy="219456"/>
           </a:xfrm>
           <a:prstGeom prst="ellipse">
@@ -44000,7 +43949,7 @@
         </p:nvSpPr>
         <p:spPr>
           <a:xfrm>
-            <a:off x="576072" y="2641092"/>
+            <a:off x="576072" y="2532888"/>
             <a:ext cx="219456" cy="219456"/>
           </a:xfrm>
           <a:prstGeom prst="rect">
@@ -44042,8 +43991,8 @@
         </p:nvSpPr>
         <p:spPr>
           <a:xfrm>
-            <a:off x="923544" y="2631948"/>
-            <a:ext cx="1938528" cy="437388"/>
+            <a:off x="923544" y="2537841"/>
+            <a:ext cx="2167128" cy="227838"/>
           </a:xfrm>
           <a:prstGeom prst="rect">
             <a:avLst/>
@@ -44070,7 +44019,7 @@
                 <a:ea typeface="微软雅黑" pitchFamily="34" charset="-122"/>
                 <a:cs typeface="微软雅黑" pitchFamily="34" charset="-120"/>
               </a:rPr>
-              <a:t>满屏黑方块是转过头了，转到字清楚为止</a:t>
+              <a:t>满屏黑方块＝转过头，往回调</a:t>
             </a:r>
             <a:endParaRPr lang="en-US" sz="1200" dirty="0"/>
           </a:p>
@@ -44188,7 +44137,7 @@
                 <a:ea typeface="微软雅黑" pitchFamily="34" charset="-122"/>
                 <a:cs typeface="微软雅黑" pitchFamily="34" charset="-120"/>
               </a:rPr>
-              <a:t>只有黑方块</a:t>
+              <a:t>只有一排黑方块</a:t>
             </a:r>
             <a:endParaRPr lang="en-US" sz="1300" dirty="0"/>
           </a:p>
@@ -44230,7 +44179,7 @@
                 <a:ea typeface="微软雅黑" pitchFamily="34" charset="-122"/>
                 <a:cs typeface="微软雅黑" pitchFamily="34" charset="-120"/>
               </a:rPr>
-              <a:t>地址不对或程序没跑：先用程序①核对地址。</a:t>
+              <a:t>地址不对或程序没跑：用程序①核对地址。</a:t>
             </a:r>
             <a:endParaRPr lang="en-US" sz="1200" dirty="0"/>
           </a:p>
@@ -44348,7 +44297,7 @@
                 <a:ea typeface="微软雅黑" pitchFamily="34" charset="-122"/>
                 <a:cs typeface="微软雅黑" pitchFamily="34" charset="-120"/>
               </a:rPr>
-              <a:t>扫不到设备</a:t>
+              <a:t>扫出 0 个设备</a:t>
             </a:r>
             <a:endParaRPr lang="en-US" sz="1300" dirty="0"/>
           </a:p>
@@ -44390,7 +44339,7 @@
                 <a:ea typeface="微软雅黑" pitchFamily="34" charset="-122"/>
                 <a:cs typeface="微软雅黑" pitchFamily="34" charset="-120"/>
               </a:rPr>
-              <a:t>Found 0 device(s)：查 SDA、SCL 是否接反或松动。</a:t>
+              <a:t>查 SDA、SCL 是否接反、松动。</a:t>
             </a:r>
             <a:endParaRPr lang="en-US" sz="1200" dirty="0"/>
           </a:p>
@@ -44567,7 +44516,7 @@
                 <a:ea typeface="微软雅黑" pitchFamily="34" charset="-122"/>
                 <a:cs typeface="微软雅黑" pitchFamily="34" charset="-120"/>
               </a:rPr>
-              <a:t>显示你的名字（拼音）</a:t>
+              <a:t>显示你的名字（只能用英文字母）</a:t>
             </a:r>
             <a:endParaRPr lang="en-US" sz="1250" dirty="0"/>
           </a:p>
@@ -44717,8 +44666,8 @@
         </p:nvSpPr>
         <p:spPr>
           <a:xfrm>
-            <a:off x="5303520" y="2628138"/>
-            <a:ext cx="3246120" cy="237744"/>
+            <a:off x="5303520" y="2719578"/>
+            <a:ext cx="3246120" cy="256032"/>
           </a:xfrm>
           <a:prstGeom prst="rect">
             <a:avLst/>
@@ -44737,41 +44686,16 @@
               <a:buNone/>
             </a:pPr>
             <a:r>
-              <a:rPr lang="en-US" sz="1100" dirty="0">
-                <a:solidFill>
-                  <a:srgbClr val="6B6B6B"/>
+              <a:rPr lang="en-US" sz="1250" b="1" dirty="0">
+                <a:solidFill>
+                  <a:srgbClr val="2D2D2D"/>
                 </a:solidFill>
                 <a:latin typeface="微软雅黑" pitchFamily="34" charset="0"/>
                 <a:ea typeface="微软雅黑" pitchFamily="34" charset="-122"/>
                 <a:cs typeface="微软雅黑" pitchFamily="34" charset="-120"/>
               </a:rPr>
-              <a:t>字库里没有汉字，只能写英文字母和符号</a:t>
-            </a:r>
-            <a:endParaRPr lang="en-US" sz="1100" dirty="0"/>
-          </a:p>
-        </p:txBody>
-      </p:sp>
-      <p:sp>
-        <p:nvSpPr>
-          <p:cNvPr id="40" name="Text 32"/>
-          <p:cNvSpPr txBox="1"/>
-          <p:nvPr/>
-        </p:nvSpPr>
-        <p:spPr>
-          <a:xfrm>
-            <a:off x="5303520" y="2957322"/>
-            <a:ext cx="3246120" cy="256032"/>
-          </a:xfrm>
-          <a:prstGeom prst="rect">
-            <a:avLst/>
-          </a:prstGeom>
-          <a:noFill/>
-          <a:ln/>
-        </p:spPr>
-        <p:txBody>
-          <a:bodyPr wrap="square" lIns="0" tIns="0" rIns="0" bIns="0" rtlCol="0" anchor="ctr"/>
-          <a:lstStyle/>
-          <a:p>
+              <a:t>挑战 2　</a:t>
+            </a:r>
             <a:pPr algn="l" indent="0" marL="0">
               <a:lnSpc>
                 <a:spcPct val="115000"/>
@@ -44779,7 +44703,7 @@
               <a:buNone/>
             </a:pPr>
             <a:r>
-              <a:rPr lang="en-US" sz="1250" b="1" dirty="0">
+              <a:rPr lang="en-US" sz="1250" dirty="0">
                 <a:solidFill>
                   <a:srgbClr val="2D2D2D"/>
                 </a:solidFill>
@@ -44787,23 +44711,6 @@
                 <a:ea typeface="微软雅黑" pitchFamily="34" charset="-122"/>
                 <a:cs typeface="微软雅黑" pitchFamily="34" charset="-120"/>
               </a:rPr>
-              <a:t>挑战 2　</a:t>
-            </a:r>
-            <a:pPr algn="l" indent="0" marL="0">
-              <a:lnSpc>
-                <a:spcPct val="115000"/>
-              </a:lnSpc>
-              <a:buNone/>
-            </a:pPr>
-            <a:r>
-              <a:rPr lang="en-US" sz="1250" dirty="0">
-                <a:solidFill>
-                  <a:srgbClr val="2D2D2D"/>
-                </a:solidFill>
-                <a:latin typeface="微软雅黑" pitchFamily="34" charset="0"/>
-                <a:ea typeface="微软雅黑" pitchFamily="34" charset="-122"/>
-                <a:cs typeface="微软雅黑" pitchFamily="34" charset="-120"/>
-              </a:rPr>
               <a:t>做个秒表：把 loop() 改成</a:t>
             </a:r>
             <a:endParaRPr lang="en-US" sz="1250" dirty="0"/>
@@ -44812,18 +44719,18 @@
       </p:sp>
       <p:sp>
         <p:nvSpPr>
-          <p:cNvPr id="41" name="Shape 33"/>
+          <p:cNvPr id="40" name="Shape 32"/>
           <p:cNvSpPr/>
           <p:nvPr/>
         </p:nvSpPr>
         <p:spPr>
           <a:xfrm>
-            <a:off x="5303520" y="3249930"/>
-            <a:ext cx="3246120" cy="1303020"/>
+            <a:off x="5303520" y="3012186"/>
+            <a:ext cx="3246120" cy="1116330"/>
           </a:xfrm>
           <a:prstGeom prst="roundRect">
             <a:avLst>
-              <a:gd name="adj" fmla="val 5614"/>
+              <a:gd name="adj" fmla="val 6553"/>
             </a:avLst>
           </a:prstGeom>
           <a:solidFill>
@@ -44839,13 +44746,13 @@
       </p:sp>
       <p:sp>
         <p:nvSpPr>
-          <p:cNvPr id="42" name="Text 34"/>
-          <p:cNvSpPr txBox="1"/>
-          <p:nvPr/>
-        </p:nvSpPr>
-        <p:spPr>
-          <a:xfrm>
-            <a:off x="5449824" y="3341370"/>
+          <p:cNvPr id="41" name="Text 33"/>
+          <p:cNvSpPr txBox="1"/>
+          <p:nvPr/>
+        </p:nvSpPr>
+        <p:spPr>
+          <a:xfrm>
+            <a:off x="5449824" y="3103626"/>
             <a:ext cx="2953512" cy="186690"/>
           </a:xfrm>
           <a:prstGeom prst="rect">
@@ -44898,7 +44805,7 @@
                 <a:ea typeface="Consolas" pitchFamily="34" charset="-122"/>
                 <a:cs typeface="Consolas" pitchFamily="34" charset="-120"/>
               </a:rPr>
-              <a:t>()</a:t>
+              <a:t>() {</a:t>
             </a:r>
             <a:endParaRPr lang="en-US" sz="1050" dirty="0"/>
           </a:p>
@@ -44906,52 +44813,13 @@
       </p:sp>
       <p:sp>
         <p:nvSpPr>
-          <p:cNvPr id="43" name="Text 35"/>
-          <p:cNvSpPr txBox="1"/>
-          <p:nvPr/>
-        </p:nvSpPr>
-        <p:spPr>
-          <a:xfrm>
-            <a:off x="5449824" y="3528060"/>
-            <a:ext cx="2953512" cy="186690"/>
-          </a:xfrm>
-          <a:prstGeom prst="rect">
-            <a:avLst/>
-          </a:prstGeom>
-          <a:noFill/>
-          <a:ln/>
-        </p:spPr>
-        <p:txBody>
-          <a:bodyPr wrap="square" lIns="0" tIns="0" rIns="0" bIns="0" rtlCol="0" anchor="ctr"/>
-          <a:lstStyle/>
-          <a:p>
-            <a:pPr indent="0" marL="0">
-              <a:buNone/>
-            </a:pPr>
-            <a:r>
-              <a:rPr lang="en-US" sz="1050" dirty="0">
-                <a:solidFill>
-                  <a:srgbClr val="BDBDBD"/>
-                </a:solidFill>
-                <a:latin typeface="Consolas" pitchFamily="34" charset="0"/>
-                <a:ea typeface="Consolas" pitchFamily="34" charset="-122"/>
-                <a:cs typeface="Consolas" pitchFamily="34" charset="-120"/>
-              </a:rPr>
-              <a:t>{</a:t>
-            </a:r>
-            <a:endParaRPr lang="en-US" sz="1050" dirty="0"/>
-          </a:p>
-        </p:txBody>
-      </p:sp>
-      <p:sp>
-        <p:nvSpPr>
-          <p:cNvPr id="44" name="Shape 36"/>
+          <p:cNvPr id="42" name="Shape 34"/>
           <p:cNvSpPr/>
           <p:nvPr/>
         </p:nvSpPr>
         <p:spPr>
           <a:xfrm>
-            <a:off x="5349240" y="3714750"/>
+            <a:off x="5349240" y="3290316"/>
             <a:ext cx="3154680" cy="186690"/>
           </a:xfrm>
           <a:prstGeom prst="rect">
@@ -44970,13 +44838,13 @@
       </p:sp>
       <p:sp>
         <p:nvSpPr>
-          <p:cNvPr id="45" name="Text 37"/>
-          <p:cNvSpPr txBox="1"/>
-          <p:nvPr/>
-        </p:nvSpPr>
-        <p:spPr>
-          <a:xfrm>
-            <a:off x="5449824" y="3714750"/>
+          <p:cNvPr id="43" name="Text 35"/>
+          <p:cNvSpPr txBox="1"/>
+          <p:nvPr/>
+        </p:nvSpPr>
+        <p:spPr>
+          <a:xfrm>
+            <a:off x="5449824" y="3290316"/>
             <a:ext cx="2953512" cy="186690"/>
           </a:xfrm>
           <a:prstGeom prst="rect">
@@ -45107,13 +44975,13 @@
       </p:sp>
       <p:sp>
         <p:nvSpPr>
-          <p:cNvPr id="46" name="Shape 38"/>
+          <p:cNvPr id="44" name="Shape 36"/>
           <p:cNvSpPr/>
           <p:nvPr/>
         </p:nvSpPr>
         <p:spPr>
           <a:xfrm>
-            <a:off x="5349240" y="3901440"/>
+            <a:off x="5349240" y="3477006"/>
             <a:ext cx="3154680" cy="186690"/>
           </a:xfrm>
           <a:prstGeom prst="rect">
@@ -45132,13 +45000,13 @@
       </p:sp>
       <p:sp>
         <p:nvSpPr>
-          <p:cNvPr id="47" name="Text 39"/>
-          <p:cNvSpPr txBox="1"/>
-          <p:nvPr/>
-        </p:nvSpPr>
-        <p:spPr>
-          <a:xfrm>
-            <a:off x="5449824" y="3901440"/>
+          <p:cNvPr id="45" name="Text 37"/>
+          <p:cNvSpPr txBox="1"/>
+          <p:nvPr/>
+        </p:nvSpPr>
+        <p:spPr>
+          <a:xfrm>
+            <a:off x="5449824" y="3477006"/>
             <a:ext cx="2953512" cy="186690"/>
           </a:xfrm>
           <a:prstGeom prst="rect">
@@ -45269,13 +45137,13 @@
       </p:sp>
       <p:sp>
         <p:nvSpPr>
-          <p:cNvPr id="48" name="Shape 40"/>
+          <p:cNvPr id="46" name="Shape 38"/>
           <p:cNvSpPr/>
           <p:nvPr/>
         </p:nvSpPr>
         <p:spPr>
           <a:xfrm>
-            <a:off x="5349240" y="4088130"/>
+            <a:off x="5349240" y="3663696"/>
             <a:ext cx="3154680" cy="186690"/>
           </a:xfrm>
           <a:prstGeom prst="rect">
@@ -45294,147 +45162,147 @@
       </p:sp>
       <p:sp>
         <p:nvSpPr>
+          <p:cNvPr id="47" name="Text 39"/>
+          <p:cNvSpPr txBox="1"/>
+          <p:nvPr/>
+        </p:nvSpPr>
+        <p:spPr>
+          <a:xfrm>
+            <a:off x="5449824" y="3663696"/>
+            <a:ext cx="2953512" cy="186690"/>
+          </a:xfrm>
+          <a:prstGeom prst="rect">
+            <a:avLst/>
+          </a:prstGeom>
+          <a:noFill/>
+          <a:ln/>
+        </p:spPr>
+        <p:txBody>
+          <a:bodyPr wrap="square" lIns="0" tIns="0" rIns="0" bIns="0" rtlCol="0" anchor="ctr"/>
+          <a:lstStyle/>
+          <a:p>
+            <a:pPr indent="0" marL="0">
+              <a:buNone/>
+            </a:pPr>
+            <a:r>
+              <a:rPr lang="en-US" sz="1050" dirty="0">
+                <a:solidFill>
+                  <a:srgbClr val="D9D9D9"/>
+                </a:solidFill>
+                <a:latin typeface="Consolas" pitchFamily="34" charset="0"/>
+                <a:ea typeface="Consolas" pitchFamily="34" charset="-122"/>
+                <a:cs typeface="Consolas" pitchFamily="34" charset="-120"/>
+              </a:rPr>
+              <a:t>  </a:t>
+            </a:r>
+            <a:pPr indent="0" marL="0">
+              <a:buNone/>
+            </a:pPr>
+            <a:r>
+              <a:rPr lang="en-US" sz="1050" b="1" dirty="0">
+                <a:solidFill>
+                  <a:srgbClr val="FFFFFF"/>
+                </a:solidFill>
+                <a:latin typeface="Consolas" pitchFamily="34" charset="0"/>
+                <a:ea typeface="Consolas" pitchFamily="34" charset="-122"/>
+                <a:cs typeface="Consolas" pitchFamily="34" charset="-120"/>
+              </a:rPr>
+              <a:t>delay</a:t>
+            </a:r>
+            <a:pPr indent="0" marL="0">
+              <a:buNone/>
+            </a:pPr>
+            <a:r>
+              <a:rPr lang="en-US" sz="1050" dirty="0">
+                <a:solidFill>
+                  <a:srgbClr val="BDBDBD"/>
+                </a:solidFill>
+                <a:latin typeface="Consolas" pitchFamily="34" charset="0"/>
+                <a:ea typeface="Consolas" pitchFamily="34" charset="-122"/>
+                <a:cs typeface="Consolas" pitchFamily="34" charset="-120"/>
+              </a:rPr>
+              <a:t>(</a:t>
+            </a:r>
+            <a:pPr indent="0" marL="0">
+              <a:buNone/>
+            </a:pPr>
+            <a:r>
+              <a:rPr lang="en-US" sz="1050" dirty="0">
+                <a:solidFill>
+                  <a:srgbClr val="F7C873"/>
+                </a:solidFill>
+                <a:latin typeface="Consolas" pitchFamily="34" charset="0"/>
+                <a:ea typeface="Consolas" pitchFamily="34" charset="-122"/>
+                <a:cs typeface="Consolas" pitchFamily="34" charset="-120"/>
+              </a:rPr>
+              <a:t>200</a:t>
+            </a:r>
+            <a:pPr indent="0" marL="0">
+              <a:buNone/>
+            </a:pPr>
+            <a:r>
+              <a:rPr lang="en-US" sz="1050" dirty="0">
+                <a:solidFill>
+                  <a:srgbClr val="BDBDBD"/>
+                </a:solidFill>
+                <a:latin typeface="Consolas" pitchFamily="34" charset="0"/>
+                <a:ea typeface="Consolas" pitchFamily="34" charset="-122"/>
+                <a:cs typeface="Consolas" pitchFamily="34" charset="-120"/>
+              </a:rPr>
+              <a:t>);</a:t>
+            </a:r>
+            <a:endParaRPr lang="en-US" sz="1050" dirty="0"/>
+          </a:p>
+        </p:txBody>
+      </p:sp>
+      <p:sp>
+        <p:nvSpPr>
+          <p:cNvPr id="48" name="Text 40"/>
+          <p:cNvSpPr txBox="1"/>
+          <p:nvPr/>
+        </p:nvSpPr>
+        <p:spPr>
+          <a:xfrm>
+            <a:off x="5449824" y="3850386"/>
+            <a:ext cx="2953512" cy="186690"/>
+          </a:xfrm>
+          <a:prstGeom prst="rect">
+            <a:avLst/>
+          </a:prstGeom>
+          <a:noFill/>
+          <a:ln/>
+        </p:spPr>
+        <p:txBody>
+          <a:bodyPr wrap="square" lIns="0" tIns="0" rIns="0" bIns="0" rtlCol="0" anchor="ctr"/>
+          <a:lstStyle/>
+          <a:p>
+            <a:pPr indent="0" marL="0">
+              <a:buNone/>
+            </a:pPr>
+            <a:r>
+              <a:rPr lang="en-US" sz="1050" dirty="0">
+                <a:solidFill>
+                  <a:srgbClr val="BDBDBD"/>
+                </a:solidFill>
+                <a:latin typeface="Consolas" pitchFamily="34" charset="0"/>
+                <a:ea typeface="Consolas" pitchFamily="34" charset="-122"/>
+                <a:cs typeface="Consolas" pitchFamily="34" charset="-120"/>
+              </a:rPr>
+              <a:t>}</a:t>
+            </a:r>
+            <a:endParaRPr lang="en-US" sz="1050" dirty="0"/>
+          </a:p>
+        </p:txBody>
+      </p:sp>
+      <p:sp>
+        <p:nvSpPr>
           <p:cNvPr id="49" name="Text 41"/>
           <p:cNvSpPr txBox="1"/>
           <p:nvPr/>
         </p:nvSpPr>
         <p:spPr>
           <a:xfrm>
-            <a:off x="5449824" y="4088130"/>
-            <a:ext cx="2953512" cy="186690"/>
-          </a:xfrm>
-          <a:prstGeom prst="rect">
-            <a:avLst/>
-          </a:prstGeom>
-          <a:noFill/>
-          <a:ln/>
-        </p:spPr>
-        <p:txBody>
-          <a:bodyPr wrap="square" lIns="0" tIns="0" rIns="0" bIns="0" rtlCol="0" anchor="ctr"/>
-          <a:lstStyle/>
-          <a:p>
-            <a:pPr indent="0" marL="0">
-              <a:buNone/>
-            </a:pPr>
-            <a:r>
-              <a:rPr lang="en-US" sz="1050" dirty="0">
-                <a:solidFill>
-                  <a:srgbClr val="D9D9D9"/>
-                </a:solidFill>
-                <a:latin typeface="Consolas" pitchFamily="34" charset="0"/>
-                <a:ea typeface="Consolas" pitchFamily="34" charset="-122"/>
-                <a:cs typeface="Consolas" pitchFamily="34" charset="-120"/>
-              </a:rPr>
-              <a:t>  </a:t>
-            </a:r>
-            <a:pPr indent="0" marL="0">
-              <a:buNone/>
-            </a:pPr>
-            <a:r>
-              <a:rPr lang="en-US" sz="1050" b="1" dirty="0">
-                <a:solidFill>
-                  <a:srgbClr val="FFFFFF"/>
-                </a:solidFill>
-                <a:latin typeface="Consolas" pitchFamily="34" charset="0"/>
-                <a:ea typeface="Consolas" pitchFamily="34" charset="-122"/>
-                <a:cs typeface="Consolas" pitchFamily="34" charset="-120"/>
-              </a:rPr>
-              <a:t>delay</a:t>
-            </a:r>
-            <a:pPr indent="0" marL="0">
-              <a:buNone/>
-            </a:pPr>
-            <a:r>
-              <a:rPr lang="en-US" sz="1050" dirty="0">
-                <a:solidFill>
-                  <a:srgbClr val="BDBDBD"/>
-                </a:solidFill>
-                <a:latin typeface="Consolas" pitchFamily="34" charset="0"/>
-                <a:ea typeface="Consolas" pitchFamily="34" charset="-122"/>
-                <a:cs typeface="Consolas" pitchFamily="34" charset="-120"/>
-              </a:rPr>
-              <a:t>(</a:t>
-            </a:r>
-            <a:pPr indent="0" marL="0">
-              <a:buNone/>
-            </a:pPr>
-            <a:r>
-              <a:rPr lang="en-US" sz="1050" dirty="0">
-                <a:solidFill>
-                  <a:srgbClr val="F7C873"/>
-                </a:solidFill>
-                <a:latin typeface="Consolas" pitchFamily="34" charset="0"/>
-                <a:ea typeface="Consolas" pitchFamily="34" charset="-122"/>
-                <a:cs typeface="Consolas" pitchFamily="34" charset="-120"/>
-              </a:rPr>
-              <a:t>200</a:t>
-            </a:r>
-            <a:pPr indent="0" marL="0">
-              <a:buNone/>
-            </a:pPr>
-            <a:r>
-              <a:rPr lang="en-US" sz="1050" dirty="0">
-                <a:solidFill>
-                  <a:srgbClr val="BDBDBD"/>
-                </a:solidFill>
-                <a:latin typeface="Consolas" pitchFamily="34" charset="0"/>
-                <a:ea typeface="Consolas" pitchFamily="34" charset="-122"/>
-                <a:cs typeface="Consolas" pitchFamily="34" charset="-120"/>
-              </a:rPr>
-              <a:t>);</a:t>
-            </a:r>
-            <a:endParaRPr lang="en-US" sz="1050" dirty="0"/>
-          </a:p>
-        </p:txBody>
-      </p:sp>
-      <p:sp>
-        <p:nvSpPr>
-          <p:cNvPr id="50" name="Text 42"/>
-          <p:cNvSpPr txBox="1"/>
-          <p:nvPr/>
-        </p:nvSpPr>
-        <p:spPr>
-          <a:xfrm>
-            <a:off x="5449824" y="4274820"/>
-            <a:ext cx="2953512" cy="186690"/>
-          </a:xfrm>
-          <a:prstGeom prst="rect">
-            <a:avLst/>
-          </a:prstGeom>
-          <a:noFill/>
-          <a:ln/>
-        </p:spPr>
-        <p:txBody>
-          <a:bodyPr wrap="square" lIns="0" tIns="0" rIns="0" bIns="0" rtlCol="0" anchor="ctr"/>
-          <a:lstStyle/>
-          <a:p>
-            <a:pPr indent="0" marL="0">
-              <a:buNone/>
-            </a:pPr>
-            <a:r>
-              <a:rPr lang="en-US" sz="1050" dirty="0">
-                <a:solidFill>
-                  <a:srgbClr val="BDBDBD"/>
-                </a:solidFill>
-                <a:latin typeface="Consolas" pitchFamily="34" charset="0"/>
-                <a:ea typeface="Consolas" pitchFamily="34" charset="-122"/>
-                <a:cs typeface="Consolas" pitchFamily="34" charset="-120"/>
-              </a:rPr>
-              <a:t>}</a:t>
-            </a:r>
-            <a:endParaRPr lang="en-US" sz="1050" dirty="0"/>
-          </a:p>
-        </p:txBody>
-      </p:sp>
-      <p:sp>
-        <p:nvSpPr>
-          <p:cNvPr id="51" name="Text 43"/>
-          <p:cNvSpPr txBox="1"/>
-          <p:nvPr/>
-        </p:nvSpPr>
-        <p:spPr>
-          <a:xfrm>
-            <a:off x="5303520" y="4607814"/>
+            <a:off x="5303520" y="4183380"/>
             <a:ext cx="3246120" cy="237744"/>
           </a:xfrm>
           <a:prstGeom prst="rect">
@@ -45823,7 +45691,7 @@
         </p:nvSpPr>
         <p:spPr>
           <a:xfrm>
-            <a:off x="411480" y="2203704"/>
+            <a:off x="411480" y="2167128"/>
             <a:ext cx="292608" cy="292608"/>
           </a:xfrm>
           <a:prstGeom prst="ellipse">
@@ -45848,7 +45716,7 @@
         </p:nvSpPr>
         <p:spPr>
           <a:xfrm>
-            <a:off x="411480" y="2203704"/>
+            <a:off x="411480" y="2167128"/>
             <a:ext cx="292608" cy="292608"/>
           </a:xfrm>
           <a:prstGeom prst="rect">
@@ -45890,7 +45758,7 @@
         </p:nvSpPr>
         <p:spPr>
           <a:xfrm>
-            <a:off x="832104" y="2236502"/>
+            <a:off x="832104" y="2199926"/>
             <a:ext cx="3328416" cy="245301"/>
           </a:xfrm>
           <a:prstGeom prst="rect">
@@ -45949,7 +45817,7 @@
         </p:nvSpPr>
         <p:spPr>
           <a:xfrm>
-            <a:off x="411480" y="2715768"/>
+            <a:off x="411480" y="2642616"/>
             <a:ext cx="292608" cy="292608"/>
           </a:xfrm>
           <a:prstGeom prst="ellipse">
@@ -45974,7 +45842,7 @@
         </p:nvSpPr>
         <p:spPr>
           <a:xfrm>
-            <a:off x="411480" y="2715768"/>
+            <a:off x="411480" y="2642616"/>
             <a:ext cx="292608" cy="292608"/>
           </a:xfrm>
           <a:prstGeom prst="rect">
@@ -46016,7 +45884,7 @@
         </p:nvSpPr>
         <p:spPr>
           <a:xfrm>
-            <a:off x="832104" y="2748566"/>
+            <a:off x="832104" y="2675414"/>
             <a:ext cx="3328416" cy="245301"/>
           </a:xfrm>
           <a:prstGeom prst="rect">
@@ -46109,7 +45977,7 @@
         </p:nvSpPr>
         <p:spPr>
           <a:xfrm>
-            <a:off x="411480" y="3227832"/>
+            <a:off x="411480" y="3118104"/>
             <a:ext cx="292608" cy="292608"/>
           </a:xfrm>
           <a:prstGeom prst="ellipse">
@@ -46134,7 +46002,7 @@
         </p:nvSpPr>
         <p:spPr>
           <a:xfrm>
-            <a:off x="411480" y="3227832"/>
+            <a:off x="411480" y="3118104"/>
             <a:ext cx="292608" cy="292608"/>
           </a:xfrm>
           <a:prstGeom prst="rect">
@@ -46176,7 +46044,7 @@
         </p:nvSpPr>
         <p:spPr>
           <a:xfrm>
-            <a:off x="832104" y="3260630"/>
+            <a:off x="832104" y="3150902"/>
             <a:ext cx="3328416" cy="245301"/>
           </a:xfrm>
           <a:prstGeom prst="rect">
@@ -46269,12 +46137,12 @@
         </p:nvSpPr>
         <p:spPr>
           <a:xfrm>
-            <a:off x="411480" y="3794760"/>
-            <a:ext cx="3749040" cy="777240"/>
+            <a:off x="411480" y="3685032"/>
+            <a:ext cx="3749040" cy="886968"/>
           </a:xfrm>
           <a:prstGeom prst="roundRect">
             <a:avLst>
-              <a:gd name="adj" fmla="val 14118"/>
+              <a:gd name="adj" fmla="val 12371"/>
             </a:avLst>
           </a:prstGeom>
           <a:solidFill>
@@ -46296,7 +46164,7 @@
         </p:nvSpPr>
         <p:spPr>
           <a:xfrm>
-            <a:off x="557784" y="4009644"/>
+            <a:off x="557784" y="3954780"/>
             <a:ext cx="347472" cy="347472"/>
           </a:xfrm>
           <a:prstGeom prst="ellipse">
@@ -46329,7 +46197,7 @@
         </p:blipFill>
         <p:spPr>
           <a:xfrm>
-            <a:off x="641177" y="4093037"/>
+            <a:off x="641177" y="4038173"/>
             <a:ext cx="180685" cy="180685"/>
           </a:xfrm>
           <a:prstGeom prst="rect">
@@ -46345,8 +46213,8 @@
         </p:nvSpPr>
         <p:spPr>
           <a:xfrm>
-            <a:off x="1014984" y="3794760"/>
-            <a:ext cx="3017520" cy="777240"/>
+            <a:off x="1014984" y="3685032"/>
+            <a:ext cx="3017520" cy="886968"/>
           </a:xfrm>
           <a:prstGeom prst="rect">
             <a:avLst/>
@@ -46373,8 +46241,11 @@
                 <a:ea typeface="微软雅黑" pitchFamily="34" charset="-122"/>
                 <a:cs typeface="微软雅黑" pitchFamily="34" charset="-120"/>
               </a:rPr>
-              <a:t>排错口诀　</a:t>
-            </a:r>
+              <a:t>排错口诀</a:t>
+            </a:r>
+            <a:endParaRPr lang="en-US" sz="1250" dirty="0"/>
+          </a:p>
+          <a:p>
             <a:pPr algn="l" indent="0" marL="0">
               <a:lnSpc>
                 <a:spcPct val="115000"/>
@@ -46390,7 +46261,27 @@
                 <a:ea typeface="微软雅黑" pitchFamily="34" charset="-122"/>
                 <a:cs typeface="微软雅黑" pitchFamily="34" charset="-120"/>
               </a:rPr>
-              <a:t>编译报错先查库，没反应先查线和地址。</a:t>
+              <a:t>编译报错 → 先查库</a:t>
+            </a:r>
+            <a:endParaRPr lang="en-US" sz="1250" dirty="0"/>
+          </a:p>
+          <a:p>
+            <a:pPr algn="l" indent="0" marL="0">
+              <a:lnSpc>
+                <a:spcPct val="115000"/>
+              </a:lnSpc>
+              <a:buNone/>
+            </a:pPr>
+            <a:r>
+              <a:rPr lang="en-US" sz="1250" dirty="0">
+                <a:solidFill>
+                  <a:srgbClr val="2D2D2D"/>
+                </a:solidFill>
+                <a:latin typeface="微软雅黑" pitchFamily="34" charset="0"/>
+                <a:ea typeface="微软雅黑" pitchFamily="34" charset="-122"/>
+                <a:cs typeface="微软雅黑" pitchFamily="34" charset="-120"/>
+              </a:rPr>
+              <a:t>没有反应 → 先查线和地址</a:t>
             </a:r>
             <a:endParaRPr lang="en-US" sz="1250" dirty="0"/>
           </a:p>
@@ -46471,7 +46362,7 @@
         </p:nvSpPr>
         <p:spPr>
           <a:xfrm>
-            <a:off x="4636008" y="1725930"/>
+            <a:off x="4636008" y="1935480"/>
             <a:ext cx="1746504" cy="310896"/>
           </a:xfrm>
           <a:prstGeom prst="rect">
@@ -46513,8 +46404,8 @@
         </p:nvSpPr>
         <p:spPr>
           <a:xfrm>
-            <a:off x="4636008" y="2073402"/>
-            <a:ext cx="1746504" cy="628650"/>
+            <a:off x="4636008" y="2282952"/>
+            <a:ext cx="1746504" cy="419100"/>
           </a:xfrm>
           <a:prstGeom prst="rect">
             <a:avLst/>
@@ -46642,7 +46533,7 @@
         </p:nvSpPr>
         <p:spPr>
           <a:xfrm>
-            <a:off x="6784848" y="1725930"/>
+            <a:off x="6784848" y="1935480"/>
             <a:ext cx="1746504" cy="310896"/>
           </a:xfrm>
           <a:prstGeom prst="rect">
@@ -46684,8 +46575,8 @@
         </p:nvSpPr>
         <p:spPr>
           <a:xfrm>
-            <a:off x="6784848" y="2073402"/>
-            <a:ext cx="1746504" cy="628650"/>
+            <a:off x="6784848" y="2282952"/>
+            <a:ext cx="1746504" cy="419100"/>
           </a:xfrm>
           <a:prstGeom prst="rect">
             <a:avLst/>
@@ -46712,7 +46603,7 @@
                 <a:ea typeface="微软雅黑" pitchFamily="34" charset="-122"/>
                 <a:cs typeface="微软雅黑" pitchFamily="34" charset="-120"/>
               </a:rPr>
-              <a:t>setPixelColor 只写草稿，</a:t>
+              <a:t>setPixelColor 写草稿</a:t>
             </a:r>
             <a:endParaRPr lang="en-US" sz="1200" dirty="0"/>
           </a:p>
@@ -46732,7 +46623,7 @@
                 <a:ea typeface="微软雅黑" pitchFamily="34" charset="-122"/>
                 <a:cs typeface="微软雅黑" pitchFamily="34" charset="-120"/>
               </a:rPr>
-              <a:t>show 才发出去</a:t>
+              <a:t>show() 才寄出</a:t>
             </a:r>
             <a:endParaRPr lang="en-US" sz="1200" dirty="0"/>
           </a:p>
@@ -48376,9 +48267,9 @@
             <a:tbl>
               <a:tblPr/>
               <a:tblGrid>
-                <a:gridCol w="868680"/>
-                <a:gridCol w="1463040"/>
-                <a:gridCol w="1463040"/>
+                <a:gridCol w="804672"/>
+                <a:gridCol w="1618488"/>
+                <a:gridCol w="1371600"/>
               </a:tblGrid>
               <a:tr h="310896">
                 <a:tc>
@@ -49206,11 +49097,11 @@
         <p:spPr>
           <a:xfrm>
             <a:off x="4480560" y="1234440"/>
-            <a:ext cx="4251960" cy="1874520"/>
+            <a:ext cx="4251960" cy="1810512"/>
           </a:xfrm>
           <a:prstGeom prst="roundRect">
             <a:avLst>
-              <a:gd name="adj" fmla="val 5854"/>
+              <a:gd name="adj" fmla="val 6061"/>
             </a:avLst>
           </a:prstGeom>
           <a:solidFill>
@@ -49240,8 +49131,8 @@
         </p:blipFill>
         <p:spPr>
           <a:xfrm>
-            <a:off x="4798657" y="1344168"/>
-            <a:ext cx="3615767" cy="1655064"/>
+            <a:off x="4868575" y="1344168"/>
+            <a:ext cx="3475931" cy="1591056"/>
           </a:xfrm>
           <a:prstGeom prst="rect">
             <a:avLst/>
@@ -49256,12 +49147,12 @@
         </p:nvSpPr>
         <p:spPr>
           <a:xfrm>
-            <a:off x="4480560" y="3383280"/>
-            <a:ext cx="4251960" cy="1188720"/>
+            <a:off x="4480560" y="3319272"/>
+            <a:ext cx="4251960" cy="1252728"/>
           </a:xfrm>
           <a:prstGeom prst="roundRect">
             <a:avLst>
-              <a:gd name="adj" fmla="val 9231"/>
+              <a:gd name="adj" fmla="val 8759"/>
             </a:avLst>
           </a:prstGeom>
           <a:solidFill>
@@ -49283,7 +49174,7 @@
         </p:nvSpPr>
         <p:spPr>
           <a:xfrm>
-            <a:off x="4645152" y="3493008"/>
+            <a:off x="4645152" y="3429000"/>
             <a:ext cx="3922776" cy="274320"/>
           </a:xfrm>
           <a:prstGeom prst="rect">
@@ -49325,8 +49216,8 @@
         </p:nvSpPr>
         <p:spPr>
           <a:xfrm>
-            <a:off x="4645152" y="3867912"/>
-            <a:ext cx="256032" cy="256032"/>
+            <a:off x="4645152" y="3840480"/>
+            <a:ext cx="237744" cy="237744"/>
           </a:xfrm>
           <a:prstGeom prst="ellipse">
             <a:avLst/>
@@ -49358,8 +49249,8 @@
         </p:blipFill>
         <p:spPr>
           <a:xfrm>
-            <a:off x="4706600" y="3929360"/>
-            <a:ext cx="133137" cy="133137"/>
+            <a:off x="4702211" y="3897539"/>
+            <a:ext cx="123627" cy="123627"/>
           </a:xfrm>
           <a:prstGeom prst="rect">
             <a:avLst/>
@@ -49374,8 +49265,8 @@
         </p:nvSpPr>
         <p:spPr>
           <a:xfrm>
-            <a:off x="4992624" y="3858768"/>
-            <a:ext cx="2103120" cy="274320"/>
+            <a:off x="4974336" y="3794760"/>
+            <a:ext cx="2121408" cy="329184"/>
           </a:xfrm>
           <a:prstGeom prst="rect">
             <a:avLst/>
@@ -49416,8 +49307,8 @@
         </p:nvSpPr>
         <p:spPr>
           <a:xfrm>
-            <a:off x="4645152" y="4142232"/>
-            <a:ext cx="256032" cy="256032"/>
+            <a:off x="4645152" y="4169664"/>
+            <a:ext cx="237744" cy="237744"/>
           </a:xfrm>
           <a:prstGeom prst="ellipse">
             <a:avLst/>
@@ -49449,8 +49340,8 @@
         </p:blipFill>
         <p:spPr>
           <a:xfrm>
-            <a:off x="4706600" y="4203680"/>
-            <a:ext cx="133137" cy="133137"/>
+            <a:off x="4702211" y="4226723"/>
+            <a:ext cx="123627" cy="123627"/>
           </a:xfrm>
           <a:prstGeom prst="rect">
             <a:avLst/>
@@ -49465,8 +49356,8 @@
         </p:nvSpPr>
         <p:spPr>
           <a:xfrm>
-            <a:off x="4992624" y="4133088"/>
-            <a:ext cx="2103120" cy="274320"/>
+            <a:off x="4974336" y="4123944"/>
+            <a:ext cx="2121408" cy="329184"/>
           </a:xfrm>
           <a:prstGeom prst="rect">
             <a:avLst/>
@@ -49507,8 +49398,8 @@
         </p:nvSpPr>
         <p:spPr>
           <a:xfrm>
-            <a:off x="7132320" y="3867912"/>
-            <a:ext cx="256032" cy="256032"/>
+            <a:off x="7132320" y="3840480"/>
+            <a:ext cx="237744" cy="237744"/>
           </a:xfrm>
           <a:prstGeom prst="ellipse">
             <a:avLst/>
@@ -49540,8 +49431,8 @@
         </p:blipFill>
         <p:spPr>
           <a:xfrm>
-            <a:off x="7193768" y="3929360"/>
-            <a:ext cx="133137" cy="133137"/>
+            <a:off x="7189379" y="3897539"/>
+            <a:ext cx="123627" cy="123627"/>
           </a:xfrm>
           <a:prstGeom prst="rect">
             <a:avLst/>
@@ -49556,8 +49447,8 @@
         </p:nvSpPr>
         <p:spPr>
           <a:xfrm>
-            <a:off x="7479792" y="3858768"/>
-            <a:ext cx="1051560" cy="274320"/>
+            <a:off x="7461504" y="3794760"/>
+            <a:ext cx="1069848" cy="329184"/>
           </a:xfrm>
           <a:prstGeom prst="rect">
             <a:avLst/>
@@ -49598,8 +49489,8 @@
         </p:nvSpPr>
         <p:spPr>
           <a:xfrm>
-            <a:off x="7132320" y="4142232"/>
-            <a:ext cx="256032" cy="256032"/>
+            <a:off x="7132320" y="4169664"/>
+            <a:ext cx="237744" cy="237744"/>
           </a:xfrm>
           <a:prstGeom prst="ellipse">
             <a:avLst/>
@@ -49631,8 +49522,8 @@
         </p:blipFill>
         <p:spPr>
           <a:xfrm>
-            <a:off x="7193768" y="4203680"/>
-            <a:ext cx="133137" cy="133137"/>
+            <a:off x="7189379" y="4226723"/>
+            <a:ext cx="123627" cy="123627"/>
           </a:xfrm>
           <a:prstGeom prst="rect">
             <a:avLst/>
@@ -49647,8 +49538,8 @@
         </p:nvSpPr>
         <p:spPr>
           <a:xfrm>
-            <a:off x="7479792" y="4133088"/>
-            <a:ext cx="1051560" cy="274320"/>
+            <a:off x="7461504" y="4123944"/>
+            <a:ext cx="1069848" cy="329184"/>
           </a:xfrm>
           <a:prstGeom prst="rect">
             <a:avLst/>
@@ -57859,6 +57750,9 @@
               </a:rPr>
               <a:t>”读作“的”：pixels 的 show 功能。</a:t>
             </a:r>
+            <a:endParaRPr lang="en-US" sz="1200" dirty="0"/>
+          </a:p>
+          <a:p>
             <a:pPr algn="l" indent="0" marL="0">
               <a:lnSpc>
                 <a:spcPct val="115000"/>
@@ -57874,7 +57768,7 @@
                 <a:ea typeface="微软雅黑" pitchFamily="34" charset="-122"/>
                 <a:cs typeface="微软雅黑" pitchFamily="34" charset="-120"/>
               </a:rPr>
-              <a:t>后面还会用到 setPixelColor()、setBrightness()。</a:t>
+              <a:t>后面还有 setPixelColor() 等命令。</a:t>
             </a:r>
             <a:endParaRPr lang="en-US" sz="1200" dirty="0"/>
           </a:p>
@@ -59007,11 +58901,11 @@
         <p:spPr>
           <a:xfrm>
             <a:off x="4892040" y="1234440"/>
-            <a:ext cx="3840480" cy="1691640"/>
+            <a:ext cx="3840480" cy="1737360"/>
           </a:xfrm>
           <a:prstGeom prst="roundRect">
             <a:avLst>
-              <a:gd name="adj" fmla="val 6486"/>
+              <a:gd name="adj" fmla="val 6316"/>
             </a:avLst>
           </a:prstGeom>
           <a:solidFill>
@@ -59376,7 +59270,7 @@
         </p:nvSpPr>
         <p:spPr>
           <a:xfrm>
-            <a:off x="5111496" y="2606040"/>
+            <a:off x="5111496" y="2633472"/>
             <a:ext cx="3474720" cy="237744"/>
           </a:xfrm>
           <a:prstGeom prst="rect">
@@ -59418,12 +59312,12 @@
         </p:nvSpPr>
         <p:spPr>
           <a:xfrm>
-            <a:off x="4892040" y="3200400"/>
-            <a:ext cx="3840480" cy="1371600"/>
+            <a:off x="4892040" y="3246120"/>
+            <a:ext cx="3840480" cy="1325880"/>
           </a:xfrm>
           <a:prstGeom prst="roundRect">
             <a:avLst>
-              <a:gd name="adj" fmla="val 8000"/>
+              <a:gd name="adj" fmla="val 8276"/>
             </a:avLst>
           </a:prstGeom>
           <a:solidFill>
@@ -59445,7 +59339,7 @@
         </p:nvSpPr>
         <p:spPr>
           <a:xfrm>
-            <a:off x="5074920" y="3328416"/>
+            <a:off x="5074920" y="3374136"/>
             <a:ext cx="329184" cy="329184"/>
           </a:xfrm>
           <a:prstGeom prst="ellipse">
@@ -59478,7 +59372,7 @@
         </p:blipFill>
         <p:spPr>
           <a:xfrm>
-            <a:off x="5153924" y="3407420"/>
+            <a:off x="5153924" y="3453140"/>
             <a:ext cx="171176" cy="171176"/>
           </a:xfrm>
           <a:prstGeom prst="rect">
@@ -59494,7 +59388,7 @@
         </p:nvSpPr>
         <p:spPr>
           <a:xfrm>
-            <a:off x="5495544" y="3328416"/>
+            <a:off x="5495544" y="3374136"/>
             <a:ext cx="3108960" cy="329184"/>
           </a:xfrm>
           <a:prstGeom prst="rect">
@@ -59536,7 +59430,7 @@
         </p:nvSpPr>
         <p:spPr>
           <a:xfrm>
-            <a:off x="5111496" y="3767328"/>
+            <a:off x="5111496" y="3776472"/>
             <a:ext cx="3401568" cy="182880"/>
           </a:xfrm>
           <a:prstGeom prst="roundRect">
@@ -59563,7 +59457,7 @@
         </p:nvSpPr>
         <p:spPr>
           <a:xfrm>
-            <a:off x="5111496" y="3767328"/>
+            <a:off x="5111496" y="3776472"/>
             <a:ext cx="400184" cy="182880"/>
           </a:xfrm>
           <a:prstGeom prst="roundRect">
@@ -59590,7 +59484,7 @@
         </p:nvSpPr>
         <p:spPr>
           <a:xfrm>
-            <a:off x="5621408" y="3730752"/>
+            <a:off x="5621408" y="3739896"/>
             <a:ext cx="1463040" cy="256032"/>
           </a:xfrm>
           <a:prstGeom prst="rect">
@@ -59632,8 +59526,8 @@
         </p:nvSpPr>
         <p:spPr>
           <a:xfrm>
-            <a:off x="5111496" y="4059936"/>
-            <a:ext cx="3438144" cy="438912"/>
+            <a:off x="5111496" y="4050792"/>
+            <a:ext cx="3438144" cy="429768"/>
           </a:xfrm>
           <a:prstGeom prst="rect">
             <a:avLst/>

--- a/arduino-ppt/output/2-3_WS2812灯环_LCD1602.pptx
+++ b/arduino-ppt/output/2-3_WS2812灯环_LCD1602.pptx
@@ -136,12 +136,12 @@
   <p:extLst>
     <p:ext uri="{521415D9-36F7-43E2-AB2F-B90AF26B5E84}">
       <p14:sectionLst xmlns:p14="http://schemas.microsoft.com/office/powerpoint/2010/main">
-        <p14:section name="导入" id="{1f79a945-5cf5-2a32-5f32-93170cf888ab}">
+        <p14:section name="导入" id="{423654f2-8d52-9ef2-8c89-bd91e0e6204d}">
           <p14:sldIdLst>
             <p14:sldId id="257"/>
           </p14:sldIdLst>
         </p14:section>
-        <p14:section name="实验一　WS2812b 灯环" id="{9b3dbcf8-43de-f5f0-9845-d4320e9d034b}">
+        <p14:section name="实验一　WS2812b 灯环" id="{5a9c4ad7-14a6-ecf6-1fcc-2a953e3bc5db}">
           <p14:sldIdLst>
             <p14:sldId id="258"/>
             <p14:sldId id="259"/>
@@ -156,7 +156,7 @@
             <p14:sldId id="268"/>
           </p14:sldIdLst>
         </p14:section>
-        <p14:section name="实验二　LCD1602 显示屏" id="{c2a6de22-af4b-9f42-655c-14be9ee8d73e}">
+        <p14:section name="实验二　LCD1602 显示屏" id="{ac8f2687-c554-09c5-2c8e-296fe6b929bb}">
           <p14:sldIdLst>
             <p14:sldId id="269"/>
             <p14:sldId id="270"/>
@@ -175,7 +175,7 @@
             <p14:sldId id="283"/>
           </p14:sldIdLst>
         </p14:section>
-        <p14:section name="小结" id="{6c7d0aa8-1557-bedf-f85c-5bda7c21bf8b}">
+        <p14:section name="小结" id="{2c940884-5fad-57a6-8de3-9ae6df4a83e4}">
           <p14:sldIdLst>
             <p14:sldId id="284"/>
             <p14:sldId id="285"/>
@@ -1113,7 +1113,7 @@
           <a:p>
             <a:r>
               <a:rPr lang="en-US" dirty="0"/>
-              <a:t>LCD1602 是最常见的字符屏，电子钟、温度计、打印机面板上都能见到。名字里的 16 和 02 分别指每行 16 个字符、一共 2 行，原指南这句话的表述有误，这里已改正。背面黑色的小板是 I2C 转接板，上面的芯片是 PCF8574（原指南误写成 PCA8574），蓝色方块是调对比度的电位器，后面排错时会用到。</a:t>
+              <a:t>LCD1602 是最常见的字符屏，电子钟、温度计、打印机面板上都能见到。名字里的 16 和 02 分别指每行 16 个字符、一共 2 行，原指南这句话的表述有误，这里已改正。背面黑色的小板是 I2C 转接板，上面的芯片是 PCF8574（原指南写的 PCA8574 是它的兼容型号，地址和用法一样），蓝色方块是调对比度的电位器，后面排错时会用到。</a:t>
             </a:r>
             <a:endParaRPr lang="en-US" dirty="0"/>
           </a:p>
@@ -2785,7 +2785,7 @@
           <a:p>
             <a:r>
               <a:rPr lang="en-US" dirty="0"/>
-              <a:t>用“传纸条”讲级联：Arduino 一口气发出 12 份颜色数据，第 1 颗灯留下第 1 份，把其余的从 D 脚传给第 2 颗，依此类推。因为每颗灯都会把信号重新“整理”一遍再转发，所以串得再长也不失真，这就是原指南说的“整形电路”。原指南写的“16 万色”有误：红、绿、蓝各 256 级，组合起来是 256×256×256，约 1677 万色。</a:t>
+              <a:t>用“传纸条”讲级联：Arduino 一口气发出 12 份颜色数据，第 1 颗灯留下第 1 份，把其余的传给第 2 颗，依此类推；灯环内部已经串好，模块上的 D 脚是第 12 颗之后的出口，留给下一个灯环。因为每颗灯都会把信号重新“整理”一遍再转发，所以串得再长也不失真，这就是原指南说的“整形电路”。原指南写的“16 万色”有误：红、绿、蓝各 256 级，组合起来是 256×256×256，约 1677 万色。</a:t>
             </a:r>
             <a:endParaRPr lang="en-US" dirty="0"/>
           </a:p>
@@ -15279,7 +15279,7 @@
                 <a:ea typeface="微软雅黑" pitchFamily="34" charset="-122"/>
                 <a:cs typeface="微软雅黑" pitchFamily="34" charset="-120"/>
               </a:rPr>
-              <a:t>PCF8574 芯片（原指南误作 PCA8574），只占 SDA、SCL 两根线。</a:t>
+              <a:t>PCF8574 芯片（原指南写 PCA8574，兼容型号），只占 SDA、SCL 两根线。</a:t>
             </a:r>
             <a:endParaRPr lang="en-US" sz="1200" dirty="0"/>
           </a:p>
@@ -49762,7 +49762,7 @@
                 <a:ea typeface="微软雅黑" pitchFamily="34" charset="-122"/>
                 <a:cs typeface="微软雅黑" pitchFamily="34" charset="-120"/>
               </a:rPr>
-              <a:t>数据从第 1 颗灯流进去，每颗灯留下属于自己的那份颜色，再把剩下的从 D 脚传给下一颗</a:t>
+              <a:t>数据从第 1 颗灯流进去，每颗灯留下属于自己的那份颜色，把剩下的传给下一颗；过了第 12 颗才从 D 脚出去</a:t>
             </a:r>
             <a:endParaRPr lang="en-US" sz="1200" dirty="0"/>
           </a:p>
